--- a/output/wordlabs-peri-3day.pptx
+++ b/output/wordlabs-peri-3day.pptx
@@ -6040,7 +6040,7 @@
                 <a:ea typeface="Calibri" pitchFamily="34" charset="-122"/>
                 <a:cs typeface="Calibri" pitchFamily="34" charset="-120"/>
               </a:rPr>
-              <a:t>We calculated the </a:t>
+              <a:t>Using a </a:t>
             </a:r>
             <a:pPr algn="l" indent="0" marL="0">
               <a:buNone/>
@@ -6057,7 +6057,7 @@
                 <a:ea typeface="Calibri" pitchFamily="34" charset="-122"/>
                 <a:cs typeface="Calibri" pitchFamily="34" charset="-120"/>
               </a:rPr>
-              <a:t>perimeter</a:t>
+              <a:t>periscope</a:t>
             </a:r>
             <a:pPr algn="l" indent="0" marL="0">
               <a:buNone/>
@@ -6071,7 +6071,7 @@
                 <a:ea typeface="Calibri" pitchFamily="34" charset="-122"/>
                 <a:cs typeface="Calibri" pitchFamily="34" charset="-120"/>
               </a:rPr>
-              <a:t> of the oval, then looked through the </a:t>
+              <a:t>, the sailors could see around the rocks, and they calculated the </a:t>
             </a:r>
             <a:pPr algn="l" indent="0" marL="0">
               <a:buNone/>
@@ -6088,7 +6088,7 @@
                 <a:ea typeface="Calibri" pitchFamily="34" charset="-122"/>
                 <a:cs typeface="Calibri" pitchFamily="34" charset="-120"/>
               </a:rPr>
-              <a:t>periscope</a:t>
+              <a:t>perimeter</a:t>
             </a:r>
             <a:pPr algn="l" indent="0" marL="0">
               <a:buNone/>
@@ -6102,7 +6102,7 @@
                 <a:ea typeface="Calibri" pitchFamily="34" charset="-122"/>
                 <a:cs typeface="Calibri" pitchFamily="34" charset="-120"/>
               </a:rPr>
-              <a:t> to see the harbour.</a:t>
+              <a:t> of the bay.</a:t>
             </a:r>
             <a:endParaRPr lang="en-US" sz="1800" dirty="0"/>
           </a:p>
@@ -6257,7 +6257,7 @@
                 <a:ea typeface="Trebuchet MS" pitchFamily="34" charset="-122"/>
                 <a:cs typeface="Trebuchet MS" pitchFamily="34" charset="-120"/>
               </a:rPr>
-              <a:t>perimeter</a:t>
+              <a:t>periscope</a:t>
             </a:r>
             <a:endParaRPr lang="en-US" sz="1400" dirty="0"/>
           </a:p>
@@ -6385,7 +6385,7 @@
                 <a:ea typeface="Trebuchet MS" pitchFamily="34" charset="-122"/>
                 <a:cs typeface="Trebuchet MS" pitchFamily="34" charset="-120"/>
               </a:rPr>
-              <a:t>periscope</a:t>
+              <a:t>perimeter</a:t>
             </a:r>
             <a:endParaRPr lang="en-US" sz="1400" dirty="0"/>
           </a:p>
@@ -6855,7 +6855,7 @@
                 <a:ea typeface="Trebuchet MS" pitchFamily="34" charset="-122"/>
                 <a:cs typeface="Trebuchet MS" pitchFamily="34" charset="-120"/>
               </a:rPr>
-              <a:t>perimeter</a:t>
+              <a:t>periscope</a:t>
             </a:r>
             <a:endParaRPr lang="en-US" sz="2800" dirty="0"/>
           </a:p>
@@ -7682,7 +7682,7 @@
                 <a:ea typeface="Trebuchet MS" pitchFamily="34" charset="-122"/>
                 <a:cs typeface="Trebuchet MS" pitchFamily="34" charset="-120"/>
               </a:rPr>
-              <a:t>perimeter</a:t>
+              <a:t>periscope</a:t>
             </a:r>
             <a:endParaRPr lang="en-US" sz="2800" dirty="0"/>
           </a:p>
@@ -7860,7 +7860,7 @@
                 <a:ea typeface="Calibri" pitchFamily="34" charset="-122"/>
                 <a:cs typeface="Calibri" pitchFamily="34" charset="-120"/>
               </a:rPr>
-              <a:t>around</a:t>
+              <a:t>around, surrounding</a:t>
             </a:r>
             <a:endParaRPr lang="en-US" sz="850" dirty="0"/>
           </a:p>
@@ -7933,7 +7933,7 @@
                 <a:ea typeface="Trebuchet MS" pitchFamily="34" charset="-122"/>
                 <a:cs typeface="Trebuchet MS" pitchFamily="34" charset="-120"/>
               </a:rPr>
-              <a:t>meter</a:t>
+              <a:t>scope</a:t>
             </a:r>
             <a:endParaRPr lang="en-US" sz="1300" dirty="0"/>
           </a:p>
@@ -7972,7 +7972,7 @@
                 <a:ea typeface="Calibri" pitchFamily="34" charset="-122"/>
                 <a:cs typeface="Calibri" pitchFamily="34" charset="-120"/>
               </a:rPr>
-              <a:t>measure</a:t>
+              <a:t>to look, see</a:t>
             </a:r>
             <a:endParaRPr lang="en-US" sz="850" dirty="0"/>
           </a:p>
@@ -8667,7 +8667,7 @@
                 <a:ea typeface="Trebuchet MS" pitchFamily="34" charset="-122"/>
                 <a:cs typeface="Trebuchet MS" pitchFamily="34" charset="-120"/>
               </a:rPr>
-              <a:t>perimeter</a:t>
+              <a:t>periscope</a:t>
             </a:r>
             <a:endParaRPr lang="en-US" sz="2800" dirty="0"/>
           </a:p>
@@ -8845,7 +8845,7 @@
                 <a:ea typeface="Calibri" pitchFamily="34" charset="-122"/>
                 <a:cs typeface="Calibri" pitchFamily="34" charset="-120"/>
               </a:rPr>
-              <a:t>around</a:t>
+              <a:t>around, surrounding</a:t>
             </a:r>
             <a:endParaRPr lang="en-US" sz="850" dirty="0"/>
           </a:p>
@@ -8918,7 +8918,7 @@
                 <a:ea typeface="Trebuchet MS" pitchFamily="34" charset="-122"/>
                 <a:cs typeface="Trebuchet MS" pitchFamily="34" charset="-120"/>
               </a:rPr>
-              <a:t>meter</a:t>
+              <a:t>scope</a:t>
             </a:r>
             <a:endParaRPr lang="en-US" sz="1300" dirty="0"/>
           </a:p>
@@ -8957,7 +8957,7 @@
                 <a:ea typeface="Calibri" pitchFamily="34" charset="-122"/>
                 <a:cs typeface="Calibri" pitchFamily="34" charset="-120"/>
               </a:rPr>
-              <a:t>measure</a:t>
+              <a:t>to look, see</a:t>
             </a:r>
             <a:endParaRPr lang="en-US" sz="850" dirty="0"/>
           </a:p>
@@ -9064,8 +9064,8 @@
         </p:nvSpPr>
         <p:spPr>
           <a:xfrm>
-            <a:off x="1975104" y="3364992"/>
-            <a:ext cx="1554480" cy="475488"/>
+            <a:off x="2313432" y="3364992"/>
+            <a:ext cx="1645920" cy="475488"/>
           </a:xfrm>
           <a:prstGeom prst="rect">
             <a:avLst>
@@ -9091,8 +9091,8 @@
         </p:nvSpPr>
         <p:spPr>
           <a:xfrm>
-            <a:off x="1975104" y="3364992"/>
-            <a:ext cx="1554480" cy="475488"/>
+            <a:off x="2313432" y="3364992"/>
+            <a:ext cx="1645920" cy="475488"/>
           </a:xfrm>
           <a:prstGeom prst="rect">
             <a:avLst/>
@@ -9116,7 +9116,7 @@
                 <a:ea typeface="Trebuchet MS" pitchFamily="34" charset="-122"/>
                 <a:cs typeface="Trebuchet MS" pitchFamily="34" charset="-120"/>
               </a:rPr>
-              <a:t>pe</a:t>
+              <a:t>per</a:t>
             </a:r>
             <a:endParaRPr lang="en-US" sz="1400" dirty="0"/>
           </a:p>
@@ -9130,8 +9130,8 @@
         </p:nvSpPr>
         <p:spPr>
           <a:xfrm>
-            <a:off x="3529584" y="3364992"/>
-            <a:ext cx="73152" cy="475488"/>
+            <a:off x="3959352" y="3364992"/>
+            <a:ext cx="411480" cy="475488"/>
           </a:xfrm>
           <a:prstGeom prst="rect">
             <a:avLst/>
@@ -9169,8 +9169,8 @@
         </p:nvSpPr>
         <p:spPr>
           <a:xfrm>
-            <a:off x="3602736" y="3364992"/>
-            <a:ext cx="1554480" cy="475488"/>
+            <a:off x="4370832" y="3364992"/>
+            <a:ext cx="1645920" cy="475488"/>
           </a:xfrm>
           <a:prstGeom prst="rect">
             <a:avLst>
@@ -9196,8 +9196,8 @@
         </p:nvSpPr>
         <p:spPr>
           <a:xfrm>
-            <a:off x="3602736" y="3364992"/>
-            <a:ext cx="1554480" cy="475488"/>
+            <a:off x="4370832" y="3364992"/>
+            <a:ext cx="1645920" cy="475488"/>
           </a:xfrm>
           <a:prstGeom prst="rect">
             <a:avLst/>
@@ -9221,7 +9221,7 @@
                 <a:ea typeface="Trebuchet MS" pitchFamily="34" charset="-122"/>
                 <a:cs typeface="Trebuchet MS" pitchFamily="34" charset="-120"/>
               </a:rPr>
-              <a:t>rim</a:t>
+              <a:t>i</a:t>
             </a:r>
             <a:endParaRPr lang="en-US" sz="1400" dirty="0"/>
           </a:p>
@@ -9235,8 +9235,8 @@
         </p:nvSpPr>
         <p:spPr>
           <a:xfrm>
-            <a:off x="5157216" y="3364992"/>
-            <a:ext cx="73152" cy="475488"/>
+            <a:off x="6016752" y="3364992"/>
+            <a:ext cx="411480" cy="475488"/>
           </a:xfrm>
           <a:prstGeom prst="rect">
             <a:avLst/>
@@ -9274,8 +9274,8 @@
         </p:nvSpPr>
         <p:spPr>
           <a:xfrm>
-            <a:off x="5230368" y="3364992"/>
-            <a:ext cx="1554480" cy="475488"/>
+            <a:off x="6428232" y="3364992"/>
+            <a:ext cx="1645920" cy="475488"/>
           </a:xfrm>
           <a:prstGeom prst="rect">
             <a:avLst>
@@ -9301,8 +9301,8 @@
         </p:nvSpPr>
         <p:spPr>
           <a:xfrm>
-            <a:off x="5230368" y="3364992"/>
-            <a:ext cx="1554480" cy="475488"/>
+            <a:off x="6428232" y="3364992"/>
+            <a:ext cx="1645920" cy="475488"/>
           </a:xfrm>
           <a:prstGeom prst="rect">
             <a:avLst/>
@@ -9326,7 +9326,7 @@
                 <a:ea typeface="Trebuchet MS" pitchFamily="34" charset="-122"/>
                 <a:cs typeface="Trebuchet MS" pitchFamily="34" charset="-120"/>
               </a:rPr>
-              <a:t>e</a:t>
+              <a:t>scope</a:t>
             </a:r>
             <a:endParaRPr lang="en-US" sz="1400" dirty="0"/>
           </a:p>
@@ -9334,119 +9334,80 @@
       </p:sp>
       <p:sp>
         <p:nvSpPr>
-          <p:cNvPr id="33" name="Text 31"/>
-          <p:cNvSpPr/>
-          <p:nvPr/>
-        </p:nvSpPr>
-        <p:spPr>
-          <a:xfrm>
-            <a:off x="6784848" y="3364992"/>
-            <a:ext cx="73152" cy="475488"/>
-          </a:xfrm>
-          <a:prstGeom prst="rect">
-            <a:avLst/>
-          </a:prstGeom>
-          <a:noFill/>
-          <a:ln/>
-        </p:spPr>
-        <p:txBody>
-          <a:bodyPr wrap="square" lIns="0" tIns="0" rIns="0" bIns="0" rtlCol="0" anchor="ctr"/>
-          <a:lstStyle/>
-          <a:p>
-            <a:pPr algn="ctr" indent="0" marL="0">
-              <a:buNone/>
-            </a:pPr>
-            <a:r>
-              <a:rPr lang="en-US" sz="1600" b="1" dirty="0">
-                <a:solidFill>
-                  <a:srgbClr val="0D9488"/>
+          <p:cNvPr id="33" name="Shape 31"/>
+          <p:cNvSpPr/>
+          <p:nvPr/>
+        </p:nvSpPr>
+        <p:spPr>
+          <a:xfrm>
+            <a:off x="365760" y="4096512"/>
+            <a:ext cx="1371600" cy="804672"/>
+          </a:xfrm>
+          <a:prstGeom prst="rect">
+            <a:avLst>
+              <a:gd name="adj" fmla="val 6818"/>
+            </a:avLst>
+          </a:prstGeom>
+          <a:solidFill>
+            <a:srgbClr val="E2E8F0"/>
+          </a:solidFill>
+          <a:ln w="12700">
+            <a:solidFill>
+              <a:srgbClr val="E2E8F0"/>
+            </a:solidFill>
+            <a:prstDash val="solid"/>
+          </a:ln>
+        </p:spPr>
+      </p:sp>
+      <p:sp>
+        <p:nvSpPr>
+          <p:cNvPr id="34" name="Text 32"/>
+          <p:cNvSpPr/>
+          <p:nvPr/>
+        </p:nvSpPr>
+        <p:spPr>
+          <a:xfrm>
+            <a:off x="365760" y="4096512"/>
+            <a:ext cx="1371600" cy="804672"/>
+          </a:xfrm>
+          <a:prstGeom prst="rect">
+            <a:avLst/>
+          </a:prstGeom>
+          <a:noFill/>
+          <a:ln/>
+        </p:spPr>
+        <p:txBody>
+          <a:bodyPr wrap="square" lIns="0" tIns="0" rIns="0" bIns="0" rtlCol="0" anchor="ctr"/>
+          <a:lstStyle/>
+          <a:p>
+            <a:pPr algn="ctr" indent="0" marL="0">
+              <a:buNone/>
+            </a:pPr>
+            <a:r>
+              <a:rPr lang="en-US" sz="1100" b="1" dirty="0">
+                <a:solidFill>
+                  <a:srgbClr val="475569"/>
                 </a:solidFill>
                 <a:latin typeface="Trebuchet MS" pitchFamily="34" charset="0"/>
                 <a:ea typeface="Trebuchet MS" pitchFamily="34" charset="-122"/>
                 <a:cs typeface="Trebuchet MS" pitchFamily="34" charset="-120"/>
               </a:rPr>
-              <a:t>·</a:t>
-            </a:r>
-            <a:endParaRPr lang="en-US" sz="1600" dirty="0"/>
-          </a:p>
-        </p:txBody>
-      </p:sp>
-      <p:sp>
-        <p:nvSpPr>
-          <p:cNvPr id="34" name="Shape 32"/>
-          <p:cNvSpPr/>
-          <p:nvPr/>
-        </p:nvSpPr>
-        <p:spPr>
-          <a:xfrm>
-            <a:off x="6858000" y="3364992"/>
-            <a:ext cx="1554480" cy="475488"/>
-          </a:xfrm>
-          <a:prstGeom prst="rect">
-            <a:avLst>
-              <a:gd name="adj" fmla="val 9615"/>
-            </a:avLst>
-          </a:prstGeom>
-          <a:solidFill>
-            <a:srgbClr val="FFFFFF"/>
-          </a:solidFill>
-          <a:ln w="12700">
-            <a:solidFill>
-              <a:srgbClr val="0D9488"/>
-            </a:solidFill>
-            <a:prstDash val="solid"/>
-          </a:ln>
-        </p:spPr>
-      </p:sp>
-      <p:sp>
-        <p:nvSpPr>
-          <p:cNvPr id="35" name="Text 33"/>
-          <p:cNvSpPr/>
-          <p:nvPr/>
-        </p:nvSpPr>
-        <p:spPr>
-          <a:xfrm>
-            <a:off x="6858000" y="3364992"/>
-            <a:ext cx="1554480" cy="475488"/>
-          </a:xfrm>
-          <a:prstGeom prst="rect">
-            <a:avLst/>
-          </a:prstGeom>
-          <a:noFill/>
-          <a:ln/>
-        </p:spPr>
-        <p:txBody>
-          <a:bodyPr wrap="square" lIns="0" tIns="0" rIns="0" bIns="0" rtlCol="0" anchor="ctr"/>
-          <a:lstStyle/>
-          <a:p>
-            <a:pPr algn="ctr" indent="0" marL="0">
-              <a:buNone/>
-            </a:pPr>
-            <a:r>
-              <a:rPr lang="en-US" sz="1400" b="1" dirty="0">
-                <a:solidFill>
-                  <a:srgbClr val="0D9488"/>
-                </a:solidFill>
-                <a:latin typeface="Trebuchet MS" pitchFamily="34" charset="0"/>
-                <a:ea typeface="Trebuchet MS" pitchFamily="34" charset="-122"/>
-                <a:cs typeface="Trebuchet MS" pitchFamily="34" charset="-120"/>
-              </a:rPr>
-              <a:t>ter</a:t>
-            </a:r>
-            <a:endParaRPr lang="en-US" sz="1400" dirty="0"/>
-          </a:p>
-        </p:txBody>
-      </p:sp>
-      <p:sp>
-        <p:nvSpPr>
-          <p:cNvPr id="36" name="Shape 34"/>
-          <p:cNvSpPr/>
-          <p:nvPr/>
-        </p:nvSpPr>
-        <p:spPr>
-          <a:xfrm>
-            <a:off x="365760" y="4096512"/>
-            <a:ext cx="1371600" cy="804672"/>
+              <a:t>Phonemes</a:t>
+            </a:r>
+            <a:endParaRPr lang="en-US" sz="1100" dirty="0"/>
+          </a:p>
+        </p:txBody>
+      </p:sp>
+      <p:sp>
+        <p:nvSpPr>
+          <p:cNvPr id="35" name="Shape 33"/>
+          <p:cNvSpPr/>
+          <p:nvPr/>
+        </p:nvSpPr>
+        <p:spPr>
+          <a:xfrm>
+            <a:off x="1874520" y="4096512"/>
+            <a:ext cx="6903720" cy="804672"/>
           </a:xfrm>
           <a:prstGeom prst="rect">
             <a:avLst>
@@ -9454,85 +9415,19 @@
             </a:avLst>
           </a:prstGeom>
           <a:solidFill>
-            <a:srgbClr val="E2E8F0"/>
+            <a:srgbClr val="F8FAFC"/>
           </a:solidFill>
           <a:ln w="12700">
             <a:solidFill>
               <a:srgbClr val="E2E8F0"/>
             </a:solidFill>
-            <a:prstDash val="solid"/>
-          </a:ln>
-        </p:spPr>
-      </p:sp>
-      <p:sp>
-        <p:nvSpPr>
-          <p:cNvPr id="37" name="Text 35"/>
-          <p:cNvSpPr/>
-          <p:nvPr/>
-        </p:nvSpPr>
-        <p:spPr>
-          <a:xfrm>
-            <a:off x="365760" y="4096512"/>
-            <a:ext cx="1371600" cy="804672"/>
-          </a:xfrm>
-          <a:prstGeom prst="rect">
-            <a:avLst/>
-          </a:prstGeom>
-          <a:noFill/>
-          <a:ln/>
-        </p:spPr>
-        <p:txBody>
-          <a:bodyPr wrap="square" lIns="0" tIns="0" rIns="0" bIns="0" rtlCol="0" anchor="ctr"/>
-          <a:lstStyle/>
-          <a:p>
-            <a:pPr algn="ctr" indent="0" marL="0">
-              <a:buNone/>
-            </a:pPr>
-            <a:r>
-              <a:rPr lang="en-US" sz="1100" b="1" dirty="0">
-                <a:solidFill>
-                  <a:srgbClr val="475569"/>
-                </a:solidFill>
-                <a:latin typeface="Trebuchet MS" pitchFamily="34" charset="0"/>
-                <a:ea typeface="Trebuchet MS" pitchFamily="34" charset="-122"/>
-                <a:cs typeface="Trebuchet MS" pitchFamily="34" charset="-120"/>
-              </a:rPr>
-              <a:t>Phonemes</a:t>
-            </a:r>
-            <a:endParaRPr lang="en-US" sz="1100" dirty="0"/>
-          </a:p>
-        </p:txBody>
-      </p:sp>
-      <p:sp>
-        <p:nvSpPr>
-          <p:cNvPr id="38" name="Shape 36"/>
-          <p:cNvSpPr/>
-          <p:nvPr/>
-        </p:nvSpPr>
-        <p:spPr>
-          <a:xfrm>
-            <a:off x="1874520" y="4096512"/>
-            <a:ext cx="6903720" cy="804672"/>
-          </a:xfrm>
-          <a:prstGeom prst="rect">
-            <a:avLst>
-              <a:gd name="adj" fmla="val 6818"/>
-            </a:avLst>
-          </a:prstGeom>
-          <a:solidFill>
-            <a:srgbClr val="F8FAFC"/>
-          </a:solidFill>
-          <a:ln w="12700">
-            <a:solidFill>
-              <a:srgbClr val="E2E8F0"/>
-            </a:solidFill>
             <a:prstDash val="dash"/>
           </a:ln>
         </p:spPr>
       </p:sp>
       <p:sp>
         <p:nvSpPr>
-          <p:cNvPr id="39" name="Text 37"/>
+          <p:cNvPr id="36" name="Text 34"/>
           <p:cNvSpPr/>
           <p:nvPr/>
         </p:nvSpPr>
@@ -9994,7 +9889,7 @@
                 <a:ea typeface="Trebuchet MS" pitchFamily="34" charset="-122"/>
                 <a:cs typeface="Trebuchet MS" pitchFamily="34" charset="-120"/>
               </a:rPr>
-              <a:t>perimeter</a:t>
+              <a:t>periscope</a:t>
             </a:r>
             <a:endParaRPr lang="en-US" sz="2800" dirty="0"/>
           </a:p>
@@ -10172,7 +10067,7 @@
                 <a:ea typeface="Calibri" pitchFamily="34" charset="-122"/>
                 <a:cs typeface="Calibri" pitchFamily="34" charset="-120"/>
               </a:rPr>
-              <a:t>around</a:t>
+              <a:t>around, surrounding</a:t>
             </a:r>
             <a:endParaRPr lang="en-US" sz="850" dirty="0"/>
           </a:p>
@@ -10245,7 +10140,7 @@
                 <a:ea typeface="Trebuchet MS" pitchFamily="34" charset="-122"/>
                 <a:cs typeface="Trebuchet MS" pitchFamily="34" charset="-120"/>
               </a:rPr>
-              <a:t>meter</a:t>
+              <a:t>scope</a:t>
             </a:r>
             <a:endParaRPr lang="en-US" sz="1300" dirty="0"/>
           </a:p>
@@ -10284,7 +10179,7 @@
                 <a:ea typeface="Calibri" pitchFamily="34" charset="-122"/>
                 <a:cs typeface="Calibri" pitchFamily="34" charset="-120"/>
               </a:rPr>
-              <a:t>measure</a:t>
+              <a:t>to look, see</a:t>
             </a:r>
             <a:endParaRPr lang="en-US" sz="850" dirty="0"/>
           </a:p>
@@ -10391,8 +10286,8 @@
         </p:nvSpPr>
         <p:spPr>
           <a:xfrm>
-            <a:off x="1975104" y="3364992"/>
-            <a:ext cx="1554480" cy="475488"/>
+            <a:off x="2313432" y="3364992"/>
+            <a:ext cx="1645920" cy="475488"/>
           </a:xfrm>
           <a:prstGeom prst="rect">
             <a:avLst>
@@ -10418,8 +10313,8 @@
         </p:nvSpPr>
         <p:spPr>
           <a:xfrm>
-            <a:off x="1975104" y="3364992"/>
-            <a:ext cx="1554480" cy="475488"/>
+            <a:off x="2313432" y="3364992"/>
+            <a:ext cx="1645920" cy="475488"/>
           </a:xfrm>
           <a:prstGeom prst="rect">
             <a:avLst/>
@@ -10443,7 +10338,7 @@
                 <a:ea typeface="Trebuchet MS" pitchFamily="34" charset="-122"/>
                 <a:cs typeface="Trebuchet MS" pitchFamily="34" charset="-120"/>
               </a:rPr>
-              <a:t>pe</a:t>
+              <a:t>per</a:t>
             </a:r>
             <a:endParaRPr lang="en-US" sz="1400" dirty="0"/>
           </a:p>
@@ -10457,8 +10352,8 @@
         </p:nvSpPr>
         <p:spPr>
           <a:xfrm>
-            <a:off x="3529584" y="3364992"/>
-            <a:ext cx="73152" cy="475488"/>
+            <a:off x="3959352" y="3364992"/>
+            <a:ext cx="411480" cy="475488"/>
           </a:xfrm>
           <a:prstGeom prst="rect">
             <a:avLst/>
@@ -10496,8 +10391,8 @@
         </p:nvSpPr>
         <p:spPr>
           <a:xfrm>
-            <a:off x="3602736" y="3364992"/>
-            <a:ext cx="1554480" cy="475488"/>
+            <a:off x="4370832" y="3364992"/>
+            <a:ext cx="1645920" cy="475488"/>
           </a:xfrm>
           <a:prstGeom prst="rect">
             <a:avLst>
@@ -10523,8 +10418,8 @@
         </p:nvSpPr>
         <p:spPr>
           <a:xfrm>
-            <a:off x="3602736" y="3364992"/>
-            <a:ext cx="1554480" cy="475488"/>
+            <a:off x="4370832" y="3364992"/>
+            <a:ext cx="1645920" cy="475488"/>
           </a:xfrm>
           <a:prstGeom prst="rect">
             <a:avLst/>
@@ -10548,7 +10443,7 @@
                 <a:ea typeface="Trebuchet MS" pitchFamily="34" charset="-122"/>
                 <a:cs typeface="Trebuchet MS" pitchFamily="34" charset="-120"/>
               </a:rPr>
-              <a:t>rim</a:t>
+              <a:t>i</a:t>
             </a:r>
             <a:endParaRPr lang="en-US" sz="1400" dirty="0"/>
           </a:p>
@@ -10562,8 +10457,8 @@
         </p:nvSpPr>
         <p:spPr>
           <a:xfrm>
-            <a:off x="5157216" y="3364992"/>
-            <a:ext cx="73152" cy="475488"/>
+            <a:off x="6016752" y="3364992"/>
+            <a:ext cx="411480" cy="475488"/>
           </a:xfrm>
           <a:prstGeom prst="rect">
             <a:avLst/>
@@ -10601,8 +10496,8 @@
         </p:nvSpPr>
         <p:spPr>
           <a:xfrm>
-            <a:off x="5230368" y="3364992"/>
-            <a:ext cx="1554480" cy="475488"/>
+            <a:off x="6428232" y="3364992"/>
+            <a:ext cx="1645920" cy="475488"/>
           </a:xfrm>
           <a:prstGeom prst="rect">
             <a:avLst>
@@ -10628,8 +10523,8 @@
         </p:nvSpPr>
         <p:spPr>
           <a:xfrm>
-            <a:off x="5230368" y="3364992"/>
-            <a:ext cx="1554480" cy="475488"/>
+            <a:off x="6428232" y="3364992"/>
+            <a:ext cx="1645920" cy="475488"/>
           </a:xfrm>
           <a:prstGeom prst="rect">
             <a:avLst/>
@@ -10653,7 +10548,7 @@
                 <a:ea typeface="Trebuchet MS" pitchFamily="34" charset="-122"/>
                 <a:cs typeface="Trebuchet MS" pitchFamily="34" charset="-120"/>
               </a:rPr>
-              <a:t>e</a:t>
+              <a:t>scope</a:t>
             </a:r>
             <a:endParaRPr lang="en-US" sz="1400" dirty="0"/>
           </a:p>
@@ -10661,193 +10556,247 @@
       </p:sp>
       <p:sp>
         <p:nvSpPr>
-          <p:cNvPr id="33" name="Text 31"/>
-          <p:cNvSpPr/>
-          <p:nvPr/>
-        </p:nvSpPr>
-        <p:spPr>
-          <a:xfrm>
-            <a:off x="6784848" y="3364992"/>
-            <a:ext cx="73152" cy="475488"/>
-          </a:xfrm>
-          <a:prstGeom prst="rect">
-            <a:avLst/>
-          </a:prstGeom>
-          <a:noFill/>
-          <a:ln/>
-        </p:spPr>
-        <p:txBody>
-          <a:bodyPr wrap="square" lIns="0" tIns="0" rIns="0" bIns="0" rtlCol="0" anchor="ctr"/>
-          <a:lstStyle/>
-          <a:p>
-            <a:pPr algn="ctr" indent="0" marL="0">
-              <a:buNone/>
-            </a:pPr>
-            <a:r>
-              <a:rPr lang="en-US" sz="1600" b="1" dirty="0">
-                <a:solidFill>
-                  <a:srgbClr val="0D9488"/>
+          <p:cNvPr id="33" name="Shape 31"/>
+          <p:cNvSpPr/>
+          <p:nvPr/>
+        </p:nvSpPr>
+        <p:spPr>
+          <a:xfrm>
+            <a:off x="365760" y="4096512"/>
+            <a:ext cx="1371600" cy="804672"/>
+          </a:xfrm>
+          <a:prstGeom prst="rect">
+            <a:avLst>
+              <a:gd name="adj" fmla="val 6818"/>
+            </a:avLst>
+          </a:prstGeom>
+          <a:solidFill>
+            <a:srgbClr val="E2E8F0"/>
+          </a:solidFill>
+          <a:ln w="12700">
+            <a:solidFill>
+              <a:srgbClr val="E2E8F0"/>
+            </a:solidFill>
+            <a:prstDash val="solid"/>
+          </a:ln>
+        </p:spPr>
+      </p:sp>
+      <p:sp>
+        <p:nvSpPr>
+          <p:cNvPr id="34" name="Text 32"/>
+          <p:cNvSpPr/>
+          <p:nvPr/>
+        </p:nvSpPr>
+        <p:spPr>
+          <a:xfrm>
+            <a:off x="365760" y="4096512"/>
+            <a:ext cx="1371600" cy="804672"/>
+          </a:xfrm>
+          <a:prstGeom prst="rect">
+            <a:avLst/>
+          </a:prstGeom>
+          <a:noFill/>
+          <a:ln/>
+        </p:spPr>
+        <p:txBody>
+          <a:bodyPr wrap="square" lIns="0" tIns="0" rIns="0" bIns="0" rtlCol="0" anchor="ctr"/>
+          <a:lstStyle/>
+          <a:p>
+            <a:pPr algn="ctr" indent="0" marL="0">
+              <a:buNone/>
+            </a:pPr>
+            <a:r>
+              <a:rPr lang="en-US" sz="1100" b="1" dirty="0">
+                <a:solidFill>
+                  <a:srgbClr val="475569"/>
                 </a:solidFill>
                 <a:latin typeface="Trebuchet MS" pitchFamily="34" charset="0"/>
                 <a:ea typeface="Trebuchet MS" pitchFamily="34" charset="-122"/>
                 <a:cs typeface="Trebuchet MS" pitchFamily="34" charset="-120"/>
               </a:rPr>
-              <a:t>·</a:t>
-            </a:r>
-            <a:endParaRPr lang="en-US" sz="1600" dirty="0"/>
-          </a:p>
-        </p:txBody>
-      </p:sp>
-      <p:sp>
-        <p:nvSpPr>
-          <p:cNvPr id="34" name="Shape 32"/>
-          <p:cNvSpPr/>
-          <p:nvPr/>
-        </p:nvSpPr>
-        <p:spPr>
-          <a:xfrm>
-            <a:off x="6858000" y="3364992"/>
-            <a:ext cx="1554480" cy="475488"/>
+              <a:t>Phonemes</a:t>
+            </a:r>
+            <a:endParaRPr lang="en-US" sz="1100" dirty="0"/>
+          </a:p>
+        </p:txBody>
+      </p:sp>
+      <p:sp>
+        <p:nvSpPr>
+          <p:cNvPr id="35" name="Shape 33"/>
+          <p:cNvSpPr/>
+          <p:nvPr/>
+        </p:nvSpPr>
+        <p:spPr>
+          <a:xfrm>
+            <a:off x="1874520" y="4096512"/>
+            <a:ext cx="6903720" cy="804672"/>
           </a:xfrm>
           <a:prstGeom prst="rect">
             <a:avLst>
-              <a:gd name="adj" fmla="val 9615"/>
+              <a:gd name="adj" fmla="val 6818"/>
             </a:avLst>
           </a:prstGeom>
           <a:solidFill>
+            <a:srgbClr val="FCE7F3"/>
+          </a:solidFill>
+          <a:ln w="12700">
+            <a:solidFill>
+              <a:srgbClr val="DB2777"/>
+            </a:solidFill>
+            <a:prstDash val="solid"/>
+          </a:ln>
+        </p:spPr>
+      </p:sp>
+      <p:sp>
+        <p:nvSpPr>
+          <p:cNvPr id="36" name="Shape 34"/>
+          <p:cNvSpPr/>
+          <p:nvPr/>
+        </p:nvSpPr>
+        <p:spPr>
+          <a:xfrm>
+            <a:off x="2124837" y="4169664"/>
+            <a:ext cx="685800" cy="384048"/>
+          </a:xfrm>
+          <a:prstGeom prst="rect">
+            <a:avLst>
+              <a:gd name="adj" fmla="val 9524"/>
+            </a:avLst>
+          </a:prstGeom>
+          <a:solidFill>
             <a:srgbClr val="FFFFFF"/>
           </a:solidFill>
           <a:ln w="12700">
             <a:solidFill>
-              <a:srgbClr val="0D9488"/>
-            </a:solidFill>
-            <a:prstDash val="solid"/>
-          </a:ln>
-        </p:spPr>
-      </p:sp>
-      <p:sp>
-        <p:nvSpPr>
-          <p:cNvPr id="35" name="Text 33"/>
-          <p:cNvSpPr/>
-          <p:nvPr/>
-        </p:nvSpPr>
-        <p:spPr>
-          <a:xfrm>
-            <a:off x="6858000" y="3364992"/>
-            <a:ext cx="1554480" cy="475488"/>
-          </a:xfrm>
-          <a:prstGeom prst="rect">
-            <a:avLst/>
-          </a:prstGeom>
-          <a:noFill/>
-          <a:ln/>
-        </p:spPr>
-        <p:txBody>
-          <a:bodyPr wrap="square" lIns="0" tIns="0" rIns="0" bIns="0" rtlCol="0" anchor="ctr"/>
-          <a:lstStyle/>
-          <a:p>
-            <a:pPr algn="ctr" indent="0" marL="0">
-              <a:buNone/>
-            </a:pPr>
-            <a:r>
-              <a:rPr lang="en-US" sz="1400" b="1" dirty="0">
-                <a:solidFill>
-                  <a:srgbClr val="0D9488"/>
+              <a:srgbClr val="DB2777"/>
+            </a:solidFill>
+            <a:prstDash val="solid"/>
+          </a:ln>
+        </p:spPr>
+      </p:sp>
+      <p:sp>
+        <p:nvSpPr>
+          <p:cNvPr id="37" name="Text 35"/>
+          <p:cNvSpPr/>
+          <p:nvPr/>
+        </p:nvSpPr>
+        <p:spPr>
+          <a:xfrm>
+            <a:off x="2124837" y="4169664"/>
+            <a:ext cx="685800" cy="384048"/>
+          </a:xfrm>
+          <a:prstGeom prst="rect">
+            <a:avLst/>
+          </a:prstGeom>
+          <a:noFill/>
+          <a:ln/>
+        </p:spPr>
+        <p:txBody>
+          <a:bodyPr wrap="square" lIns="0" tIns="0" rIns="0" bIns="0" rtlCol="0" anchor="ctr"/>
+          <a:lstStyle/>
+          <a:p>
+            <a:pPr algn="ctr" indent="0" marL="0">
+              <a:buNone/>
+            </a:pPr>
+            <a:r>
+              <a:rPr lang="en-US" sz="900" b="1" dirty="0">
+                <a:solidFill>
+                  <a:srgbClr val="9D174D"/>
                 </a:solidFill>
                 <a:latin typeface="Trebuchet MS" pitchFamily="34" charset="0"/>
                 <a:ea typeface="Trebuchet MS" pitchFamily="34" charset="-122"/>
                 <a:cs typeface="Trebuchet MS" pitchFamily="34" charset="-120"/>
               </a:rPr>
-              <a:t>ter</a:t>
-            </a:r>
-            <a:endParaRPr lang="en-US" sz="1400" dirty="0"/>
-          </a:p>
-        </p:txBody>
-      </p:sp>
-      <p:sp>
-        <p:nvSpPr>
-          <p:cNvPr id="36" name="Shape 34"/>
-          <p:cNvSpPr/>
-          <p:nvPr/>
-        </p:nvSpPr>
-        <p:spPr>
-          <a:xfrm>
-            <a:off x="365760" y="4096512"/>
-            <a:ext cx="1371600" cy="804672"/>
+              <a:t>p</a:t>
+            </a:r>
+            <a:endParaRPr lang="en-US" sz="900" dirty="0"/>
+          </a:p>
+        </p:txBody>
+      </p:sp>
+      <p:sp>
+        <p:nvSpPr>
+          <p:cNvPr id="38" name="Shape 36"/>
+          <p:cNvSpPr/>
+          <p:nvPr/>
+        </p:nvSpPr>
+        <p:spPr>
+          <a:xfrm>
+            <a:off x="3033522" y="4169664"/>
+            <a:ext cx="685800" cy="384048"/>
           </a:xfrm>
           <a:prstGeom prst="rect">
             <a:avLst>
-              <a:gd name="adj" fmla="val 6818"/>
+              <a:gd name="adj" fmla="val 9524"/>
             </a:avLst>
           </a:prstGeom>
           <a:solidFill>
-            <a:srgbClr val="E2E8F0"/>
-          </a:solidFill>
-          <a:ln w="12700">
-            <a:solidFill>
-              <a:srgbClr val="E2E8F0"/>
-            </a:solidFill>
-            <a:prstDash val="solid"/>
-          </a:ln>
-        </p:spPr>
-      </p:sp>
-      <p:sp>
-        <p:nvSpPr>
-          <p:cNvPr id="37" name="Text 35"/>
-          <p:cNvSpPr/>
-          <p:nvPr/>
-        </p:nvSpPr>
-        <p:spPr>
-          <a:xfrm>
-            <a:off x="365760" y="4096512"/>
-            <a:ext cx="1371600" cy="804672"/>
-          </a:xfrm>
-          <a:prstGeom prst="rect">
-            <a:avLst/>
-          </a:prstGeom>
-          <a:noFill/>
-          <a:ln/>
-        </p:spPr>
-        <p:txBody>
-          <a:bodyPr wrap="square" lIns="0" tIns="0" rIns="0" bIns="0" rtlCol="0" anchor="ctr"/>
-          <a:lstStyle/>
-          <a:p>
-            <a:pPr algn="ctr" indent="0" marL="0">
-              <a:buNone/>
-            </a:pPr>
-            <a:r>
-              <a:rPr lang="en-US" sz="1100" b="1" dirty="0">
-                <a:solidFill>
-                  <a:srgbClr val="475569"/>
+            <a:srgbClr val="FFFFFF"/>
+          </a:solidFill>
+          <a:ln w="12700">
+            <a:solidFill>
+              <a:srgbClr val="DB2777"/>
+            </a:solidFill>
+            <a:prstDash val="solid"/>
+          </a:ln>
+        </p:spPr>
+      </p:sp>
+      <p:sp>
+        <p:nvSpPr>
+          <p:cNvPr id="39" name="Text 37"/>
+          <p:cNvSpPr/>
+          <p:nvPr/>
+        </p:nvSpPr>
+        <p:spPr>
+          <a:xfrm>
+            <a:off x="3033522" y="4169664"/>
+            <a:ext cx="685800" cy="384048"/>
+          </a:xfrm>
+          <a:prstGeom prst="rect">
+            <a:avLst/>
+          </a:prstGeom>
+          <a:noFill/>
+          <a:ln/>
+        </p:spPr>
+        <p:txBody>
+          <a:bodyPr wrap="square" lIns="0" tIns="0" rIns="0" bIns="0" rtlCol="0" anchor="ctr"/>
+          <a:lstStyle/>
+          <a:p>
+            <a:pPr algn="ctr" indent="0" marL="0">
+              <a:buNone/>
+            </a:pPr>
+            <a:r>
+              <a:rPr lang="en-US" sz="900" b="1" dirty="0">
+                <a:solidFill>
+                  <a:srgbClr val="9D174D"/>
                 </a:solidFill>
                 <a:latin typeface="Trebuchet MS" pitchFamily="34" charset="0"/>
                 <a:ea typeface="Trebuchet MS" pitchFamily="34" charset="-122"/>
                 <a:cs typeface="Trebuchet MS" pitchFamily="34" charset="-120"/>
               </a:rPr>
-              <a:t>Phonemes</a:t>
-            </a:r>
-            <a:endParaRPr lang="en-US" sz="1100" dirty="0"/>
-          </a:p>
-        </p:txBody>
-      </p:sp>
-      <p:sp>
-        <p:nvSpPr>
-          <p:cNvPr id="38" name="Shape 36"/>
-          <p:cNvSpPr/>
-          <p:nvPr/>
-        </p:nvSpPr>
-        <p:spPr>
-          <a:xfrm>
-            <a:off x="1874520" y="4096512"/>
-            <a:ext cx="6903720" cy="658368"/>
+              <a:t>er</a:t>
+            </a:r>
+            <a:endParaRPr lang="en-US" sz="900" dirty="0"/>
+          </a:p>
+        </p:txBody>
+      </p:sp>
+      <p:sp>
+        <p:nvSpPr>
+          <p:cNvPr id="40" name="Shape 38"/>
+          <p:cNvSpPr/>
+          <p:nvPr/>
+        </p:nvSpPr>
+        <p:spPr>
+          <a:xfrm>
+            <a:off x="3942207" y="4169664"/>
+            <a:ext cx="685800" cy="384048"/>
           </a:xfrm>
           <a:prstGeom prst="rect">
             <a:avLst>
-              <a:gd name="adj" fmla="val 8333"/>
+              <a:gd name="adj" fmla="val 9524"/>
             </a:avLst>
           </a:prstGeom>
           <a:solidFill>
-            <a:srgbClr val="FCE7F3"/>
+            <a:srgbClr val="FFFFFF"/>
           </a:solidFill>
           <a:ln w="12700">
             <a:solidFill>
@@ -10859,41 +10808,14 @@
       </p:sp>
       <p:sp>
         <p:nvSpPr>
-          <p:cNvPr id="39" name="Shape 37"/>
-          <p:cNvSpPr/>
-          <p:nvPr/>
-        </p:nvSpPr>
-        <p:spPr>
-          <a:xfrm>
-            <a:off x="2023872" y="4169664"/>
-            <a:ext cx="685800" cy="475488"/>
-          </a:xfrm>
-          <a:prstGeom prst="rect">
-            <a:avLst>
-              <a:gd name="adj" fmla="val 7692"/>
-            </a:avLst>
-          </a:prstGeom>
-          <a:solidFill>
-            <a:srgbClr val="FFFFFF"/>
-          </a:solidFill>
-          <a:ln w="12700">
-            <a:solidFill>
-              <a:srgbClr val="DB2777"/>
-            </a:solidFill>
-            <a:prstDash val="solid"/>
-          </a:ln>
-        </p:spPr>
-      </p:sp>
-      <p:sp>
-        <p:nvSpPr>
-          <p:cNvPr id="40" name="Text 38"/>
-          <p:cNvSpPr/>
-          <p:nvPr/>
-        </p:nvSpPr>
-        <p:spPr>
-          <a:xfrm>
-            <a:off x="2023872" y="4169664"/>
-            <a:ext cx="685800" cy="475488"/>
+          <p:cNvPr id="41" name="Text 39"/>
+          <p:cNvSpPr/>
+          <p:nvPr/>
+        </p:nvSpPr>
+        <p:spPr>
+          <a:xfrm>
+            <a:off x="3942207" y="4169664"/>
+            <a:ext cx="685800" cy="384048"/>
           </a:xfrm>
           <a:prstGeom prst="rect">
             <a:avLst/>
@@ -10917,7 +10839,7 @@
                 <a:ea typeface="Trebuchet MS" pitchFamily="34" charset="-122"/>
                 <a:cs typeface="Trebuchet MS" pitchFamily="34" charset="-120"/>
               </a:rPr>
-              <a:t>p</a:t>
+              <a:t>i</a:t>
             </a:r>
             <a:endParaRPr lang="en-US" sz="900" dirty="0"/>
           </a:p>
@@ -10925,18 +10847,18 @@
       </p:sp>
       <p:sp>
         <p:nvSpPr>
-          <p:cNvPr id="41" name="Shape 39"/>
-          <p:cNvSpPr/>
-          <p:nvPr/>
-        </p:nvSpPr>
-        <p:spPr>
-          <a:xfrm>
-            <a:off x="2831592" y="4169664"/>
-            <a:ext cx="685800" cy="475488"/>
+          <p:cNvPr id="42" name="Shape 40"/>
+          <p:cNvSpPr/>
+          <p:nvPr/>
+        </p:nvSpPr>
+        <p:spPr>
+          <a:xfrm>
+            <a:off x="4850892" y="4169664"/>
+            <a:ext cx="685800" cy="384048"/>
           </a:xfrm>
           <a:prstGeom prst="rect">
             <a:avLst>
-              <a:gd name="adj" fmla="val 7692"/>
+              <a:gd name="adj" fmla="val 9524"/>
             </a:avLst>
           </a:prstGeom>
           <a:solidFill>
@@ -10952,14 +10874,14 @@
       </p:sp>
       <p:sp>
         <p:nvSpPr>
-          <p:cNvPr id="42" name="Text 40"/>
-          <p:cNvSpPr/>
-          <p:nvPr/>
-        </p:nvSpPr>
-        <p:spPr>
-          <a:xfrm>
-            <a:off x="2831592" y="4169664"/>
-            <a:ext cx="685800" cy="475488"/>
+          <p:cNvPr id="43" name="Text 41"/>
+          <p:cNvSpPr/>
+          <p:nvPr/>
+        </p:nvSpPr>
+        <p:spPr>
+          <a:xfrm>
+            <a:off x="4850892" y="4169664"/>
+            <a:ext cx="685800" cy="384048"/>
           </a:xfrm>
           <a:prstGeom prst="rect">
             <a:avLst/>
@@ -10983,7 +10905,7 @@
                 <a:ea typeface="Trebuchet MS" pitchFamily="34" charset="-122"/>
                 <a:cs typeface="Trebuchet MS" pitchFamily="34" charset="-120"/>
               </a:rPr>
-              <a:t>e</a:t>
+              <a:t>s</a:t>
             </a:r>
             <a:endParaRPr lang="en-US" sz="900" dirty="0"/>
           </a:p>
@@ -10991,18 +10913,57 @@
       </p:sp>
       <p:sp>
         <p:nvSpPr>
-          <p:cNvPr id="43" name="Shape 41"/>
-          <p:cNvSpPr/>
-          <p:nvPr/>
-        </p:nvSpPr>
-        <p:spPr>
-          <a:xfrm>
-            <a:off x="3639312" y="4169664"/>
-            <a:ext cx="685800" cy="475488"/>
+          <p:cNvPr id="44" name="Text 42"/>
+          <p:cNvSpPr/>
+          <p:nvPr/>
+        </p:nvSpPr>
+        <p:spPr>
+          <a:xfrm>
+            <a:off x="4850892" y="4572000"/>
+            <a:ext cx="685800" cy="219456"/>
+          </a:xfrm>
+          <a:prstGeom prst="rect">
+            <a:avLst/>
+          </a:prstGeom>
+          <a:noFill/>
+          <a:ln/>
+        </p:spPr>
+        <p:txBody>
+          <a:bodyPr wrap="square" lIns="0" tIns="0" rIns="0" bIns="0" rtlCol="0" anchor="t"/>
+          <a:lstStyle/>
+          <a:p>
+            <a:pPr algn="ctr" indent="0" marL="0">
+              <a:buNone/>
+            </a:pPr>
+            <a:r>
+              <a:rPr lang="en-US" sz="750" i="1" dirty="0">
+                <a:solidFill>
+                  <a:srgbClr val="94A3B8"/>
+                </a:solidFill>
+                <a:latin typeface="Calibri" pitchFamily="34" charset="0"/>
+                <a:ea typeface="Calibri" pitchFamily="34" charset="-122"/>
+                <a:cs typeface="Calibri" pitchFamily="34" charset="-120"/>
+              </a:rPr>
+              <a:t>/s/</a:t>
+            </a:r>
+            <a:endParaRPr lang="en-US" sz="750" dirty="0"/>
+          </a:p>
+        </p:txBody>
+      </p:sp>
+      <p:sp>
+        <p:nvSpPr>
+          <p:cNvPr id="45" name="Shape 43"/>
+          <p:cNvSpPr/>
+          <p:nvPr/>
+        </p:nvSpPr>
+        <p:spPr>
+          <a:xfrm>
+            <a:off x="5759577" y="4169664"/>
+            <a:ext cx="685800" cy="384048"/>
           </a:xfrm>
           <a:prstGeom prst="rect">
             <a:avLst>
-              <a:gd name="adj" fmla="val 7692"/>
+              <a:gd name="adj" fmla="val 9524"/>
             </a:avLst>
           </a:prstGeom>
           <a:solidFill>
@@ -11018,14 +10979,14 @@
       </p:sp>
       <p:sp>
         <p:nvSpPr>
-          <p:cNvPr id="44" name="Text 42"/>
-          <p:cNvSpPr/>
-          <p:nvPr/>
-        </p:nvSpPr>
-        <p:spPr>
-          <a:xfrm>
-            <a:off x="3639312" y="4169664"/>
-            <a:ext cx="685800" cy="475488"/>
+          <p:cNvPr id="46" name="Text 44"/>
+          <p:cNvSpPr/>
+          <p:nvPr/>
+        </p:nvSpPr>
+        <p:spPr>
+          <a:xfrm>
+            <a:off x="5759577" y="4169664"/>
+            <a:ext cx="685800" cy="384048"/>
           </a:xfrm>
           <a:prstGeom prst="rect">
             <a:avLst/>
@@ -11049,7 +11010,7 @@
                 <a:ea typeface="Trebuchet MS" pitchFamily="34" charset="-122"/>
                 <a:cs typeface="Trebuchet MS" pitchFamily="34" charset="-120"/>
               </a:rPr>
-              <a:t>r</a:t>
+              <a:t>c</a:t>
             </a:r>
             <a:endParaRPr lang="en-US" sz="900" dirty="0"/>
           </a:p>
@@ -11057,18 +11018,57 @@
       </p:sp>
       <p:sp>
         <p:nvSpPr>
-          <p:cNvPr id="45" name="Shape 43"/>
-          <p:cNvSpPr/>
-          <p:nvPr/>
-        </p:nvSpPr>
-        <p:spPr>
-          <a:xfrm>
-            <a:off x="4447032" y="4169664"/>
-            <a:ext cx="685800" cy="475488"/>
+          <p:cNvPr id="47" name="Text 45"/>
+          <p:cNvSpPr/>
+          <p:nvPr/>
+        </p:nvSpPr>
+        <p:spPr>
+          <a:xfrm>
+            <a:off x="5759577" y="4572000"/>
+            <a:ext cx="685800" cy="219456"/>
+          </a:xfrm>
+          <a:prstGeom prst="rect">
+            <a:avLst/>
+          </a:prstGeom>
+          <a:noFill/>
+          <a:ln/>
+        </p:spPr>
+        <p:txBody>
+          <a:bodyPr wrap="square" lIns="0" tIns="0" rIns="0" bIns="0" rtlCol="0" anchor="t"/>
+          <a:lstStyle/>
+          <a:p>
+            <a:pPr algn="ctr" indent="0" marL="0">
+              <a:buNone/>
+            </a:pPr>
+            <a:r>
+              <a:rPr lang="en-US" sz="750" i="1" dirty="0">
+                <a:solidFill>
+                  <a:srgbClr val="94A3B8"/>
+                </a:solidFill>
+                <a:latin typeface="Calibri" pitchFamily="34" charset="0"/>
+                <a:ea typeface="Calibri" pitchFamily="34" charset="-122"/>
+                <a:cs typeface="Calibri" pitchFamily="34" charset="-120"/>
+              </a:rPr>
+              <a:t>/k/</a:t>
+            </a:r>
+            <a:endParaRPr lang="en-US" sz="750" dirty="0"/>
+          </a:p>
+        </p:txBody>
+      </p:sp>
+      <p:sp>
+        <p:nvSpPr>
+          <p:cNvPr id="48" name="Shape 46"/>
+          <p:cNvSpPr/>
+          <p:nvPr/>
+        </p:nvSpPr>
+        <p:spPr>
+          <a:xfrm>
+            <a:off x="6668262" y="4169664"/>
+            <a:ext cx="685800" cy="384048"/>
           </a:xfrm>
           <a:prstGeom prst="rect">
             <a:avLst>
-              <a:gd name="adj" fmla="val 7692"/>
+              <a:gd name="adj" fmla="val 9524"/>
             </a:avLst>
           </a:prstGeom>
           <a:solidFill>
@@ -11084,14 +11084,14 @@
       </p:sp>
       <p:sp>
         <p:nvSpPr>
-          <p:cNvPr id="46" name="Text 44"/>
-          <p:cNvSpPr/>
-          <p:nvPr/>
-        </p:nvSpPr>
-        <p:spPr>
-          <a:xfrm>
-            <a:off x="4447032" y="4169664"/>
-            <a:ext cx="685800" cy="475488"/>
+          <p:cNvPr id="49" name="Text 47"/>
+          <p:cNvSpPr/>
+          <p:nvPr/>
+        </p:nvSpPr>
+        <p:spPr>
+          <a:xfrm>
+            <a:off x="6668262" y="4169664"/>
+            <a:ext cx="685800" cy="384048"/>
           </a:xfrm>
           <a:prstGeom prst="rect">
             <a:avLst/>
@@ -11115,7 +11115,7 @@
                 <a:ea typeface="Trebuchet MS" pitchFamily="34" charset="-122"/>
                 <a:cs typeface="Trebuchet MS" pitchFamily="34" charset="-120"/>
               </a:rPr>
-              <a:t>i</a:t>
+              <a:t>o</a:t>
             </a:r>
             <a:endParaRPr lang="en-US" sz="900" dirty="0"/>
           </a:p>
@@ -11123,18 +11123,18 @@
       </p:sp>
       <p:sp>
         <p:nvSpPr>
-          <p:cNvPr id="47" name="Shape 45"/>
-          <p:cNvSpPr/>
-          <p:nvPr/>
-        </p:nvSpPr>
-        <p:spPr>
-          <a:xfrm>
-            <a:off x="5254752" y="4169664"/>
-            <a:ext cx="685800" cy="475488"/>
+          <p:cNvPr id="50" name="Shape 48"/>
+          <p:cNvSpPr/>
+          <p:nvPr/>
+        </p:nvSpPr>
+        <p:spPr>
+          <a:xfrm>
+            <a:off x="7576947" y="4169664"/>
+            <a:ext cx="685800" cy="384048"/>
           </a:xfrm>
           <a:prstGeom prst="rect">
             <a:avLst>
-              <a:gd name="adj" fmla="val 7692"/>
+              <a:gd name="adj" fmla="val 9524"/>
             </a:avLst>
           </a:prstGeom>
           <a:solidFill>
@@ -11150,14 +11150,14 @@
       </p:sp>
       <p:sp>
         <p:nvSpPr>
-          <p:cNvPr id="48" name="Text 46"/>
-          <p:cNvSpPr/>
-          <p:nvPr/>
-        </p:nvSpPr>
-        <p:spPr>
-          <a:xfrm>
-            <a:off x="5254752" y="4169664"/>
-            <a:ext cx="685800" cy="475488"/>
+          <p:cNvPr id="51" name="Text 49"/>
+          <p:cNvSpPr/>
+          <p:nvPr/>
+        </p:nvSpPr>
+        <p:spPr>
+          <a:xfrm>
+            <a:off x="7576947" y="4169664"/>
+            <a:ext cx="685800" cy="384048"/>
           </a:xfrm>
           <a:prstGeom prst="rect">
             <a:avLst/>
@@ -11181,205 +11181,7 @@
                 <a:ea typeface="Trebuchet MS" pitchFamily="34" charset="-122"/>
                 <a:cs typeface="Trebuchet MS" pitchFamily="34" charset="-120"/>
               </a:rPr>
-              <a:t>m</a:t>
-            </a:r>
-            <a:endParaRPr lang="en-US" sz="900" dirty="0"/>
-          </a:p>
-        </p:txBody>
-      </p:sp>
-      <p:sp>
-        <p:nvSpPr>
-          <p:cNvPr id="49" name="Shape 47"/>
-          <p:cNvSpPr/>
-          <p:nvPr/>
-        </p:nvSpPr>
-        <p:spPr>
-          <a:xfrm>
-            <a:off x="6062472" y="4169664"/>
-            <a:ext cx="685800" cy="475488"/>
-          </a:xfrm>
-          <a:prstGeom prst="rect">
-            <a:avLst>
-              <a:gd name="adj" fmla="val 7692"/>
-            </a:avLst>
-          </a:prstGeom>
-          <a:solidFill>
-            <a:srgbClr val="FFFFFF"/>
-          </a:solidFill>
-          <a:ln w="12700">
-            <a:solidFill>
-              <a:srgbClr val="DB2777"/>
-            </a:solidFill>
-            <a:prstDash val="solid"/>
-          </a:ln>
-        </p:spPr>
-      </p:sp>
-      <p:sp>
-        <p:nvSpPr>
-          <p:cNvPr id="50" name="Text 48"/>
-          <p:cNvSpPr/>
-          <p:nvPr/>
-        </p:nvSpPr>
-        <p:spPr>
-          <a:xfrm>
-            <a:off x="6062472" y="4169664"/>
-            <a:ext cx="685800" cy="475488"/>
-          </a:xfrm>
-          <a:prstGeom prst="rect">
-            <a:avLst/>
-          </a:prstGeom>
-          <a:noFill/>
-          <a:ln/>
-        </p:spPr>
-        <p:txBody>
-          <a:bodyPr wrap="square" lIns="0" tIns="0" rIns="0" bIns="0" rtlCol="0" anchor="ctr"/>
-          <a:lstStyle/>
-          <a:p>
-            <a:pPr algn="ctr" indent="0" marL="0">
-              <a:buNone/>
-            </a:pPr>
-            <a:r>
-              <a:rPr lang="en-US" sz="900" b="1" dirty="0">
-                <a:solidFill>
-                  <a:srgbClr val="9D174D"/>
-                </a:solidFill>
-                <a:latin typeface="Trebuchet MS" pitchFamily="34" charset="0"/>
-                <a:ea typeface="Trebuchet MS" pitchFamily="34" charset="-122"/>
-                <a:cs typeface="Trebuchet MS" pitchFamily="34" charset="-120"/>
-              </a:rPr>
-              <a:t>e</a:t>
-            </a:r>
-            <a:endParaRPr lang="en-US" sz="900" dirty="0"/>
-          </a:p>
-        </p:txBody>
-      </p:sp>
-      <p:sp>
-        <p:nvSpPr>
-          <p:cNvPr id="51" name="Shape 49"/>
-          <p:cNvSpPr/>
-          <p:nvPr/>
-        </p:nvSpPr>
-        <p:spPr>
-          <a:xfrm>
-            <a:off x="6870192" y="4169664"/>
-            <a:ext cx="685800" cy="475488"/>
-          </a:xfrm>
-          <a:prstGeom prst="rect">
-            <a:avLst>
-              <a:gd name="adj" fmla="val 7692"/>
-            </a:avLst>
-          </a:prstGeom>
-          <a:solidFill>
-            <a:srgbClr val="FFFFFF"/>
-          </a:solidFill>
-          <a:ln w="12700">
-            <a:solidFill>
-              <a:srgbClr val="DB2777"/>
-            </a:solidFill>
-            <a:prstDash val="solid"/>
-          </a:ln>
-        </p:spPr>
-      </p:sp>
-      <p:sp>
-        <p:nvSpPr>
-          <p:cNvPr id="52" name="Text 50"/>
-          <p:cNvSpPr/>
-          <p:nvPr/>
-        </p:nvSpPr>
-        <p:spPr>
-          <a:xfrm>
-            <a:off x="6870192" y="4169664"/>
-            <a:ext cx="685800" cy="475488"/>
-          </a:xfrm>
-          <a:prstGeom prst="rect">
-            <a:avLst/>
-          </a:prstGeom>
-          <a:noFill/>
-          <a:ln/>
-        </p:spPr>
-        <p:txBody>
-          <a:bodyPr wrap="square" lIns="0" tIns="0" rIns="0" bIns="0" rtlCol="0" anchor="ctr"/>
-          <a:lstStyle/>
-          <a:p>
-            <a:pPr algn="ctr" indent="0" marL="0">
-              <a:buNone/>
-            </a:pPr>
-            <a:r>
-              <a:rPr lang="en-US" sz="900" b="1" dirty="0">
-                <a:solidFill>
-                  <a:srgbClr val="9D174D"/>
-                </a:solidFill>
-                <a:latin typeface="Trebuchet MS" pitchFamily="34" charset="0"/>
-                <a:ea typeface="Trebuchet MS" pitchFamily="34" charset="-122"/>
-                <a:cs typeface="Trebuchet MS" pitchFamily="34" charset="-120"/>
-              </a:rPr>
-              <a:t>t</a:t>
-            </a:r>
-            <a:endParaRPr lang="en-US" sz="900" dirty="0"/>
-          </a:p>
-        </p:txBody>
-      </p:sp>
-      <p:sp>
-        <p:nvSpPr>
-          <p:cNvPr id="53" name="Shape 51"/>
-          <p:cNvSpPr/>
-          <p:nvPr/>
-        </p:nvSpPr>
-        <p:spPr>
-          <a:xfrm>
-            <a:off x="7677912" y="4169664"/>
-            <a:ext cx="685800" cy="475488"/>
-          </a:xfrm>
-          <a:prstGeom prst="rect">
-            <a:avLst>
-              <a:gd name="adj" fmla="val 7692"/>
-            </a:avLst>
-          </a:prstGeom>
-          <a:solidFill>
-            <a:srgbClr val="FFFFFF"/>
-          </a:solidFill>
-          <a:ln w="12700">
-            <a:solidFill>
-              <a:srgbClr val="DB2777"/>
-            </a:solidFill>
-            <a:prstDash val="solid"/>
-          </a:ln>
-        </p:spPr>
-      </p:sp>
-      <p:sp>
-        <p:nvSpPr>
-          <p:cNvPr id="54" name="Text 52"/>
-          <p:cNvSpPr/>
-          <p:nvPr/>
-        </p:nvSpPr>
-        <p:spPr>
-          <a:xfrm>
-            <a:off x="7677912" y="4169664"/>
-            <a:ext cx="685800" cy="475488"/>
-          </a:xfrm>
-          <a:prstGeom prst="rect">
-            <a:avLst/>
-          </a:prstGeom>
-          <a:noFill/>
-          <a:ln/>
-        </p:spPr>
-        <p:txBody>
-          <a:bodyPr wrap="square" lIns="0" tIns="0" rIns="0" bIns="0" rtlCol="0" anchor="ctr"/>
-          <a:lstStyle/>
-          <a:p>
-            <a:pPr algn="ctr" indent="0" marL="0">
-              <a:buNone/>
-            </a:pPr>
-            <a:r>
-              <a:rPr lang="en-US" sz="900" b="1" dirty="0">
-                <a:solidFill>
-                  <a:srgbClr val="9D174D"/>
-                </a:solidFill>
-                <a:latin typeface="Trebuchet MS" pitchFamily="34" charset="0"/>
-                <a:ea typeface="Trebuchet MS" pitchFamily="34" charset="-122"/>
-                <a:cs typeface="Trebuchet MS" pitchFamily="34" charset="-120"/>
-              </a:rPr>
-              <a:t>er</a:t>
+              <a:t>pe</a:t>
             </a:r>
             <a:endParaRPr lang="en-US" sz="900" dirty="0"/>
           </a:p>
@@ -11810,7 +11612,7 @@
                 <a:ea typeface="Trebuchet MS" pitchFamily="34" charset="-122"/>
                 <a:cs typeface="Trebuchet MS" pitchFamily="34" charset="-120"/>
               </a:rPr>
-              <a:t>periscope</a:t>
+              <a:t>perimeter</a:t>
             </a:r>
             <a:endParaRPr lang="en-US" sz="2800" dirty="0"/>
           </a:p>
@@ -12637,7 +12439,7 @@
                 <a:ea typeface="Trebuchet MS" pitchFamily="34" charset="-122"/>
                 <a:cs typeface="Trebuchet MS" pitchFamily="34" charset="-120"/>
               </a:rPr>
-              <a:t>periscope</a:t>
+              <a:t>perimeter</a:t>
             </a:r>
             <a:endParaRPr lang="en-US" sz="2800" dirty="0"/>
           </a:p>
@@ -12815,7 +12617,7 @@
                 <a:ea typeface="Calibri" pitchFamily="34" charset="-122"/>
                 <a:cs typeface="Calibri" pitchFamily="34" charset="-120"/>
               </a:rPr>
-              <a:t>around</a:t>
+              <a:t>around, surrounding</a:t>
             </a:r>
             <a:endParaRPr lang="en-US" sz="850" dirty="0"/>
           </a:p>
@@ -12888,7 +12690,7 @@
                 <a:ea typeface="Trebuchet MS" pitchFamily="34" charset="-122"/>
                 <a:cs typeface="Trebuchet MS" pitchFamily="34" charset="-120"/>
               </a:rPr>
-              <a:t>scope</a:t>
+              <a:t>meter</a:t>
             </a:r>
             <a:endParaRPr lang="en-US" sz="1300" dirty="0"/>
           </a:p>
@@ -12927,7 +12729,7 @@
                 <a:ea typeface="Calibri" pitchFamily="34" charset="-122"/>
                 <a:cs typeface="Calibri" pitchFamily="34" charset="-120"/>
               </a:rPr>
-              <a:t>look, see</a:t>
+              <a:t>measure</a:t>
             </a:r>
             <a:endParaRPr lang="en-US" sz="850" dirty="0"/>
           </a:p>
@@ -13622,7 +13424,7 @@
                 <a:ea typeface="Trebuchet MS" pitchFamily="34" charset="-122"/>
                 <a:cs typeface="Trebuchet MS" pitchFamily="34" charset="-120"/>
               </a:rPr>
-              <a:t>periscope</a:t>
+              <a:t>perimeter</a:t>
             </a:r>
             <a:endParaRPr lang="en-US" sz="2800" dirty="0"/>
           </a:p>
@@ -13800,7 +13602,7 @@
                 <a:ea typeface="Calibri" pitchFamily="34" charset="-122"/>
                 <a:cs typeface="Calibri" pitchFamily="34" charset="-120"/>
               </a:rPr>
-              <a:t>around</a:t>
+              <a:t>around, surrounding</a:t>
             </a:r>
             <a:endParaRPr lang="en-US" sz="850" dirty="0"/>
           </a:p>
@@ -13873,7 +13675,7 @@
                 <a:ea typeface="Trebuchet MS" pitchFamily="34" charset="-122"/>
                 <a:cs typeface="Trebuchet MS" pitchFamily="34" charset="-120"/>
               </a:rPr>
-              <a:t>scope</a:t>
+              <a:t>meter</a:t>
             </a:r>
             <a:endParaRPr lang="en-US" sz="1300" dirty="0"/>
           </a:p>
@@ -13912,7 +13714,7 @@
                 <a:ea typeface="Calibri" pitchFamily="34" charset="-122"/>
                 <a:cs typeface="Calibri" pitchFamily="34" charset="-120"/>
               </a:rPr>
-              <a:t>look, see</a:t>
+              <a:t>measure</a:t>
             </a:r>
             <a:endParaRPr lang="en-US" sz="850" dirty="0"/>
           </a:p>
@@ -14019,8 +13821,8 @@
         </p:nvSpPr>
         <p:spPr>
           <a:xfrm>
-            <a:off x="2313432" y="3364992"/>
-            <a:ext cx="1645920" cy="475488"/>
+            <a:off x="1975104" y="3364992"/>
+            <a:ext cx="1554480" cy="475488"/>
           </a:xfrm>
           <a:prstGeom prst="rect">
             <a:avLst>
@@ -14046,8 +13848,8 @@
         </p:nvSpPr>
         <p:spPr>
           <a:xfrm>
-            <a:off x="2313432" y="3364992"/>
-            <a:ext cx="1645920" cy="475488"/>
+            <a:off x="1975104" y="3364992"/>
+            <a:ext cx="1554480" cy="475488"/>
           </a:xfrm>
           <a:prstGeom prst="rect">
             <a:avLst/>
@@ -14085,8 +13887,8 @@
         </p:nvSpPr>
         <p:spPr>
           <a:xfrm>
-            <a:off x="3959352" y="3364992"/>
-            <a:ext cx="411480" cy="475488"/>
+            <a:off x="3529584" y="3364992"/>
+            <a:ext cx="73152" cy="475488"/>
           </a:xfrm>
           <a:prstGeom prst="rect">
             <a:avLst/>
@@ -14124,8 +13926,8 @@
         </p:nvSpPr>
         <p:spPr>
           <a:xfrm>
-            <a:off x="4370832" y="3364992"/>
-            <a:ext cx="1645920" cy="475488"/>
+            <a:off x="3602736" y="3364992"/>
+            <a:ext cx="1554480" cy="475488"/>
           </a:xfrm>
           <a:prstGeom prst="rect">
             <a:avLst>
@@ -14151,8 +13953,8 @@
         </p:nvSpPr>
         <p:spPr>
           <a:xfrm>
-            <a:off x="4370832" y="3364992"/>
-            <a:ext cx="1645920" cy="475488"/>
+            <a:off x="3602736" y="3364992"/>
+            <a:ext cx="1554480" cy="475488"/>
           </a:xfrm>
           <a:prstGeom prst="rect">
             <a:avLst/>
@@ -14176,7 +13978,7 @@
                 <a:ea typeface="Trebuchet MS" pitchFamily="34" charset="-122"/>
                 <a:cs typeface="Trebuchet MS" pitchFamily="34" charset="-120"/>
               </a:rPr>
-              <a:t>i</a:t>
+              <a:t>im</a:t>
             </a:r>
             <a:endParaRPr lang="en-US" sz="1400" dirty="0"/>
           </a:p>
@@ -14190,8 +13992,8 @@
         </p:nvSpPr>
         <p:spPr>
           <a:xfrm>
-            <a:off x="6016752" y="3364992"/>
-            <a:ext cx="411480" cy="475488"/>
+            <a:off x="5157216" y="3364992"/>
+            <a:ext cx="73152" cy="475488"/>
           </a:xfrm>
           <a:prstGeom prst="rect">
             <a:avLst/>
@@ -14229,8 +14031,8 @@
         </p:nvSpPr>
         <p:spPr>
           <a:xfrm>
-            <a:off x="6428232" y="3364992"/>
-            <a:ext cx="1645920" cy="475488"/>
+            <a:off x="5230368" y="3364992"/>
+            <a:ext cx="1554480" cy="475488"/>
           </a:xfrm>
           <a:prstGeom prst="rect">
             <a:avLst>
@@ -14256,8 +14058,8 @@
         </p:nvSpPr>
         <p:spPr>
           <a:xfrm>
-            <a:off x="6428232" y="3364992"/>
-            <a:ext cx="1645920" cy="475488"/>
+            <a:off x="5230368" y="3364992"/>
+            <a:ext cx="1554480" cy="475488"/>
           </a:xfrm>
           <a:prstGeom prst="rect">
             <a:avLst/>
@@ -14281,7 +14083,7 @@
                 <a:ea typeface="Trebuchet MS" pitchFamily="34" charset="-122"/>
                 <a:cs typeface="Trebuchet MS" pitchFamily="34" charset="-120"/>
               </a:rPr>
-              <a:t>scope</a:t>
+              <a:t>e</a:t>
             </a:r>
             <a:endParaRPr lang="en-US" sz="1400" dirty="0"/>
           </a:p>
@@ -14289,7 +14091,112 @@
       </p:sp>
       <p:sp>
         <p:nvSpPr>
-          <p:cNvPr id="33" name="Shape 31"/>
+          <p:cNvPr id="33" name="Text 31"/>
+          <p:cNvSpPr/>
+          <p:nvPr/>
+        </p:nvSpPr>
+        <p:spPr>
+          <a:xfrm>
+            <a:off x="6784848" y="3364992"/>
+            <a:ext cx="73152" cy="475488"/>
+          </a:xfrm>
+          <a:prstGeom prst="rect">
+            <a:avLst/>
+          </a:prstGeom>
+          <a:noFill/>
+          <a:ln/>
+        </p:spPr>
+        <p:txBody>
+          <a:bodyPr wrap="square" lIns="0" tIns="0" rIns="0" bIns="0" rtlCol="0" anchor="ctr"/>
+          <a:lstStyle/>
+          <a:p>
+            <a:pPr algn="ctr" indent="0" marL="0">
+              <a:buNone/>
+            </a:pPr>
+            <a:r>
+              <a:rPr lang="en-US" sz="1600" b="1" dirty="0">
+                <a:solidFill>
+                  <a:srgbClr val="0D9488"/>
+                </a:solidFill>
+                <a:latin typeface="Trebuchet MS" pitchFamily="34" charset="0"/>
+                <a:ea typeface="Trebuchet MS" pitchFamily="34" charset="-122"/>
+                <a:cs typeface="Trebuchet MS" pitchFamily="34" charset="-120"/>
+              </a:rPr>
+              <a:t>·</a:t>
+            </a:r>
+            <a:endParaRPr lang="en-US" sz="1600" dirty="0"/>
+          </a:p>
+        </p:txBody>
+      </p:sp>
+      <p:sp>
+        <p:nvSpPr>
+          <p:cNvPr id="34" name="Shape 32"/>
+          <p:cNvSpPr/>
+          <p:nvPr/>
+        </p:nvSpPr>
+        <p:spPr>
+          <a:xfrm>
+            <a:off x="6858000" y="3364992"/>
+            <a:ext cx="1554480" cy="475488"/>
+          </a:xfrm>
+          <a:prstGeom prst="rect">
+            <a:avLst>
+              <a:gd name="adj" fmla="val 9615"/>
+            </a:avLst>
+          </a:prstGeom>
+          <a:solidFill>
+            <a:srgbClr val="FFFFFF"/>
+          </a:solidFill>
+          <a:ln w="12700">
+            <a:solidFill>
+              <a:srgbClr val="0D9488"/>
+            </a:solidFill>
+            <a:prstDash val="solid"/>
+          </a:ln>
+        </p:spPr>
+      </p:sp>
+      <p:sp>
+        <p:nvSpPr>
+          <p:cNvPr id="35" name="Text 33"/>
+          <p:cNvSpPr/>
+          <p:nvPr/>
+        </p:nvSpPr>
+        <p:spPr>
+          <a:xfrm>
+            <a:off x="6858000" y="3364992"/>
+            <a:ext cx="1554480" cy="475488"/>
+          </a:xfrm>
+          <a:prstGeom prst="rect">
+            <a:avLst/>
+          </a:prstGeom>
+          <a:noFill/>
+          <a:ln/>
+        </p:spPr>
+        <p:txBody>
+          <a:bodyPr wrap="square" lIns="0" tIns="0" rIns="0" bIns="0" rtlCol="0" anchor="ctr"/>
+          <a:lstStyle/>
+          <a:p>
+            <a:pPr algn="ctr" indent="0" marL="0">
+              <a:buNone/>
+            </a:pPr>
+            <a:r>
+              <a:rPr lang="en-US" sz="1400" b="1" dirty="0">
+                <a:solidFill>
+                  <a:srgbClr val="0D9488"/>
+                </a:solidFill>
+                <a:latin typeface="Trebuchet MS" pitchFamily="34" charset="0"/>
+                <a:ea typeface="Trebuchet MS" pitchFamily="34" charset="-122"/>
+                <a:cs typeface="Trebuchet MS" pitchFamily="34" charset="-120"/>
+              </a:rPr>
+              <a:t>ter</a:t>
+            </a:r>
+            <a:endParaRPr lang="en-US" sz="1400" dirty="0"/>
+          </a:p>
+        </p:txBody>
+      </p:sp>
+      <p:sp>
+        <p:nvSpPr>
+          <p:cNvPr id="36" name="Shape 34"/>
           <p:cNvSpPr/>
           <p:nvPr/>
         </p:nvSpPr>
@@ -14316,7 +14223,7 @@
       </p:sp>
       <p:sp>
         <p:nvSpPr>
-          <p:cNvPr id="34" name="Text 32"/>
+          <p:cNvPr id="37" name="Text 35"/>
           <p:cNvSpPr/>
           <p:nvPr/>
         </p:nvSpPr>
@@ -14355,7 +14262,7 @@
       </p:sp>
       <p:sp>
         <p:nvSpPr>
-          <p:cNvPr id="35" name="Shape 33"/>
+          <p:cNvPr id="38" name="Shape 36"/>
           <p:cNvSpPr/>
           <p:nvPr/>
         </p:nvSpPr>
@@ -14382,7 +14289,7 @@
       </p:sp>
       <p:sp>
         <p:nvSpPr>
-          <p:cNvPr id="36" name="Text 34"/>
+          <p:cNvPr id="39" name="Text 37"/>
           <p:cNvSpPr/>
           <p:nvPr/>
         </p:nvSpPr>
@@ -15109,7 +15016,7 @@
                 <a:ea typeface="Trebuchet MS" pitchFamily="34" charset="-122"/>
                 <a:cs typeface="Trebuchet MS" pitchFamily="34" charset="-120"/>
               </a:rPr>
-              <a:t>periscope</a:t>
+              <a:t>perimeter</a:t>
             </a:r>
             <a:endParaRPr lang="en-US" sz="2800" dirty="0"/>
           </a:p>
@@ -15287,7 +15194,7 @@
                 <a:ea typeface="Calibri" pitchFamily="34" charset="-122"/>
                 <a:cs typeface="Calibri" pitchFamily="34" charset="-120"/>
               </a:rPr>
-              <a:t>around</a:t>
+              <a:t>around, surrounding</a:t>
             </a:r>
             <a:endParaRPr lang="en-US" sz="850" dirty="0"/>
           </a:p>
@@ -15360,7 +15267,7 @@
                 <a:ea typeface="Trebuchet MS" pitchFamily="34" charset="-122"/>
                 <a:cs typeface="Trebuchet MS" pitchFamily="34" charset="-120"/>
               </a:rPr>
-              <a:t>scope</a:t>
+              <a:t>meter</a:t>
             </a:r>
             <a:endParaRPr lang="en-US" sz="1300" dirty="0"/>
           </a:p>
@@ -15399,7 +15306,7 @@
                 <a:ea typeface="Calibri" pitchFamily="34" charset="-122"/>
                 <a:cs typeface="Calibri" pitchFamily="34" charset="-120"/>
               </a:rPr>
-              <a:t>look, see</a:t>
+              <a:t>measure</a:t>
             </a:r>
             <a:endParaRPr lang="en-US" sz="850" dirty="0"/>
           </a:p>
@@ -15506,8 +15413,8 @@
         </p:nvSpPr>
         <p:spPr>
           <a:xfrm>
-            <a:off x="2313432" y="3364992"/>
-            <a:ext cx="1645920" cy="475488"/>
+            <a:off x="1975104" y="3364992"/>
+            <a:ext cx="1554480" cy="475488"/>
           </a:xfrm>
           <a:prstGeom prst="rect">
             <a:avLst>
@@ -15533,8 +15440,8 @@
         </p:nvSpPr>
         <p:spPr>
           <a:xfrm>
-            <a:off x="2313432" y="3364992"/>
-            <a:ext cx="1645920" cy="475488"/>
+            <a:off x="1975104" y="3364992"/>
+            <a:ext cx="1554480" cy="475488"/>
           </a:xfrm>
           <a:prstGeom prst="rect">
             <a:avLst/>
@@ -15572,8 +15479,8 @@
         </p:nvSpPr>
         <p:spPr>
           <a:xfrm>
-            <a:off x="3959352" y="3364992"/>
-            <a:ext cx="411480" cy="475488"/>
+            <a:off x="3529584" y="3364992"/>
+            <a:ext cx="73152" cy="475488"/>
           </a:xfrm>
           <a:prstGeom prst="rect">
             <a:avLst/>
@@ -15611,8 +15518,8 @@
         </p:nvSpPr>
         <p:spPr>
           <a:xfrm>
-            <a:off x="4370832" y="3364992"/>
-            <a:ext cx="1645920" cy="475488"/>
+            <a:off x="3602736" y="3364992"/>
+            <a:ext cx="1554480" cy="475488"/>
           </a:xfrm>
           <a:prstGeom prst="rect">
             <a:avLst>
@@ -15638,8 +15545,8 @@
         </p:nvSpPr>
         <p:spPr>
           <a:xfrm>
-            <a:off x="4370832" y="3364992"/>
-            <a:ext cx="1645920" cy="475488"/>
+            <a:off x="3602736" y="3364992"/>
+            <a:ext cx="1554480" cy="475488"/>
           </a:xfrm>
           <a:prstGeom prst="rect">
             <a:avLst/>
@@ -15663,7 +15570,7 @@
                 <a:ea typeface="Trebuchet MS" pitchFamily="34" charset="-122"/>
                 <a:cs typeface="Trebuchet MS" pitchFamily="34" charset="-120"/>
               </a:rPr>
-              <a:t>i</a:t>
+              <a:t>im</a:t>
             </a:r>
             <a:endParaRPr lang="en-US" sz="1400" dirty="0"/>
           </a:p>
@@ -15677,8 +15584,8 @@
         </p:nvSpPr>
         <p:spPr>
           <a:xfrm>
-            <a:off x="6016752" y="3364992"/>
-            <a:ext cx="411480" cy="475488"/>
+            <a:off x="5157216" y="3364992"/>
+            <a:ext cx="73152" cy="475488"/>
           </a:xfrm>
           <a:prstGeom prst="rect">
             <a:avLst/>
@@ -15716,8 +15623,8 @@
         </p:nvSpPr>
         <p:spPr>
           <a:xfrm>
-            <a:off x="6428232" y="3364992"/>
-            <a:ext cx="1645920" cy="475488"/>
+            <a:off x="5230368" y="3364992"/>
+            <a:ext cx="1554480" cy="475488"/>
           </a:xfrm>
           <a:prstGeom prst="rect">
             <a:avLst>
@@ -15743,8 +15650,8 @@
         </p:nvSpPr>
         <p:spPr>
           <a:xfrm>
-            <a:off x="6428232" y="3364992"/>
-            <a:ext cx="1645920" cy="475488"/>
+            <a:off x="5230368" y="3364992"/>
+            <a:ext cx="1554480" cy="475488"/>
           </a:xfrm>
           <a:prstGeom prst="rect">
             <a:avLst/>
@@ -15768,7 +15675,7 @@
                 <a:ea typeface="Trebuchet MS" pitchFamily="34" charset="-122"/>
                 <a:cs typeface="Trebuchet MS" pitchFamily="34" charset="-120"/>
               </a:rPr>
-              <a:t>scope</a:t>
+              <a:t>e</a:t>
             </a:r>
             <a:endParaRPr lang="en-US" sz="1400" dirty="0"/>
           </a:p>
@@ -15776,7 +15683,112 @@
       </p:sp>
       <p:sp>
         <p:nvSpPr>
-          <p:cNvPr id="33" name="Shape 31"/>
+          <p:cNvPr id="33" name="Text 31"/>
+          <p:cNvSpPr/>
+          <p:nvPr/>
+        </p:nvSpPr>
+        <p:spPr>
+          <a:xfrm>
+            <a:off x="6784848" y="3364992"/>
+            <a:ext cx="73152" cy="475488"/>
+          </a:xfrm>
+          <a:prstGeom prst="rect">
+            <a:avLst/>
+          </a:prstGeom>
+          <a:noFill/>
+          <a:ln/>
+        </p:spPr>
+        <p:txBody>
+          <a:bodyPr wrap="square" lIns="0" tIns="0" rIns="0" bIns="0" rtlCol="0" anchor="ctr"/>
+          <a:lstStyle/>
+          <a:p>
+            <a:pPr algn="ctr" indent="0" marL="0">
+              <a:buNone/>
+            </a:pPr>
+            <a:r>
+              <a:rPr lang="en-US" sz="1600" b="1" dirty="0">
+                <a:solidFill>
+                  <a:srgbClr val="0D9488"/>
+                </a:solidFill>
+                <a:latin typeface="Trebuchet MS" pitchFamily="34" charset="0"/>
+                <a:ea typeface="Trebuchet MS" pitchFamily="34" charset="-122"/>
+                <a:cs typeface="Trebuchet MS" pitchFamily="34" charset="-120"/>
+              </a:rPr>
+              <a:t>·</a:t>
+            </a:r>
+            <a:endParaRPr lang="en-US" sz="1600" dirty="0"/>
+          </a:p>
+        </p:txBody>
+      </p:sp>
+      <p:sp>
+        <p:nvSpPr>
+          <p:cNvPr id="34" name="Shape 32"/>
+          <p:cNvSpPr/>
+          <p:nvPr/>
+        </p:nvSpPr>
+        <p:spPr>
+          <a:xfrm>
+            <a:off x="6858000" y="3364992"/>
+            <a:ext cx="1554480" cy="475488"/>
+          </a:xfrm>
+          <a:prstGeom prst="rect">
+            <a:avLst>
+              <a:gd name="adj" fmla="val 9615"/>
+            </a:avLst>
+          </a:prstGeom>
+          <a:solidFill>
+            <a:srgbClr val="FFFFFF"/>
+          </a:solidFill>
+          <a:ln w="12700">
+            <a:solidFill>
+              <a:srgbClr val="0D9488"/>
+            </a:solidFill>
+            <a:prstDash val="solid"/>
+          </a:ln>
+        </p:spPr>
+      </p:sp>
+      <p:sp>
+        <p:nvSpPr>
+          <p:cNvPr id="35" name="Text 33"/>
+          <p:cNvSpPr/>
+          <p:nvPr/>
+        </p:nvSpPr>
+        <p:spPr>
+          <a:xfrm>
+            <a:off x="6858000" y="3364992"/>
+            <a:ext cx="1554480" cy="475488"/>
+          </a:xfrm>
+          <a:prstGeom prst="rect">
+            <a:avLst/>
+          </a:prstGeom>
+          <a:noFill/>
+          <a:ln/>
+        </p:spPr>
+        <p:txBody>
+          <a:bodyPr wrap="square" lIns="0" tIns="0" rIns="0" bIns="0" rtlCol="0" anchor="ctr"/>
+          <a:lstStyle/>
+          <a:p>
+            <a:pPr algn="ctr" indent="0" marL="0">
+              <a:buNone/>
+            </a:pPr>
+            <a:r>
+              <a:rPr lang="en-US" sz="1400" b="1" dirty="0">
+                <a:solidFill>
+                  <a:srgbClr val="0D9488"/>
+                </a:solidFill>
+                <a:latin typeface="Trebuchet MS" pitchFamily="34" charset="0"/>
+                <a:ea typeface="Trebuchet MS" pitchFamily="34" charset="-122"/>
+                <a:cs typeface="Trebuchet MS" pitchFamily="34" charset="-120"/>
+              </a:rPr>
+              <a:t>ter</a:t>
+            </a:r>
+            <a:endParaRPr lang="en-US" sz="1400" dirty="0"/>
+          </a:p>
+        </p:txBody>
+      </p:sp>
+      <p:sp>
+        <p:nvSpPr>
+          <p:cNvPr id="36" name="Shape 34"/>
           <p:cNvSpPr/>
           <p:nvPr/>
         </p:nvSpPr>
@@ -15803,7 +15815,7 @@
       </p:sp>
       <p:sp>
         <p:nvSpPr>
-          <p:cNvPr id="34" name="Text 32"/>
+          <p:cNvPr id="37" name="Text 35"/>
           <p:cNvSpPr/>
           <p:nvPr/>
         </p:nvSpPr>
@@ -15842,18 +15854,18 @@
       </p:sp>
       <p:sp>
         <p:nvSpPr>
-          <p:cNvPr id="35" name="Shape 33"/>
+          <p:cNvPr id="38" name="Shape 36"/>
           <p:cNvSpPr/>
           <p:nvPr/>
         </p:nvSpPr>
         <p:spPr>
           <a:xfrm>
             <a:off x="1874520" y="4096512"/>
-            <a:ext cx="6903720" cy="804672"/>
+            <a:ext cx="6903720" cy="658368"/>
           </a:xfrm>
           <a:prstGeom prst="rect">
             <a:avLst>
-              <a:gd name="adj" fmla="val 6818"/>
+              <a:gd name="adj" fmla="val 8333"/>
             </a:avLst>
           </a:prstGeom>
           <a:solidFill>
@@ -15869,18 +15881,18 @@
       </p:sp>
       <p:sp>
         <p:nvSpPr>
-          <p:cNvPr id="36" name="Shape 34"/>
-          <p:cNvSpPr/>
-          <p:nvPr/>
-        </p:nvSpPr>
-        <p:spPr>
-          <a:xfrm>
-            <a:off x="2023872" y="4169664"/>
-            <a:ext cx="685800" cy="384048"/>
+          <p:cNvPr id="39" name="Shape 37"/>
+          <p:cNvSpPr/>
+          <p:nvPr/>
+        </p:nvSpPr>
+        <p:spPr>
+          <a:xfrm>
+            <a:off x="2124837" y="4169664"/>
+            <a:ext cx="685800" cy="475488"/>
           </a:xfrm>
           <a:prstGeom prst="rect">
             <a:avLst>
-              <a:gd name="adj" fmla="val 9524"/>
+              <a:gd name="adj" fmla="val 7692"/>
             </a:avLst>
           </a:prstGeom>
           <a:solidFill>
@@ -15896,14 +15908,14 @@
       </p:sp>
       <p:sp>
         <p:nvSpPr>
-          <p:cNvPr id="37" name="Text 35"/>
-          <p:cNvSpPr/>
-          <p:nvPr/>
-        </p:nvSpPr>
-        <p:spPr>
-          <a:xfrm>
-            <a:off x="2023872" y="4169664"/>
-            <a:ext cx="685800" cy="384048"/>
+          <p:cNvPr id="40" name="Text 38"/>
+          <p:cNvSpPr/>
+          <p:nvPr/>
+        </p:nvSpPr>
+        <p:spPr>
+          <a:xfrm>
+            <a:off x="2124837" y="4169664"/>
+            <a:ext cx="685800" cy="475488"/>
           </a:xfrm>
           <a:prstGeom prst="rect">
             <a:avLst/>
@@ -15935,18 +15947,18 @@
       </p:sp>
       <p:sp>
         <p:nvSpPr>
-          <p:cNvPr id="38" name="Shape 36"/>
-          <p:cNvSpPr/>
-          <p:nvPr/>
-        </p:nvSpPr>
-        <p:spPr>
-          <a:xfrm>
-            <a:off x="2831592" y="4169664"/>
-            <a:ext cx="685800" cy="384048"/>
+          <p:cNvPr id="41" name="Shape 39"/>
+          <p:cNvSpPr/>
+          <p:nvPr/>
+        </p:nvSpPr>
+        <p:spPr>
+          <a:xfrm>
+            <a:off x="3033522" y="4169664"/>
+            <a:ext cx="685800" cy="475488"/>
           </a:xfrm>
           <a:prstGeom prst="rect">
             <a:avLst>
-              <a:gd name="adj" fmla="val 9524"/>
+              <a:gd name="adj" fmla="val 7692"/>
             </a:avLst>
           </a:prstGeom>
           <a:solidFill>
@@ -15962,14 +15974,14 @@
       </p:sp>
       <p:sp>
         <p:nvSpPr>
-          <p:cNvPr id="39" name="Text 37"/>
-          <p:cNvSpPr/>
-          <p:nvPr/>
-        </p:nvSpPr>
-        <p:spPr>
-          <a:xfrm>
-            <a:off x="2831592" y="4169664"/>
-            <a:ext cx="685800" cy="384048"/>
+          <p:cNvPr id="42" name="Text 40"/>
+          <p:cNvSpPr/>
+          <p:nvPr/>
+        </p:nvSpPr>
+        <p:spPr>
+          <a:xfrm>
+            <a:off x="3033522" y="4169664"/>
+            <a:ext cx="685800" cy="475488"/>
           </a:xfrm>
           <a:prstGeom prst="rect">
             <a:avLst/>
@@ -16001,18 +16013,18 @@
       </p:sp>
       <p:sp>
         <p:nvSpPr>
-          <p:cNvPr id="40" name="Shape 38"/>
-          <p:cNvSpPr/>
-          <p:nvPr/>
-        </p:nvSpPr>
-        <p:spPr>
-          <a:xfrm>
-            <a:off x="3639312" y="4169664"/>
-            <a:ext cx="685800" cy="384048"/>
+          <p:cNvPr id="43" name="Shape 41"/>
+          <p:cNvSpPr/>
+          <p:nvPr/>
+        </p:nvSpPr>
+        <p:spPr>
+          <a:xfrm>
+            <a:off x="3942207" y="4169664"/>
+            <a:ext cx="685800" cy="475488"/>
           </a:xfrm>
           <a:prstGeom prst="rect">
             <a:avLst>
-              <a:gd name="adj" fmla="val 9524"/>
+              <a:gd name="adj" fmla="val 7692"/>
             </a:avLst>
           </a:prstGeom>
           <a:solidFill>
@@ -16028,14 +16040,14 @@
       </p:sp>
       <p:sp>
         <p:nvSpPr>
-          <p:cNvPr id="41" name="Text 39"/>
-          <p:cNvSpPr/>
-          <p:nvPr/>
-        </p:nvSpPr>
-        <p:spPr>
-          <a:xfrm>
-            <a:off x="3639312" y="4169664"/>
-            <a:ext cx="685800" cy="384048"/>
+          <p:cNvPr id="44" name="Text 42"/>
+          <p:cNvSpPr/>
+          <p:nvPr/>
+        </p:nvSpPr>
+        <p:spPr>
+          <a:xfrm>
+            <a:off x="3942207" y="4169664"/>
+            <a:ext cx="685800" cy="475488"/>
           </a:xfrm>
           <a:prstGeom prst="rect">
             <a:avLst/>
@@ -16067,18 +16079,18 @@
       </p:sp>
       <p:sp>
         <p:nvSpPr>
-          <p:cNvPr id="42" name="Shape 40"/>
-          <p:cNvSpPr/>
-          <p:nvPr/>
-        </p:nvSpPr>
-        <p:spPr>
-          <a:xfrm>
-            <a:off x="4447032" y="4169664"/>
-            <a:ext cx="685800" cy="384048"/>
+          <p:cNvPr id="45" name="Shape 43"/>
+          <p:cNvSpPr/>
+          <p:nvPr/>
+        </p:nvSpPr>
+        <p:spPr>
+          <a:xfrm>
+            <a:off x="4850892" y="4169664"/>
+            <a:ext cx="685800" cy="475488"/>
           </a:xfrm>
           <a:prstGeom prst="rect">
             <a:avLst>
-              <a:gd name="adj" fmla="val 9524"/>
+              <a:gd name="adj" fmla="val 7692"/>
             </a:avLst>
           </a:prstGeom>
           <a:solidFill>
@@ -16094,14 +16106,14 @@
       </p:sp>
       <p:sp>
         <p:nvSpPr>
-          <p:cNvPr id="43" name="Text 41"/>
-          <p:cNvSpPr/>
-          <p:nvPr/>
-        </p:nvSpPr>
-        <p:spPr>
-          <a:xfrm>
-            <a:off x="4447032" y="4169664"/>
-            <a:ext cx="685800" cy="384048"/>
+          <p:cNvPr id="46" name="Text 44"/>
+          <p:cNvSpPr/>
+          <p:nvPr/>
+        </p:nvSpPr>
+        <p:spPr>
+          <a:xfrm>
+            <a:off x="4850892" y="4169664"/>
+            <a:ext cx="685800" cy="475488"/>
           </a:xfrm>
           <a:prstGeom prst="rect">
             <a:avLst/>
@@ -16125,7 +16137,7 @@
                 <a:ea typeface="Trebuchet MS" pitchFamily="34" charset="-122"/>
                 <a:cs typeface="Trebuchet MS" pitchFamily="34" charset="-120"/>
               </a:rPr>
-              <a:t>s</a:t>
+              <a:t>m</a:t>
             </a:r>
             <a:endParaRPr lang="en-US" sz="900" dirty="0"/>
           </a:p>
@@ -16133,18 +16145,18 @@
       </p:sp>
       <p:sp>
         <p:nvSpPr>
-          <p:cNvPr id="44" name="Shape 42"/>
-          <p:cNvSpPr/>
-          <p:nvPr/>
-        </p:nvSpPr>
-        <p:spPr>
-          <a:xfrm>
-            <a:off x="5254752" y="4169664"/>
-            <a:ext cx="685800" cy="384048"/>
+          <p:cNvPr id="47" name="Shape 45"/>
+          <p:cNvSpPr/>
+          <p:nvPr/>
+        </p:nvSpPr>
+        <p:spPr>
+          <a:xfrm>
+            <a:off x="5759577" y="4169664"/>
+            <a:ext cx="685800" cy="475488"/>
           </a:xfrm>
           <a:prstGeom prst="rect">
             <a:avLst>
-              <a:gd name="adj" fmla="val 9524"/>
+              <a:gd name="adj" fmla="val 7692"/>
             </a:avLst>
           </a:prstGeom>
           <a:solidFill>
@@ -16160,14 +16172,14 @@
       </p:sp>
       <p:sp>
         <p:nvSpPr>
-          <p:cNvPr id="45" name="Text 43"/>
-          <p:cNvSpPr/>
-          <p:nvPr/>
-        </p:nvSpPr>
-        <p:spPr>
-          <a:xfrm>
-            <a:off x="5254752" y="4169664"/>
-            <a:ext cx="685800" cy="384048"/>
+          <p:cNvPr id="48" name="Text 46"/>
+          <p:cNvSpPr/>
+          <p:nvPr/>
+        </p:nvSpPr>
+        <p:spPr>
+          <a:xfrm>
+            <a:off x="5759577" y="4169664"/>
+            <a:ext cx="685800" cy="475488"/>
           </a:xfrm>
           <a:prstGeom prst="rect">
             <a:avLst/>
@@ -16191,7 +16203,7 @@
                 <a:ea typeface="Trebuchet MS" pitchFamily="34" charset="-122"/>
                 <a:cs typeface="Trebuchet MS" pitchFamily="34" charset="-120"/>
               </a:rPr>
-              <a:t>c</a:t>
+              <a:t>e</a:t>
             </a:r>
             <a:endParaRPr lang="en-US" sz="900" dirty="0"/>
           </a:p>
@@ -16199,57 +16211,18 @@
       </p:sp>
       <p:sp>
         <p:nvSpPr>
-          <p:cNvPr id="46" name="Text 44"/>
-          <p:cNvSpPr/>
-          <p:nvPr/>
-        </p:nvSpPr>
-        <p:spPr>
-          <a:xfrm>
-            <a:off x="5254752" y="4572000"/>
-            <a:ext cx="685800" cy="219456"/>
-          </a:xfrm>
-          <a:prstGeom prst="rect">
-            <a:avLst/>
-          </a:prstGeom>
-          <a:noFill/>
-          <a:ln/>
-        </p:spPr>
-        <p:txBody>
-          <a:bodyPr wrap="square" lIns="0" tIns="0" rIns="0" bIns="0" rtlCol="0" anchor="t"/>
-          <a:lstStyle/>
-          <a:p>
-            <a:pPr algn="ctr" indent="0" marL="0">
-              <a:buNone/>
-            </a:pPr>
-            <a:r>
-              <a:rPr lang="en-US" sz="750" i="1" dirty="0">
-                <a:solidFill>
-                  <a:srgbClr val="94A3B8"/>
-                </a:solidFill>
-                <a:latin typeface="Calibri" pitchFamily="34" charset="0"/>
-                <a:ea typeface="Calibri" pitchFamily="34" charset="-122"/>
-                <a:cs typeface="Calibri" pitchFamily="34" charset="-120"/>
-              </a:rPr>
-              <a:t>/k/</a:t>
-            </a:r>
-            <a:endParaRPr lang="en-US" sz="750" dirty="0"/>
-          </a:p>
-        </p:txBody>
-      </p:sp>
-      <p:sp>
-        <p:nvSpPr>
-          <p:cNvPr id="47" name="Shape 45"/>
-          <p:cNvSpPr/>
-          <p:nvPr/>
-        </p:nvSpPr>
-        <p:spPr>
-          <a:xfrm>
-            <a:off x="6062472" y="4169664"/>
-            <a:ext cx="685800" cy="384048"/>
+          <p:cNvPr id="49" name="Shape 47"/>
+          <p:cNvSpPr/>
+          <p:nvPr/>
+        </p:nvSpPr>
+        <p:spPr>
+          <a:xfrm>
+            <a:off x="6668262" y="4169664"/>
+            <a:ext cx="685800" cy="475488"/>
           </a:xfrm>
           <a:prstGeom prst="rect">
             <a:avLst>
-              <a:gd name="adj" fmla="val 9524"/>
+              <a:gd name="adj" fmla="val 7692"/>
             </a:avLst>
           </a:prstGeom>
           <a:solidFill>
@@ -16265,14 +16238,14 @@
       </p:sp>
       <p:sp>
         <p:nvSpPr>
-          <p:cNvPr id="48" name="Text 46"/>
-          <p:cNvSpPr/>
-          <p:nvPr/>
-        </p:nvSpPr>
-        <p:spPr>
-          <a:xfrm>
-            <a:off x="6062472" y="4169664"/>
-            <a:ext cx="685800" cy="384048"/>
+          <p:cNvPr id="50" name="Text 48"/>
+          <p:cNvSpPr/>
+          <p:nvPr/>
+        </p:nvSpPr>
+        <p:spPr>
+          <a:xfrm>
+            <a:off x="6668262" y="4169664"/>
+            <a:ext cx="685800" cy="475488"/>
           </a:xfrm>
           <a:prstGeom prst="rect">
             <a:avLst/>
@@ -16296,7 +16269,7 @@
                 <a:ea typeface="Trebuchet MS" pitchFamily="34" charset="-122"/>
                 <a:cs typeface="Trebuchet MS" pitchFamily="34" charset="-120"/>
               </a:rPr>
-              <a:t>o</a:t>
+              <a:t>t</a:t>
             </a:r>
             <a:endParaRPr lang="en-US" sz="900" dirty="0"/>
           </a:p>
@@ -16304,18 +16277,18 @@
       </p:sp>
       <p:sp>
         <p:nvSpPr>
-          <p:cNvPr id="49" name="Shape 47"/>
-          <p:cNvSpPr/>
-          <p:nvPr/>
-        </p:nvSpPr>
-        <p:spPr>
-          <a:xfrm>
-            <a:off x="6870192" y="4169664"/>
-            <a:ext cx="685800" cy="384048"/>
+          <p:cNvPr id="51" name="Shape 49"/>
+          <p:cNvSpPr/>
+          <p:nvPr/>
+        </p:nvSpPr>
+        <p:spPr>
+          <a:xfrm>
+            <a:off x="7576947" y="4169664"/>
+            <a:ext cx="685800" cy="475488"/>
           </a:xfrm>
           <a:prstGeom prst="rect">
             <a:avLst>
-              <a:gd name="adj" fmla="val 9524"/>
+              <a:gd name="adj" fmla="val 7692"/>
             </a:avLst>
           </a:prstGeom>
           <a:solidFill>
@@ -16331,14 +16304,14 @@
       </p:sp>
       <p:sp>
         <p:nvSpPr>
-          <p:cNvPr id="50" name="Text 48"/>
-          <p:cNvSpPr/>
-          <p:nvPr/>
-        </p:nvSpPr>
-        <p:spPr>
-          <a:xfrm>
-            <a:off x="6870192" y="4169664"/>
-            <a:ext cx="685800" cy="384048"/>
+          <p:cNvPr id="52" name="Text 50"/>
+          <p:cNvSpPr/>
+          <p:nvPr/>
+        </p:nvSpPr>
+        <p:spPr>
+          <a:xfrm>
+            <a:off x="7576947" y="4169664"/>
+            <a:ext cx="685800" cy="475488"/>
           </a:xfrm>
           <a:prstGeom prst="rect">
             <a:avLst/>
@@ -16362,73 +16335,7 @@
                 <a:ea typeface="Trebuchet MS" pitchFamily="34" charset="-122"/>
                 <a:cs typeface="Trebuchet MS" pitchFamily="34" charset="-120"/>
               </a:rPr>
-              <a:t>p</a:t>
-            </a:r>
-            <a:endParaRPr lang="en-US" sz="900" dirty="0"/>
-          </a:p>
-        </p:txBody>
-      </p:sp>
-      <p:sp>
-        <p:nvSpPr>
-          <p:cNvPr id="51" name="Shape 49"/>
-          <p:cNvSpPr/>
-          <p:nvPr/>
-        </p:nvSpPr>
-        <p:spPr>
-          <a:xfrm>
-            <a:off x="7677912" y="4169664"/>
-            <a:ext cx="685800" cy="384048"/>
-          </a:xfrm>
-          <a:prstGeom prst="rect">
-            <a:avLst>
-              <a:gd name="adj" fmla="val 9524"/>
-            </a:avLst>
-          </a:prstGeom>
-          <a:solidFill>
-            <a:srgbClr val="FFFFFF"/>
-          </a:solidFill>
-          <a:ln w="12700">
-            <a:solidFill>
-              <a:srgbClr val="DB2777"/>
-            </a:solidFill>
-            <a:prstDash val="solid"/>
-          </a:ln>
-        </p:spPr>
-      </p:sp>
-      <p:sp>
-        <p:nvSpPr>
-          <p:cNvPr id="52" name="Text 50"/>
-          <p:cNvSpPr/>
-          <p:nvPr/>
-        </p:nvSpPr>
-        <p:spPr>
-          <a:xfrm>
-            <a:off x="7677912" y="4169664"/>
-            <a:ext cx="685800" cy="384048"/>
-          </a:xfrm>
-          <a:prstGeom prst="rect">
-            <a:avLst/>
-          </a:prstGeom>
-          <a:noFill/>
-          <a:ln/>
-        </p:spPr>
-        <p:txBody>
-          <a:bodyPr wrap="square" lIns="0" tIns="0" rIns="0" bIns="0" rtlCol="0" anchor="ctr"/>
-          <a:lstStyle/>
-          <a:p>
-            <a:pPr algn="ctr" indent="0" marL="0">
-              <a:buNone/>
-            </a:pPr>
-            <a:r>
-              <a:rPr lang="en-US" sz="900" b="1" dirty="0">
-                <a:solidFill>
-                  <a:srgbClr val="9D174D"/>
-                </a:solidFill>
-                <a:latin typeface="Trebuchet MS" pitchFamily="34" charset="0"/>
-                <a:ea typeface="Trebuchet MS" pitchFamily="34" charset="-122"/>
-                <a:cs typeface="Trebuchet MS" pitchFamily="34" charset="-120"/>
-              </a:rPr>
-              <a:t>e</a:t>
+              <a:t>er</a:t>
             </a:r>
             <a:endParaRPr lang="en-US" sz="900" dirty="0"/>
           </a:p>
@@ -17754,7 +17661,7 @@
                 <a:ea typeface="Calibri" pitchFamily="34" charset="-122"/>
                 <a:cs typeface="Calibri" pitchFamily="34" charset="-120"/>
               </a:rPr>
-              <a:t>The </a:t>
+              <a:t>During that </a:t>
             </a:r>
             <a:pPr algn="l" indent="0" marL="0">
               <a:buNone/>
@@ -17771,7 +17678,7 @@
                 <a:ea typeface="Calibri" pitchFamily="34" charset="-122"/>
                 <a:cs typeface="Calibri" pitchFamily="34" charset="-120"/>
               </a:rPr>
-              <a:t>perimeter</a:t>
+              <a:t>period</a:t>
             </a:r>
             <a:pPr algn="l" indent="0" marL="0">
               <a:buNone/>
@@ -17785,7 +17692,7 @@
                 <a:ea typeface="Calibri" pitchFamily="34" charset="-122"/>
                 <a:cs typeface="Calibri" pitchFamily="34" charset="-120"/>
               </a:rPr>
-              <a:t> of the sports oval was marked out, the </a:t>
+              <a:t>, scientists studied the </a:t>
             </a:r>
             <a:pPr algn="l" indent="0" marL="0">
               <a:buNone/>
@@ -17802,7 +17709,7 @@
                 <a:ea typeface="Calibri" pitchFamily="34" charset="-122"/>
                 <a:cs typeface="Calibri" pitchFamily="34" charset="-120"/>
               </a:rPr>
-              <a:t>peripheral</a:t>
+              <a:t>perihelion</a:t>
             </a:r>
             <a:pPr algn="l" indent="0" marL="0">
               <a:buNone/>
@@ -17816,7 +17723,7 @@
                 <a:ea typeface="Calibri" pitchFamily="34" charset="-122"/>
                 <a:cs typeface="Calibri" pitchFamily="34" charset="-120"/>
               </a:rPr>
-              <a:t> fences were checked, and a </a:t>
+              <a:t> of the comet, and they noticed its </a:t>
             </a:r>
             <a:pPr algn="l" indent="0" marL="0">
               <a:buNone/>
@@ -17833,7 +17740,7 @@
                 <a:ea typeface="Calibri" pitchFamily="34" charset="-122"/>
                 <a:cs typeface="Calibri" pitchFamily="34" charset="-120"/>
               </a:rPr>
-              <a:t>periscope</a:t>
+              <a:t>peripheral</a:t>
             </a:r>
             <a:pPr algn="l" indent="0" marL="0">
               <a:buNone/>
@@ -17847,7 +17754,7 @@
                 <a:ea typeface="Calibri" pitchFamily="34" charset="-122"/>
                 <a:cs typeface="Calibri" pitchFamily="34" charset="-120"/>
               </a:rPr>
-              <a:t> was set up near the pond.</a:t>
+              <a:t> glow was spectacular!</a:t>
             </a:r>
             <a:endParaRPr lang="en-US" sz="1800" dirty="0"/>
           </a:p>
@@ -18002,7 +17909,7 @@
                 <a:ea typeface="Trebuchet MS" pitchFamily="34" charset="-122"/>
                 <a:cs typeface="Trebuchet MS" pitchFamily="34" charset="-120"/>
               </a:rPr>
-              <a:t>perimeter</a:t>
+              <a:t>period</a:t>
             </a:r>
             <a:endParaRPr lang="en-US" sz="1400" dirty="0"/>
           </a:p>
@@ -18130,7 +18037,7 @@
                 <a:ea typeface="Trebuchet MS" pitchFamily="34" charset="-122"/>
                 <a:cs typeface="Trebuchet MS" pitchFamily="34" charset="-120"/>
               </a:rPr>
-              <a:t>peripheral</a:t>
+              <a:t>perihelion</a:t>
             </a:r>
             <a:endParaRPr lang="en-US" sz="1400" dirty="0"/>
           </a:p>
@@ -18258,7 +18165,7 @@
                 <a:ea typeface="Trebuchet MS" pitchFamily="34" charset="-122"/>
                 <a:cs typeface="Trebuchet MS" pitchFamily="34" charset="-120"/>
               </a:rPr>
-              <a:t>periscope</a:t>
+              <a:t>peripheral</a:t>
             </a:r>
             <a:endParaRPr lang="en-US" sz="1400" dirty="0"/>
           </a:p>
@@ -18728,7 +18635,7 @@
                 <a:ea typeface="Trebuchet MS" pitchFamily="34" charset="-122"/>
                 <a:cs typeface="Trebuchet MS" pitchFamily="34" charset="-120"/>
               </a:rPr>
-              <a:t>perimeter</a:t>
+              <a:t>period</a:t>
             </a:r>
             <a:endParaRPr lang="en-US" sz="2800" dirty="0"/>
           </a:p>
@@ -19555,7 +19462,7 @@
                 <a:ea typeface="Trebuchet MS" pitchFamily="34" charset="-122"/>
                 <a:cs typeface="Trebuchet MS" pitchFamily="34" charset="-120"/>
               </a:rPr>
-              <a:t>perimeter</a:t>
+              <a:t>period</a:t>
             </a:r>
             <a:endParaRPr lang="en-US" sz="2800" dirty="0"/>
           </a:p>
@@ -19733,7 +19640,7 @@
                 <a:ea typeface="Calibri" pitchFamily="34" charset="-122"/>
                 <a:cs typeface="Calibri" pitchFamily="34" charset="-120"/>
               </a:rPr>
-              <a:t>around</a:t>
+              <a:t>around, surrounding</a:t>
             </a:r>
             <a:endParaRPr lang="en-US" sz="850" dirty="0"/>
           </a:p>
@@ -19806,7 +19713,7 @@
                 <a:ea typeface="Trebuchet MS" pitchFamily="34" charset="-122"/>
                 <a:cs typeface="Trebuchet MS" pitchFamily="34" charset="-120"/>
               </a:rPr>
-              <a:t>meter</a:t>
+              <a:t>od</a:t>
             </a:r>
             <a:endParaRPr lang="en-US" sz="1300" dirty="0"/>
           </a:p>
@@ -19845,7 +19752,7 @@
                 <a:ea typeface="Calibri" pitchFamily="34" charset="-122"/>
                 <a:cs typeface="Calibri" pitchFamily="34" charset="-120"/>
               </a:rPr>
-              <a:t>measure</a:t>
+              <a:t>way, path</a:t>
             </a:r>
             <a:endParaRPr lang="en-US" sz="850" dirty="0"/>
           </a:p>
@@ -20540,7 +20447,7 @@
                 <a:ea typeface="Trebuchet MS" pitchFamily="34" charset="-122"/>
                 <a:cs typeface="Trebuchet MS" pitchFamily="34" charset="-120"/>
               </a:rPr>
-              <a:t>perimeter</a:t>
+              <a:t>period</a:t>
             </a:r>
             <a:endParaRPr lang="en-US" sz="2800" dirty="0"/>
           </a:p>
@@ -20718,7 +20625,7 @@
                 <a:ea typeface="Calibri" pitchFamily="34" charset="-122"/>
                 <a:cs typeface="Calibri" pitchFamily="34" charset="-120"/>
               </a:rPr>
-              <a:t>around</a:t>
+              <a:t>around, surrounding</a:t>
             </a:r>
             <a:endParaRPr lang="en-US" sz="850" dirty="0"/>
           </a:p>
@@ -20791,7 +20698,7 @@
                 <a:ea typeface="Trebuchet MS" pitchFamily="34" charset="-122"/>
                 <a:cs typeface="Trebuchet MS" pitchFamily="34" charset="-120"/>
               </a:rPr>
-              <a:t>meter</a:t>
+              <a:t>od</a:t>
             </a:r>
             <a:endParaRPr lang="en-US" sz="1300" dirty="0"/>
           </a:p>
@@ -20830,7 +20737,7 @@
                 <a:ea typeface="Calibri" pitchFamily="34" charset="-122"/>
                 <a:cs typeface="Calibri" pitchFamily="34" charset="-120"/>
               </a:rPr>
-              <a:t>measure</a:t>
+              <a:t>way, path</a:t>
             </a:r>
             <a:endParaRPr lang="en-US" sz="850" dirty="0"/>
           </a:p>
@@ -20937,8 +20844,8 @@
         </p:nvSpPr>
         <p:spPr>
           <a:xfrm>
-            <a:off x="1975104" y="3364992"/>
-            <a:ext cx="1554480" cy="475488"/>
+            <a:off x="2313432" y="3364992"/>
+            <a:ext cx="1645920" cy="475488"/>
           </a:xfrm>
           <a:prstGeom prst="rect">
             <a:avLst>
@@ -20964,8 +20871,8 @@
         </p:nvSpPr>
         <p:spPr>
           <a:xfrm>
-            <a:off x="1975104" y="3364992"/>
-            <a:ext cx="1554480" cy="475488"/>
+            <a:off x="2313432" y="3364992"/>
+            <a:ext cx="1645920" cy="475488"/>
           </a:xfrm>
           <a:prstGeom prst="rect">
             <a:avLst/>
@@ -20989,7 +20896,7 @@
                 <a:ea typeface="Trebuchet MS" pitchFamily="34" charset="-122"/>
                 <a:cs typeface="Trebuchet MS" pitchFamily="34" charset="-120"/>
               </a:rPr>
-              <a:t>pe</a:t>
+              <a:t>per</a:t>
             </a:r>
             <a:endParaRPr lang="en-US" sz="1400" dirty="0"/>
           </a:p>
@@ -21003,8 +20910,8 @@
         </p:nvSpPr>
         <p:spPr>
           <a:xfrm>
-            <a:off x="3529584" y="3364992"/>
-            <a:ext cx="73152" cy="475488"/>
+            <a:off x="3959352" y="3364992"/>
+            <a:ext cx="411480" cy="475488"/>
           </a:xfrm>
           <a:prstGeom prst="rect">
             <a:avLst/>
@@ -21042,8 +20949,8 @@
         </p:nvSpPr>
         <p:spPr>
           <a:xfrm>
-            <a:off x="3602736" y="3364992"/>
-            <a:ext cx="1554480" cy="475488"/>
+            <a:off x="4370832" y="3364992"/>
+            <a:ext cx="1645920" cy="475488"/>
           </a:xfrm>
           <a:prstGeom prst="rect">
             <a:avLst>
@@ -21069,8 +20976,8 @@
         </p:nvSpPr>
         <p:spPr>
           <a:xfrm>
-            <a:off x="3602736" y="3364992"/>
-            <a:ext cx="1554480" cy="475488"/>
+            <a:off x="4370832" y="3364992"/>
+            <a:ext cx="1645920" cy="475488"/>
           </a:xfrm>
           <a:prstGeom prst="rect">
             <a:avLst/>
@@ -21094,7 +21001,7 @@
                 <a:ea typeface="Trebuchet MS" pitchFamily="34" charset="-122"/>
                 <a:cs typeface="Trebuchet MS" pitchFamily="34" charset="-120"/>
               </a:rPr>
-              <a:t>rim</a:t>
+              <a:t>i</a:t>
             </a:r>
             <a:endParaRPr lang="en-US" sz="1400" dirty="0"/>
           </a:p>
@@ -21108,8 +21015,8 @@
         </p:nvSpPr>
         <p:spPr>
           <a:xfrm>
-            <a:off x="5157216" y="3364992"/>
-            <a:ext cx="73152" cy="475488"/>
+            <a:off x="6016752" y="3364992"/>
+            <a:ext cx="411480" cy="475488"/>
           </a:xfrm>
           <a:prstGeom prst="rect">
             <a:avLst/>
@@ -21147,8 +21054,8 @@
         </p:nvSpPr>
         <p:spPr>
           <a:xfrm>
-            <a:off x="5230368" y="3364992"/>
-            <a:ext cx="1554480" cy="475488"/>
+            <a:off x="6428232" y="3364992"/>
+            <a:ext cx="1645920" cy="475488"/>
           </a:xfrm>
           <a:prstGeom prst="rect">
             <a:avLst>
@@ -21174,8 +21081,8 @@
         </p:nvSpPr>
         <p:spPr>
           <a:xfrm>
-            <a:off x="5230368" y="3364992"/>
-            <a:ext cx="1554480" cy="475488"/>
+            <a:off x="6428232" y="3364992"/>
+            <a:ext cx="1645920" cy="475488"/>
           </a:xfrm>
           <a:prstGeom prst="rect">
             <a:avLst/>
@@ -21199,7 +21106,7 @@
                 <a:ea typeface="Trebuchet MS" pitchFamily="34" charset="-122"/>
                 <a:cs typeface="Trebuchet MS" pitchFamily="34" charset="-120"/>
               </a:rPr>
-              <a:t>e</a:t>
+              <a:t>od</a:t>
             </a:r>
             <a:endParaRPr lang="en-US" sz="1400" dirty="0"/>
           </a:p>
@@ -21207,119 +21114,80 @@
       </p:sp>
       <p:sp>
         <p:nvSpPr>
-          <p:cNvPr id="33" name="Text 31"/>
-          <p:cNvSpPr/>
-          <p:nvPr/>
-        </p:nvSpPr>
-        <p:spPr>
-          <a:xfrm>
-            <a:off x="6784848" y="3364992"/>
-            <a:ext cx="73152" cy="475488"/>
-          </a:xfrm>
-          <a:prstGeom prst="rect">
-            <a:avLst/>
-          </a:prstGeom>
-          <a:noFill/>
-          <a:ln/>
-        </p:spPr>
-        <p:txBody>
-          <a:bodyPr wrap="square" lIns="0" tIns="0" rIns="0" bIns="0" rtlCol="0" anchor="ctr"/>
-          <a:lstStyle/>
-          <a:p>
-            <a:pPr algn="ctr" indent="0" marL="0">
-              <a:buNone/>
-            </a:pPr>
-            <a:r>
-              <a:rPr lang="en-US" sz="1600" b="1" dirty="0">
-                <a:solidFill>
-                  <a:srgbClr val="0D9488"/>
+          <p:cNvPr id="33" name="Shape 31"/>
+          <p:cNvSpPr/>
+          <p:nvPr/>
+        </p:nvSpPr>
+        <p:spPr>
+          <a:xfrm>
+            <a:off x="365760" y="4096512"/>
+            <a:ext cx="1371600" cy="804672"/>
+          </a:xfrm>
+          <a:prstGeom prst="rect">
+            <a:avLst>
+              <a:gd name="adj" fmla="val 6818"/>
+            </a:avLst>
+          </a:prstGeom>
+          <a:solidFill>
+            <a:srgbClr val="E2E8F0"/>
+          </a:solidFill>
+          <a:ln w="12700">
+            <a:solidFill>
+              <a:srgbClr val="E2E8F0"/>
+            </a:solidFill>
+            <a:prstDash val="solid"/>
+          </a:ln>
+        </p:spPr>
+      </p:sp>
+      <p:sp>
+        <p:nvSpPr>
+          <p:cNvPr id="34" name="Text 32"/>
+          <p:cNvSpPr/>
+          <p:nvPr/>
+        </p:nvSpPr>
+        <p:spPr>
+          <a:xfrm>
+            <a:off x="365760" y="4096512"/>
+            <a:ext cx="1371600" cy="804672"/>
+          </a:xfrm>
+          <a:prstGeom prst="rect">
+            <a:avLst/>
+          </a:prstGeom>
+          <a:noFill/>
+          <a:ln/>
+        </p:spPr>
+        <p:txBody>
+          <a:bodyPr wrap="square" lIns="0" tIns="0" rIns="0" bIns="0" rtlCol="0" anchor="ctr"/>
+          <a:lstStyle/>
+          <a:p>
+            <a:pPr algn="ctr" indent="0" marL="0">
+              <a:buNone/>
+            </a:pPr>
+            <a:r>
+              <a:rPr lang="en-US" sz="1100" b="1" dirty="0">
+                <a:solidFill>
+                  <a:srgbClr val="475569"/>
                 </a:solidFill>
                 <a:latin typeface="Trebuchet MS" pitchFamily="34" charset="0"/>
                 <a:ea typeface="Trebuchet MS" pitchFamily="34" charset="-122"/>
                 <a:cs typeface="Trebuchet MS" pitchFamily="34" charset="-120"/>
               </a:rPr>
-              <a:t>·</a:t>
-            </a:r>
-            <a:endParaRPr lang="en-US" sz="1600" dirty="0"/>
-          </a:p>
-        </p:txBody>
-      </p:sp>
-      <p:sp>
-        <p:nvSpPr>
-          <p:cNvPr id="34" name="Shape 32"/>
-          <p:cNvSpPr/>
-          <p:nvPr/>
-        </p:nvSpPr>
-        <p:spPr>
-          <a:xfrm>
-            <a:off x="6858000" y="3364992"/>
-            <a:ext cx="1554480" cy="475488"/>
-          </a:xfrm>
-          <a:prstGeom prst="rect">
-            <a:avLst>
-              <a:gd name="adj" fmla="val 9615"/>
-            </a:avLst>
-          </a:prstGeom>
-          <a:solidFill>
-            <a:srgbClr val="FFFFFF"/>
-          </a:solidFill>
-          <a:ln w="12700">
-            <a:solidFill>
-              <a:srgbClr val="0D9488"/>
-            </a:solidFill>
-            <a:prstDash val="solid"/>
-          </a:ln>
-        </p:spPr>
-      </p:sp>
-      <p:sp>
-        <p:nvSpPr>
-          <p:cNvPr id="35" name="Text 33"/>
-          <p:cNvSpPr/>
-          <p:nvPr/>
-        </p:nvSpPr>
-        <p:spPr>
-          <a:xfrm>
-            <a:off x="6858000" y="3364992"/>
-            <a:ext cx="1554480" cy="475488"/>
-          </a:xfrm>
-          <a:prstGeom prst="rect">
-            <a:avLst/>
-          </a:prstGeom>
-          <a:noFill/>
-          <a:ln/>
-        </p:spPr>
-        <p:txBody>
-          <a:bodyPr wrap="square" lIns="0" tIns="0" rIns="0" bIns="0" rtlCol="0" anchor="ctr"/>
-          <a:lstStyle/>
-          <a:p>
-            <a:pPr algn="ctr" indent="0" marL="0">
-              <a:buNone/>
-            </a:pPr>
-            <a:r>
-              <a:rPr lang="en-US" sz="1400" b="1" dirty="0">
-                <a:solidFill>
-                  <a:srgbClr val="0D9488"/>
-                </a:solidFill>
-                <a:latin typeface="Trebuchet MS" pitchFamily="34" charset="0"/>
-                <a:ea typeface="Trebuchet MS" pitchFamily="34" charset="-122"/>
-                <a:cs typeface="Trebuchet MS" pitchFamily="34" charset="-120"/>
-              </a:rPr>
-              <a:t>ter</a:t>
-            </a:r>
-            <a:endParaRPr lang="en-US" sz="1400" dirty="0"/>
-          </a:p>
-        </p:txBody>
-      </p:sp>
-      <p:sp>
-        <p:nvSpPr>
-          <p:cNvPr id="36" name="Shape 34"/>
-          <p:cNvSpPr/>
-          <p:nvPr/>
-        </p:nvSpPr>
-        <p:spPr>
-          <a:xfrm>
-            <a:off x="365760" y="4096512"/>
-            <a:ext cx="1371600" cy="804672"/>
+              <a:t>Phonemes</a:t>
+            </a:r>
+            <a:endParaRPr lang="en-US" sz="1100" dirty="0"/>
+          </a:p>
+        </p:txBody>
+      </p:sp>
+      <p:sp>
+        <p:nvSpPr>
+          <p:cNvPr id="35" name="Shape 33"/>
+          <p:cNvSpPr/>
+          <p:nvPr/>
+        </p:nvSpPr>
+        <p:spPr>
+          <a:xfrm>
+            <a:off x="1874520" y="4096512"/>
+            <a:ext cx="6903720" cy="804672"/>
           </a:xfrm>
           <a:prstGeom prst="rect">
             <a:avLst>
@@ -21327,85 +21195,19 @@
             </a:avLst>
           </a:prstGeom>
           <a:solidFill>
-            <a:srgbClr val="E2E8F0"/>
+            <a:srgbClr val="F8FAFC"/>
           </a:solidFill>
           <a:ln w="12700">
             <a:solidFill>
               <a:srgbClr val="E2E8F0"/>
             </a:solidFill>
-            <a:prstDash val="solid"/>
-          </a:ln>
-        </p:spPr>
-      </p:sp>
-      <p:sp>
-        <p:nvSpPr>
-          <p:cNvPr id="37" name="Text 35"/>
-          <p:cNvSpPr/>
-          <p:nvPr/>
-        </p:nvSpPr>
-        <p:spPr>
-          <a:xfrm>
-            <a:off x="365760" y="4096512"/>
-            <a:ext cx="1371600" cy="804672"/>
-          </a:xfrm>
-          <a:prstGeom prst="rect">
-            <a:avLst/>
-          </a:prstGeom>
-          <a:noFill/>
-          <a:ln/>
-        </p:spPr>
-        <p:txBody>
-          <a:bodyPr wrap="square" lIns="0" tIns="0" rIns="0" bIns="0" rtlCol="0" anchor="ctr"/>
-          <a:lstStyle/>
-          <a:p>
-            <a:pPr algn="ctr" indent="0" marL="0">
-              <a:buNone/>
-            </a:pPr>
-            <a:r>
-              <a:rPr lang="en-US" sz="1100" b="1" dirty="0">
-                <a:solidFill>
-                  <a:srgbClr val="475569"/>
-                </a:solidFill>
-                <a:latin typeface="Trebuchet MS" pitchFamily="34" charset="0"/>
-                <a:ea typeface="Trebuchet MS" pitchFamily="34" charset="-122"/>
-                <a:cs typeface="Trebuchet MS" pitchFamily="34" charset="-120"/>
-              </a:rPr>
-              <a:t>Phonemes</a:t>
-            </a:r>
-            <a:endParaRPr lang="en-US" sz="1100" dirty="0"/>
-          </a:p>
-        </p:txBody>
-      </p:sp>
-      <p:sp>
-        <p:nvSpPr>
-          <p:cNvPr id="38" name="Shape 36"/>
-          <p:cNvSpPr/>
-          <p:nvPr/>
-        </p:nvSpPr>
-        <p:spPr>
-          <a:xfrm>
-            <a:off x="1874520" y="4096512"/>
-            <a:ext cx="6903720" cy="804672"/>
-          </a:xfrm>
-          <a:prstGeom prst="rect">
-            <a:avLst>
-              <a:gd name="adj" fmla="val 6818"/>
-            </a:avLst>
-          </a:prstGeom>
-          <a:solidFill>
-            <a:srgbClr val="F8FAFC"/>
-          </a:solidFill>
-          <a:ln w="12700">
-            <a:solidFill>
-              <a:srgbClr val="E2E8F0"/>
-            </a:solidFill>
             <a:prstDash val="dash"/>
           </a:ln>
         </p:spPr>
       </p:sp>
       <p:sp>
         <p:nvSpPr>
-          <p:cNvPr id="39" name="Text 37"/>
+          <p:cNvPr id="36" name="Text 34"/>
           <p:cNvSpPr/>
           <p:nvPr/>
         </p:nvSpPr>
@@ -21867,7 +21669,7 @@
                 <a:ea typeface="Trebuchet MS" pitchFamily="34" charset="-122"/>
                 <a:cs typeface="Trebuchet MS" pitchFamily="34" charset="-120"/>
               </a:rPr>
-              <a:t>perimeter</a:t>
+              <a:t>period</a:t>
             </a:r>
             <a:endParaRPr lang="en-US" sz="2800" dirty="0"/>
           </a:p>
@@ -22045,7 +21847,7 @@
                 <a:ea typeface="Calibri" pitchFamily="34" charset="-122"/>
                 <a:cs typeface="Calibri" pitchFamily="34" charset="-120"/>
               </a:rPr>
-              <a:t>around</a:t>
+              <a:t>around, surrounding</a:t>
             </a:r>
             <a:endParaRPr lang="en-US" sz="850" dirty="0"/>
           </a:p>
@@ -22118,7 +21920,7 @@
                 <a:ea typeface="Trebuchet MS" pitchFamily="34" charset="-122"/>
                 <a:cs typeface="Trebuchet MS" pitchFamily="34" charset="-120"/>
               </a:rPr>
-              <a:t>meter</a:t>
+              <a:t>od</a:t>
             </a:r>
             <a:endParaRPr lang="en-US" sz="1300" dirty="0"/>
           </a:p>
@@ -22157,7 +21959,7 @@
                 <a:ea typeface="Calibri" pitchFamily="34" charset="-122"/>
                 <a:cs typeface="Calibri" pitchFamily="34" charset="-120"/>
               </a:rPr>
-              <a:t>measure</a:t>
+              <a:t>way, path</a:t>
             </a:r>
             <a:endParaRPr lang="en-US" sz="850" dirty="0"/>
           </a:p>
@@ -22264,8 +22066,8 @@
         </p:nvSpPr>
         <p:spPr>
           <a:xfrm>
-            <a:off x="1975104" y="3364992"/>
-            <a:ext cx="1554480" cy="475488"/>
+            <a:off x="2313432" y="3364992"/>
+            <a:ext cx="1645920" cy="475488"/>
           </a:xfrm>
           <a:prstGeom prst="rect">
             <a:avLst>
@@ -22291,8 +22093,8 @@
         </p:nvSpPr>
         <p:spPr>
           <a:xfrm>
-            <a:off x="1975104" y="3364992"/>
-            <a:ext cx="1554480" cy="475488"/>
+            <a:off x="2313432" y="3364992"/>
+            <a:ext cx="1645920" cy="475488"/>
           </a:xfrm>
           <a:prstGeom prst="rect">
             <a:avLst/>
@@ -22316,7 +22118,7 @@
                 <a:ea typeface="Trebuchet MS" pitchFamily="34" charset="-122"/>
                 <a:cs typeface="Trebuchet MS" pitchFamily="34" charset="-120"/>
               </a:rPr>
-              <a:t>pe</a:t>
+              <a:t>per</a:t>
             </a:r>
             <a:endParaRPr lang="en-US" sz="1400" dirty="0"/>
           </a:p>
@@ -22330,8 +22132,8 @@
         </p:nvSpPr>
         <p:spPr>
           <a:xfrm>
-            <a:off x="3529584" y="3364992"/>
-            <a:ext cx="73152" cy="475488"/>
+            <a:off x="3959352" y="3364992"/>
+            <a:ext cx="411480" cy="475488"/>
           </a:xfrm>
           <a:prstGeom prst="rect">
             <a:avLst/>
@@ -22369,8 +22171,8 @@
         </p:nvSpPr>
         <p:spPr>
           <a:xfrm>
-            <a:off x="3602736" y="3364992"/>
-            <a:ext cx="1554480" cy="475488"/>
+            <a:off x="4370832" y="3364992"/>
+            <a:ext cx="1645920" cy="475488"/>
           </a:xfrm>
           <a:prstGeom prst="rect">
             <a:avLst>
@@ -22396,8 +22198,8 @@
         </p:nvSpPr>
         <p:spPr>
           <a:xfrm>
-            <a:off x="3602736" y="3364992"/>
-            <a:ext cx="1554480" cy="475488"/>
+            <a:off x="4370832" y="3364992"/>
+            <a:ext cx="1645920" cy="475488"/>
           </a:xfrm>
           <a:prstGeom prst="rect">
             <a:avLst/>
@@ -22421,7 +22223,7 @@
                 <a:ea typeface="Trebuchet MS" pitchFamily="34" charset="-122"/>
                 <a:cs typeface="Trebuchet MS" pitchFamily="34" charset="-120"/>
               </a:rPr>
-              <a:t>rim</a:t>
+              <a:t>i</a:t>
             </a:r>
             <a:endParaRPr lang="en-US" sz="1400" dirty="0"/>
           </a:p>
@@ -22435,8 +22237,8 @@
         </p:nvSpPr>
         <p:spPr>
           <a:xfrm>
-            <a:off x="5157216" y="3364992"/>
-            <a:ext cx="73152" cy="475488"/>
+            <a:off x="6016752" y="3364992"/>
+            <a:ext cx="411480" cy="475488"/>
           </a:xfrm>
           <a:prstGeom prst="rect">
             <a:avLst/>
@@ -22474,8 +22276,8 @@
         </p:nvSpPr>
         <p:spPr>
           <a:xfrm>
-            <a:off x="5230368" y="3364992"/>
-            <a:ext cx="1554480" cy="475488"/>
+            <a:off x="6428232" y="3364992"/>
+            <a:ext cx="1645920" cy="475488"/>
           </a:xfrm>
           <a:prstGeom prst="rect">
             <a:avLst>
@@ -22501,8 +22303,8 @@
         </p:nvSpPr>
         <p:spPr>
           <a:xfrm>
-            <a:off x="5230368" y="3364992"/>
-            <a:ext cx="1554480" cy="475488"/>
+            <a:off x="6428232" y="3364992"/>
+            <a:ext cx="1645920" cy="475488"/>
           </a:xfrm>
           <a:prstGeom prst="rect">
             <a:avLst/>
@@ -22526,7 +22328,7 @@
                 <a:ea typeface="Trebuchet MS" pitchFamily="34" charset="-122"/>
                 <a:cs typeface="Trebuchet MS" pitchFamily="34" charset="-120"/>
               </a:rPr>
-              <a:t>e</a:t>
+              <a:t>od</a:t>
             </a:r>
             <a:endParaRPr lang="en-US" sz="1400" dirty="0"/>
           </a:p>
@@ -22534,211 +22336,238 @@
       </p:sp>
       <p:sp>
         <p:nvSpPr>
-          <p:cNvPr id="33" name="Text 31"/>
-          <p:cNvSpPr/>
-          <p:nvPr/>
-        </p:nvSpPr>
-        <p:spPr>
-          <a:xfrm>
-            <a:off x="6784848" y="3364992"/>
-            <a:ext cx="73152" cy="475488"/>
-          </a:xfrm>
-          <a:prstGeom prst="rect">
-            <a:avLst/>
-          </a:prstGeom>
-          <a:noFill/>
-          <a:ln/>
-        </p:spPr>
-        <p:txBody>
-          <a:bodyPr wrap="square" lIns="0" tIns="0" rIns="0" bIns="0" rtlCol="0" anchor="ctr"/>
-          <a:lstStyle/>
-          <a:p>
-            <a:pPr algn="ctr" indent="0" marL="0">
-              <a:buNone/>
-            </a:pPr>
-            <a:r>
-              <a:rPr lang="en-US" sz="1600" b="1" dirty="0">
-                <a:solidFill>
-                  <a:srgbClr val="0D9488"/>
+          <p:cNvPr id="33" name="Shape 31"/>
+          <p:cNvSpPr/>
+          <p:nvPr/>
+        </p:nvSpPr>
+        <p:spPr>
+          <a:xfrm>
+            <a:off x="365760" y="4096512"/>
+            <a:ext cx="1371600" cy="804672"/>
+          </a:xfrm>
+          <a:prstGeom prst="rect">
+            <a:avLst>
+              <a:gd name="adj" fmla="val 6818"/>
+            </a:avLst>
+          </a:prstGeom>
+          <a:solidFill>
+            <a:srgbClr val="E2E8F0"/>
+          </a:solidFill>
+          <a:ln w="12700">
+            <a:solidFill>
+              <a:srgbClr val="E2E8F0"/>
+            </a:solidFill>
+            <a:prstDash val="solid"/>
+          </a:ln>
+        </p:spPr>
+      </p:sp>
+      <p:sp>
+        <p:nvSpPr>
+          <p:cNvPr id="34" name="Text 32"/>
+          <p:cNvSpPr/>
+          <p:nvPr/>
+        </p:nvSpPr>
+        <p:spPr>
+          <a:xfrm>
+            <a:off x="365760" y="4096512"/>
+            <a:ext cx="1371600" cy="804672"/>
+          </a:xfrm>
+          <a:prstGeom prst="rect">
+            <a:avLst/>
+          </a:prstGeom>
+          <a:noFill/>
+          <a:ln/>
+        </p:spPr>
+        <p:txBody>
+          <a:bodyPr wrap="square" lIns="0" tIns="0" rIns="0" bIns="0" rtlCol="0" anchor="ctr"/>
+          <a:lstStyle/>
+          <a:p>
+            <a:pPr algn="ctr" indent="0" marL="0">
+              <a:buNone/>
+            </a:pPr>
+            <a:r>
+              <a:rPr lang="en-US" sz="1100" b="1" dirty="0">
+                <a:solidFill>
+                  <a:srgbClr val="475569"/>
                 </a:solidFill>
                 <a:latin typeface="Trebuchet MS" pitchFamily="34" charset="0"/>
                 <a:ea typeface="Trebuchet MS" pitchFamily="34" charset="-122"/>
                 <a:cs typeface="Trebuchet MS" pitchFamily="34" charset="-120"/>
               </a:rPr>
-              <a:t>·</a:t>
-            </a:r>
-            <a:endParaRPr lang="en-US" sz="1600" dirty="0"/>
-          </a:p>
-        </p:txBody>
-      </p:sp>
-      <p:sp>
-        <p:nvSpPr>
-          <p:cNvPr id="34" name="Shape 32"/>
-          <p:cNvSpPr/>
-          <p:nvPr/>
-        </p:nvSpPr>
-        <p:spPr>
-          <a:xfrm>
-            <a:off x="6858000" y="3364992"/>
-            <a:ext cx="1554480" cy="475488"/>
+              <a:t>Phonemes</a:t>
+            </a:r>
+            <a:endParaRPr lang="en-US" sz="1100" dirty="0"/>
+          </a:p>
+        </p:txBody>
+      </p:sp>
+      <p:sp>
+        <p:nvSpPr>
+          <p:cNvPr id="35" name="Shape 33"/>
+          <p:cNvSpPr/>
+          <p:nvPr/>
+        </p:nvSpPr>
+        <p:spPr>
+          <a:xfrm>
+            <a:off x="1874520" y="4096512"/>
+            <a:ext cx="6903720" cy="658368"/>
           </a:xfrm>
           <a:prstGeom prst="rect">
             <a:avLst>
-              <a:gd name="adj" fmla="val 9615"/>
+              <a:gd name="adj" fmla="val 8333"/>
             </a:avLst>
           </a:prstGeom>
           <a:solidFill>
+            <a:srgbClr val="FCE7F3"/>
+          </a:solidFill>
+          <a:ln w="12700">
+            <a:solidFill>
+              <a:srgbClr val="DB2777"/>
+            </a:solidFill>
+            <a:prstDash val="solid"/>
+          </a:ln>
+        </p:spPr>
+      </p:sp>
+      <p:sp>
+        <p:nvSpPr>
+          <p:cNvPr id="36" name="Shape 34"/>
+          <p:cNvSpPr/>
+          <p:nvPr/>
+        </p:nvSpPr>
+        <p:spPr>
+          <a:xfrm>
+            <a:off x="2427732" y="4169664"/>
+            <a:ext cx="685800" cy="475488"/>
+          </a:xfrm>
+          <a:prstGeom prst="rect">
+            <a:avLst>
+              <a:gd name="adj" fmla="val 7692"/>
+            </a:avLst>
+          </a:prstGeom>
+          <a:solidFill>
             <a:srgbClr val="FFFFFF"/>
           </a:solidFill>
           <a:ln w="12700">
             <a:solidFill>
-              <a:srgbClr val="0D9488"/>
-            </a:solidFill>
-            <a:prstDash val="solid"/>
-          </a:ln>
-        </p:spPr>
-      </p:sp>
-      <p:sp>
-        <p:nvSpPr>
-          <p:cNvPr id="35" name="Text 33"/>
-          <p:cNvSpPr/>
-          <p:nvPr/>
-        </p:nvSpPr>
-        <p:spPr>
-          <a:xfrm>
-            <a:off x="6858000" y="3364992"/>
-            <a:ext cx="1554480" cy="475488"/>
-          </a:xfrm>
-          <a:prstGeom prst="rect">
-            <a:avLst/>
-          </a:prstGeom>
-          <a:noFill/>
-          <a:ln/>
-        </p:spPr>
-        <p:txBody>
-          <a:bodyPr wrap="square" lIns="0" tIns="0" rIns="0" bIns="0" rtlCol="0" anchor="ctr"/>
-          <a:lstStyle/>
-          <a:p>
-            <a:pPr algn="ctr" indent="0" marL="0">
-              <a:buNone/>
-            </a:pPr>
-            <a:r>
-              <a:rPr lang="en-US" sz="1400" b="1" dirty="0">
-                <a:solidFill>
-                  <a:srgbClr val="0D9488"/>
+              <a:srgbClr val="DB2777"/>
+            </a:solidFill>
+            <a:prstDash val="solid"/>
+          </a:ln>
+        </p:spPr>
+      </p:sp>
+      <p:sp>
+        <p:nvSpPr>
+          <p:cNvPr id="37" name="Text 35"/>
+          <p:cNvSpPr/>
+          <p:nvPr/>
+        </p:nvSpPr>
+        <p:spPr>
+          <a:xfrm>
+            <a:off x="2427732" y="4169664"/>
+            <a:ext cx="685800" cy="475488"/>
+          </a:xfrm>
+          <a:prstGeom prst="rect">
+            <a:avLst/>
+          </a:prstGeom>
+          <a:noFill/>
+          <a:ln/>
+        </p:spPr>
+        <p:txBody>
+          <a:bodyPr wrap="square" lIns="0" tIns="0" rIns="0" bIns="0" rtlCol="0" anchor="ctr"/>
+          <a:lstStyle/>
+          <a:p>
+            <a:pPr algn="ctr" indent="0" marL="0">
+              <a:buNone/>
+            </a:pPr>
+            <a:r>
+              <a:rPr lang="en-US" sz="900" b="1" dirty="0">
+                <a:solidFill>
+                  <a:srgbClr val="9D174D"/>
                 </a:solidFill>
                 <a:latin typeface="Trebuchet MS" pitchFamily="34" charset="0"/>
                 <a:ea typeface="Trebuchet MS" pitchFamily="34" charset="-122"/>
                 <a:cs typeface="Trebuchet MS" pitchFamily="34" charset="-120"/>
               </a:rPr>
-              <a:t>ter</a:t>
-            </a:r>
-            <a:endParaRPr lang="en-US" sz="1400" dirty="0"/>
-          </a:p>
-        </p:txBody>
-      </p:sp>
-      <p:sp>
-        <p:nvSpPr>
-          <p:cNvPr id="36" name="Shape 34"/>
-          <p:cNvSpPr/>
-          <p:nvPr/>
-        </p:nvSpPr>
-        <p:spPr>
-          <a:xfrm>
-            <a:off x="365760" y="4096512"/>
-            <a:ext cx="1371600" cy="804672"/>
+              <a:t>p</a:t>
+            </a:r>
+            <a:endParaRPr lang="en-US" sz="900" dirty="0"/>
+          </a:p>
+        </p:txBody>
+      </p:sp>
+      <p:sp>
+        <p:nvSpPr>
+          <p:cNvPr id="38" name="Shape 36"/>
+          <p:cNvSpPr/>
+          <p:nvPr/>
+        </p:nvSpPr>
+        <p:spPr>
+          <a:xfrm>
+            <a:off x="3639312" y="4169664"/>
+            <a:ext cx="685800" cy="475488"/>
           </a:xfrm>
           <a:prstGeom prst="rect">
             <a:avLst>
-              <a:gd name="adj" fmla="val 6818"/>
+              <a:gd name="adj" fmla="val 7692"/>
             </a:avLst>
           </a:prstGeom>
           <a:solidFill>
-            <a:srgbClr val="E2E8F0"/>
-          </a:solidFill>
-          <a:ln w="12700">
-            <a:solidFill>
-              <a:srgbClr val="E2E8F0"/>
-            </a:solidFill>
-            <a:prstDash val="solid"/>
-          </a:ln>
-        </p:spPr>
-      </p:sp>
-      <p:sp>
-        <p:nvSpPr>
-          <p:cNvPr id="37" name="Text 35"/>
-          <p:cNvSpPr/>
-          <p:nvPr/>
-        </p:nvSpPr>
-        <p:spPr>
-          <a:xfrm>
-            <a:off x="365760" y="4096512"/>
-            <a:ext cx="1371600" cy="804672"/>
-          </a:xfrm>
-          <a:prstGeom prst="rect">
-            <a:avLst/>
-          </a:prstGeom>
-          <a:noFill/>
-          <a:ln/>
-        </p:spPr>
-        <p:txBody>
-          <a:bodyPr wrap="square" lIns="0" tIns="0" rIns="0" bIns="0" rtlCol="0" anchor="ctr"/>
-          <a:lstStyle/>
-          <a:p>
-            <a:pPr algn="ctr" indent="0" marL="0">
-              <a:buNone/>
-            </a:pPr>
-            <a:r>
-              <a:rPr lang="en-US" sz="1100" b="1" dirty="0">
-                <a:solidFill>
-                  <a:srgbClr val="475569"/>
+            <a:srgbClr val="FFFFFF"/>
+          </a:solidFill>
+          <a:ln w="12700">
+            <a:solidFill>
+              <a:srgbClr val="DB2777"/>
+            </a:solidFill>
+            <a:prstDash val="solid"/>
+          </a:ln>
+        </p:spPr>
+      </p:sp>
+      <p:sp>
+        <p:nvSpPr>
+          <p:cNvPr id="39" name="Text 37"/>
+          <p:cNvSpPr/>
+          <p:nvPr/>
+        </p:nvSpPr>
+        <p:spPr>
+          <a:xfrm>
+            <a:off x="3639312" y="4169664"/>
+            <a:ext cx="685800" cy="475488"/>
+          </a:xfrm>
+          <a:prstGeom prst="rect">
+            <a:avLst/>
+          </a:prstGeom>
+          <a:noFill/>
+          <a:ln/>
+        </p:spPr>
+        <p:txBody>
+          <a:bodyPr wrap="square" lIns="0" tIns="0" rIns="0" bIns="0" rtlCol="0" anchor="ctr"/>
+          <a:lstStyle/>
+          <a:p>
+            <a:pPr algn="ctr" indent="0" marL="0">
+              <a:buNone/>
+            </a:pPr>
+            <a:r>
+              <a:rPr lang="en-US" sz="900" b="1" dirty="0">
+                <a:solidFill>
+                  <a:srgbClr val="9D174D"/>
                 </a:solidFill>
                 <a:latin typeface="Trebuchet MS" pitchFamily="34" charset="0"/>
                 <a:ea typeface="Trebuchet MS" pitchFamily="34" charset="-122"/>
                 <a:cs typeface="Trebuchet MS" pitchFamily="34" charset="-120"/>
               </a:rPr>
-              <a:t>Phonemes</a:t>
-            </a:r>
-            <a:endParaRPr lang="en-US" sz="1100" dirty="0"/>
-          </a:p>
-        </p:txBody>
-      </p:sp>
-      <p:sp>
-        <p:nvSpPr>
-          <p:cNvPr id="38" name="Shape 36"/>
-          <p:cNvSpPr/>
-          <p:nvPr/>
-        </p:nvSpPr>
-        <p:spPr>
-          <a:xfrm>
-            <a:off x="1874520" y="4096512"/>
-            <a:ext cx="6903720" cy="658368"/>
-          </a:xfrm>
-          <a:prstGeom prst="rect">
-            <a:avLst>
-              <a:gd name="adj" fmla="val 8333"/>
-            </a:avLst>
-          </a:prstGeom>
-          <a:solidFill>
-            <a:srgbClr val="FCE7F3"/>
-          </a:solidFill>
-          <a:ln w="12700">
-            <a:solidFill>
-              <a:srgbClr val="DB2777"/>
-            </a:solidFill>
-            <a:prstDash val="solid"/>
-          </a:ln>
-        </p:spPr>
-      </p:sp>
-      <p:sp>
-        <p:nvSpPr>
-          <p:cNvPr id="39" name="Shape 37"/>
-          <p:cNvSpPr/>
-          <p:nvPr/>
-        </p:nvSpPr>
-        <p:spPr>
-          <a:xfrm>
-            <a:off x="2023872" y="4169664"/>
+              <a:t>er</a:t>
+            </a:r>
+            <a:endParaRPr lang="en-US" sz="900" dirty="0"/>
+          </a:p>
+        </p:txBody>
+      </p:sp>
+      <p:sp>
+        <p:nvSpPr>
+          <p:cNvPr id="40" name="Shape 38"/>
+          <p:cNvSpPr/>
+          <p:nvPr/>
+        </p:nvSpPr>
+        <p:spPr>
+          <a:xfrm>
+            <a:off x="4850892" y="4169664"/>
             <a:ext cx="685800" cy="475488"/>
           </a:xfrm>
           <a:prstGeom prst="rect">
@@ -22759,13 +22588,13 @@
       </p:sp>
       <p:sp>
         <p:nvSpPr>
-          <p:cNvPr id="40" name="Text 38"/>
-          <p:cNvSpPr/>
-          <p:nvPr/>
-        </p:nvSpPr>
-        <p:spPr>
-          <a:xfrm>
-            <a:off x="2023872" y="4169664"/>
+          <p:cNvPr id="41" name="Text 39"/>
+          <p:cNvSpPr/>
+          <p:nvPr/>
+        </p:nvSpPr>
+        <p:spPr>
+          <a:xfrm>
+            <a:off x="4850892" y="4169664"/>
             <a:ext cx="685800" cy="475488"/>
           </a:xfrm>
           <a:prstGeom prst="rect">
@@ -22790,7 +22619,7 @@
                 <a:ea typeface="Trebuchet MS" pitchFamily="34" charset="-122"/>
                 <a:cs typeface="Trebuchet MS" pitchFamily="34" charset="-120"/>
               </a:rPr>
-              <a:t>p</a:t>
+              <a:t>i</a:t>
             </a:r>
             <a:endParaRPr lang="en-US" sz="900" dirty="0"/>
           </a:p>
@@ -22798,13 +22627,13 @@
       </p:sp>
       <p:sp>
         <p:nvSpPr>
-          <p:cNvPr id="41" name="Shape 39"/>
-          <p:cNvSpPr/>
-          <p:nvPr/>
-        </p:nvSpPr>
-        <p:spPr>
-          <a:xfrm>
-            <a:off x="2831592" y="4169664"/>
+          <p:cNvPr id="42" name="Shape 40"/>
+          <p:cNvSpPr/>
+          <p:nvPr/>
+        </p:nvSpPr>
+        <p:spPr>
+          <a:xfrm>
+            <a:off x="6062472" y="4169664"/>
             <a:ext cx="685800" cy="475488"/>
           </a:xfrm>
           <a:prstGeom prst="rect">
@@ -22825,13 +22654,13 @@
       </p:sp>
       <p:sp>
         <p:nvSpPr>
-          <p:cNvPr id="42" name="Text 40"/>
-          <p:cNvSpPr/>
-          <p:nvPr/>
-        </p:nvSpPr>
-        <p:spPr>
-          <a:xfrm>
-            <a:off x="2831592" y="4169664"/>
+          <p:cNvPr id="43" name="Text 41"/>
+          <p:cNvSpPr/>
+          <p:nvPr/>
+        </p:nvSpPr>
+        <p:spPr>
+          <a:xfrm>
+            <a:off x="6062472" y="4169664"/>
             <a:ext cx="685800" cy="475488"/>
           </a:xfrm>
           <a:prstGeom prst="rect">
@@ -22856,7 +22685,7 @@
                 <a:ea typeface="Trebuchet MS" pitchFamily="34" charset="-122"/>
                 <a:cs typeface="Trebuchet MS" pitchFamily="34" charset="-120"/>
               </a:rPr>
-              <a:t>e</a:t>
+              <a:t>o</a:t>
             </a:r>
             <a:endParaRPr lang="en-US" sz="900" dirty="0"/>
           </a:p>
@@ -22864,13 +22693,13 @@
       </p:sp>
       <p:sp>
         <p:nvSpPr>
-          <p:cNvPr id="43" name="Shape 41"/>
-          <p:cNvSpPr/>
-          <p:nvPr/>
-        </p:nvSpPr>
-        <p:spPr>
-          <a:xfrm>
-            <a:off x="3639312" y="4169664"/>
+          <p:cNvPr id="44" name="Shape 42"/>
+          <p:cNvSpPr/>
+          <p:nvPr/>
+        </p:nvSpPr>
+        <p:spPr>
+          <a:xfrm>
+            <a:off x="7274052" y="4169664"/>
             <a:ext cx="685800" cy="475488"/>
           </a:xfrm>
           <a:prstGeom prst="rect">
@@ -22891,13 +22720,13 @@
       </p:sp>
       <p:sp>
         <p:nvSpPr>
-          <p:cNvPr id="44" name="Text 42"/>
-          <p:cNvSpPr/>
-          <p:nvPr/>
-        </p:nvSpPr>
-        <p:spPr>
-          <a:xfrm>
-            <a:off x="3639312" y="4169664"/>
+          <p:cNvPr id="45" name="Text 43"/>
+          <p:cNvSpPr/>
+          <p:nvPr/>
+        </p:nvSpPr>
+        <p:spPr>
+          <a:xfrm>
+            <a:off x="7274052" y="4169664"/>
             <a:ext cx="685800" cy="475488"/>
           </a:xfrm>
           <a:prstGeom prst="rect">
@@ -22922,337 +22751,7 @@
                 <a:ea typeface="Trebuchet MS" pitchFamily="34" charset="-122"/>
                 <a:cs typeface="Trebuchet MS" pitchFamily="34" charset="-120"/>
               </a:rPr>
-              <a:t>r</a:t>
-            </a:r>
-            <a:endParaRPr lang="en-US" sz="900" dirty="0"/>
-          </a:p>
-        </p:txBody>
-      </p:sp>
-      <p:sp>
-        <p:nvSpPr>
-          <p:cNvPr id="45" name="Shape 43"/>
-          <p:cNvSpPr/>
-          <p:nvPr/>
-        </p:nvSpPr>
-        <p:spPr>
-          <a:xfrm>
-            <a:off x="4447032" y="4169664"/>
-            <a:ext cx="685800" cy="475488"/>
-          </a:xfrm>
-          <a:prstGeom prst="rect">
-            <a:avLst>
-              <a:gd name="adj" fmla="val 7692"/>
-            </a:avLst>
-          </a:prstGeom>
-          <a:solidFill>
-            <a:srgbClr val="FFFFFF"/>
-          </a:solidFill>
-          <a:ln w="12700">
-            <a:solidFill>
-              <a:srgbClr val="DB2777"/>
-            </a:solidFill>
-            <a:prstDash val="solid"/>
-          </a:ln>
-        </p:spPr>
-      </p:sp>
-      <p:sp>
-        <p:nvSpPr>
-          <p:cNvPr id="46" name="Text 44"/>
-          <p:cNvSpPr/>
-          <p:nvPr/>
-        </p:nvSpPr>
-        <p:spPr>
-          <a:xfrm>
-            <a:off x="4447032" y="4169664"/>
-            <a:ext cx="685800" cy="475488"/>
-          </a:xfrm>
-          <a:prstGeom prst="rect">
-            <a:avLst/>
-          </a:prstGeom>
-          <a:noFill/>
-          <a:ln/>
-        </p:spPr>
-        <p:txBody>
-          <a:bodyPr wrap="square" lIns="0" tIns="0" rIns="0" bIns="0" rtlCol="0" anchor="ctr"/>
-          <a:lstStyle/>
-          <a:p>
-            <a:pPr algn="ctr" indent="0" marL="0">
-              <a:buNone/>
-            </a:pPr>
-            <a:r>
-              <a:rPr lang="en-US" sz="900" b="1" dirty="0">
-                <a:solidFill>
-                  <a:srgbClr val="9D174D"/>
-                </a:solidFill>
-                <a:latin typeface="Trebuchet MS" pitchFamily="34" charset="0"/>
-                <a:ea typeface="Trebuchet MS" pitchFamily="34" charset="-122"/>
-                <a:cs typeface="Trebuchet MS" pitchFamily="34" charset="-120"/>
-              </a:rPr>
-              <a:t>i</a:t>
-            </a:r>
-            <a:endParaRPr lang="en-US" sz="900" dirty="0"/>
-          </a:p>
-        </p:txBody>
-      </p:sp>
-      <p:sp>
-        <p:nvSpPr>
-          <p:cNvPr id="47" name="Shape 45"/>
-          <p:cNvSpPr/>
-          <p:nvPr/>
-        </p:nvSpPr>
-        <p:spPr>
-          <a:xfrm>
-            <a:off x="5254752" y="4169664"/>
-            <a:ext cx="685800" cy="475488"/>
-          </a:xfrm>
-          <a:prstGeom prst="rect">
-            <a:avLst>
-              <a:gd name="adj" fmla="val 7692"/>
-            </a:avLst>
-          </a:prstGeom>
-          <a:solidFill>
-            <a:srgbClr val="FFFFFF"/>
-          </a:solidFill>
-          <a:ln w="12700">
-            <a:solidFill>
-              <a:srgbClr val="DB2777"/>
-            </a:solidFill>
-            <a:prstDash val="solid"/>
-          </a:ln>
-        </p:spPr>
-      </p:sp>
-      <p:sp>
-        <p:nvSpPr>
-          <p:cNvPr id="48" name="Text 46"/>
-          <p:cNvSpPr/>
-          <p:nvPr/>
-        </p:nvSpPr>
-        <p:spPr>
-          <a:xfrm>
-            <a:off x="5254752" y="4169664"/>
-            <a:ext cx="685800" cy="475488"/>
-          </a:xfrm>
-          <a:prstGeom prst="rect">
-            <a:avLst/>
-          </a:prstGeom>
-          <a:noFill/>
-          <a:ln/>
-        </p:spPr>
-        <p:txBody>
-          <a:bodyPr wrap="square" lIns="0" tIns="0" rIns="0" bIns="0" rtlCol="0" anchor="ctr"/>
-          <a:lstStyle/>
-          <a:p>
-            <a:pPr algn="ctr" indent="0" marL="0">
-              <a:buNone/>
-            </a:pPr>
-            <a:r>
-              <a:rPr lang="en-US" sz="900" b="1" dirty="0">
-                <a:solidFill>
-                  <a:srgbClr val="9D174D"/>
-                </a:solidFill>
-                <a:latin typeface="Trebuchet MS" pitchFamily="34" charset="0"/>
-                <a:ea typeface="Trebuchet MS" pitchFamily="34" charset="-122"/>
-                <a:cs typeface="Trebuchet MS" pitchFamily="34" charset="-120"/>
-              </a:rPr>
-              <a:t>m</a:t>
-            </a:r>
-            <a:endParaRPr lang="en-US" sz="900" dirty="0"/>
-          </a:p>
-        </p:txBody>
-      </p:sp>
-      <p:sp>
-        <p:nvSpPr>
-          <p:cNvPr id="49" name="Shape 47"/>
-          <p:cNvSpPr/>
-          <p:nvPr/>
-        </p:nvSpPr>
-        <p:spPr>
-          <a:xfrm>
-            <a:off x="6062472" y="4169664"/>
-            <a:ext cx="685800" cy="475488"/>
-          </a:xfrm>
-          <a:prstGeom prst="rect">
-            <a:avLst>
-              <a:gd name="adj" fmla="val 7692"/>
-            </a:avLst>
-          </a:prstGeom>
-          <a:solidFill>
-            <a:srgbClr val="FFFFFF"/>
-          </a:solidFill>
-          <a:ln w="12700">
-            <a:solidFill>
-              <a:srgbClr val="DB2777"/>
-            </a:solidFill>
-            <a:prstDash val="solid"/>
-          </a:ln>
-        </p:spPr>
-      </p:sp>
-      <p:sp>
-        <p:nvSpPr>
-          <p:cNvPr id="50" name="Text 48"/>
-          <p:cNvSpPr/>
-          <p:nvPr/>
-        </p:nvSpPr>
-        <p:spPr>
-          <a:xfrm>
-            <a:off x="6062472" y="4169664"/>
-            <a:ext cx="685800" cy="475488"/>
-          </a:xfrm>
-          <a:prstGeom prst="rect">
-            <a:avLst/>
-          </a:prstGeom>
-          <a:noFill/>
-          <a:ln/>
-        </p:spPr>
-        <p:txBody>
-          <a:bodyPr wrap="square" lIns="0" tIns="0" rIns="0" bIns="0" rtlCol="0" anchor="ctr"/>
-          <a:lstStyle/>
-          <a:p>
-            <a:pPr algn="ctr" indent="0" marL="0">
-              <a:buNone/>
-            </a:pPr>
-            <a:r>
-              <a:rPr lang="en-US" sz="900" b="1" dirty="0">
-                <a:solidFill>
-                  <a:srgbClr val="9D174D"/>
-                </a:solidFill>
-                <a:latin typeface="Trebuchet MS" pitchFamily="34" charset="0"/>
-                <a:ea typeface="Trebuchet MS" pitchFamily="34" charset="-122"/>
-                <a:cs typeface="Trebuchet MS" pitchFamily="34" charset="-120"/>
-              </a:rPr>
-              <a:t>e</a:t>
-            </a:r>
-            <a:endParaRPr lang="en-US" sz="900" dirty="0"/>
-          </a:p>
-        </p:txBody>
-      </p:sp>
-      <p:sp>
-        <p:nvSpPr>
-          <p:cNvPr id="51" name="Shape 49"/>
-          <p:cNvSpPr/>
-          <p:nvPr/>
-        </p:nvSpPr>
-        <p:spPr>
-          <a:xfrm>
-            <a:off x="6870192" y="4169664"/>
-            <a:ext cx="685800" cy="475488"/>
-          </a:xfrm>
-          <a:prstGeom prst="rect">
-            <a:avLst>
-              <a:gd name="adj" fmla="val 7692"/>
-            </a:avLst>
-          </a:prstGeom>
-          <a:solidFill>
-            <a:srgbClr val="FFFFFF"/>
-          </a:solidFill>
-          <a:ln w="12700">
-            <a:solidFill>
-              <a:srgbClr val="DB2777"/>
-            </a:solidFill>
-            <a:prstDash val="solid"/>
-          </a:ln>
-        </p:spPr>
-      </p:sp>
-      <p:sp>
-        <p:nvSpPr>
-          <p:cNvPr id="52" name="Text 50"/>
-          <p:cNvSpPr/>
-          <p:nvPr/>
-        </p:nvSpPr>
-        <p:spPr>
-          <a:xfrm>
-            <a:off x="6870192" y="4169664"/>
-            <a:ext cx="685800" cy="475488"/>
-          </a:xfrm>
-          <a:prstGeom prst="rect">
-            <a:avLst/>
-          </a:prstGeom>
-          <a:noFill/>
-          <a:ln/>
-        </p:spPr>
-        <p:txBody>
-          <a:bodyPr wrap="square" lIns="0" tIns="0" rIns="0" bIns="0" rtlCol="0" anchor="ctr"/>
-          <a:lstStyle/>
-          <a:p>
-            <a:pPr algn="ctr" indent="0" marL="0">
-              <a:buNone/>
-            </a:pPr>
-            <a:r>
-              <a:rPr lang="en-US" sz="900" b="1" dirty="0">
-                <a:solidFill>
-                  <a:srgbClr val="9D174D"/>
-                </a:solidFill>
-                <a:latin typeface="Trebuchet MS" pitchFamily="34" charset="0"/>
-                <a:ea typeface="Trebuchet MS" pitchFamily="34" charset="-122"/>
-                <a:cs typeface="Trebuchet MS" pitchFamily="34" charset="-120"/>
-              </a:rPr>
-              <a:t>t</a:t>
-            </a:r>
-            <a:endParaRPr lang="en-US" sz="900" dirty="0"/>
-          </a:p>
-        </p:txBody>
-      </p:sp>
-      <p:sp>
-        <p:nvSpPr>
-          <p:cNvPr id="53" name="Shape 51"/>
-          <p:cNvSpPr/>
-          <p:nvPr/>
-        </p:nvSpPr>
-        <p:spPr>
-          <a:xfrm>
-            <a:off x="7677912" y="4169664"/>
-            <a:ext cx="685800" cy="475488"/>
-          </a:xfrm>
-          <a:prstGeom prst="rect">
-            <a:avLst>
-              <a:gd name="adj" fmla="val 7692"/>
-            </a:avLst>
-          </a:prstGeom>
-          <a:solidFill>
-            <a:srgbClr val="FFFFFF"/>
-          </a:solidFill>
-          <a:ln w="12700">
-            <a:solidFill>
-              <a:srgbClr val="DB2777"/>
-            </a:solidFill>
-            <a:prstDash val="solid"/>
-          </a:ln>
-        </p:spPr>
-      </p:sp>
-      <p:sp>
-        <p:nvSpPr>
-          <p:cNvPr id="54" name="Text 52"/>
-          <p:cNvSpPr/>
-          <p:nvPr/>
-        </p:nvSpPr>
-        <p:spPr>
-          <a:xfrm>
-            <a:off x="7677912" y="4169664"/>
-            <a:ext cx="685800" cy="475488"/>
-          </a:xfrm>
-          <a:prstGeom prst="rect">
-            <a:avLst/>
-          </a:prstGeom>
-          <a:noFill/>
-          <a:ln/>
-        </p:spPr>
-        <p:txBody>
-          <a:bodyPr wrap="square" lIns="0" tIns="0" rIns="0" bIns="0" rtlCol="0" anchor="ctr"/>
-          <a:lstStyle/>
-          <a:p>
-            <a:pPr algn="ctr" indent="0" marL="0">
-              <a:buNone/>
-            </a:pPr>
-            <a:r>
-              <a:rPr lang="en-US" sz="900" b="1" dirty="0">
-                <a:solidFill>
-                  <a:srgbClr val="9D174D"/>
-                </a:solidFill>
-                <a:latin typeface="Trebuchet MS" pitchFamily="34" charset="0"/>
-                <a:ea typeface="Trebuchet MS" pitchFamily="34" charset="-122"/>
-                <a:cs typeface="Trebuchet MS" pitchFamily="34" charset="-120"/>
-              </a:rPr>
-              <a:t>er</a:t>
+              <a:t>d</a:t>
             </a:r>
             <a:endParaRPr lang="en-US" sz="900" dirty="0"/>
           </a:p>
@@ -23683,7 +23182,7 @@
                 <a:ea typeface="Trebuchet MS" pitchFamily="34" charset="-122"/>
                 <a:cs typeface="Trebuchet MS" pitchFamily="34" charset="-120"/>
               </a:rPr>
-              <a:t>peripheral</a:t>
+              <a:t>perihelion</a:t>
             </a:r>
             <a:endParaRPr lang="en-US" sz="2800" dirty="0"/>
           </a:p>
@@ -24510,7 +24009,7 @@
                 <a:ea typeface="Trebuchet MS" pitchFamily="34" charset="-122"/>
                 <a:cs typeface="Trebuchet MS" pitchFamily="34" charset="-120"/>
               </a:rPr>
-              <a:t>peripheral</a:t>
+              <a:t>perihelion</a:t>
             </a:r>
             <a:endParaRPr lang="en-US" sz="2800" dirty="0"/>
           </a:p>
@@ -24688,7 +24187,7 @@
                 <a:ea typeface="Calibri" pitchFamily="34" charset="-122"/>
                 <a:cs typeface="Calibri" pitchFamily="34" charset="-120"/>
               </a:rPr>
-              <a:t>around</a:t>
+              <a:t>around, surrounding</a:t>
             </a:r>
             <a:endParaRPr lang="en-US" sz="850" dirty="0"/>
           </a:p>
@@ -24761,7 +24260,7 @@
                 <a:ea typeface="Trebuchet MS" pitchFamily="34" charset="-122"/>
                 <a:cs typeface="Trebuchet MS" pitchFamily="34" charset="-120"/>
               </a:rPr>
-              <a:t>pher</a:t>
+              <a:t>heli</a:t>
             </a:r>
             <a:endParaRPr lang="en-US" sz="1300" dirty="0"/>
           </a:p>
@@ -24800,7 +24299,7 @@
                 <a:ea typeface="Calibri" pitchFamily="34" charset="-122"/>
                 <a:cs typeface="Calibri" pitchFamily="34" charset="-120"/>
               </a:rPr>
-              <a:t>carry, bear</a:t>
+              <a:t>sun</a:t>
             </a:r>
             <a:endParaRPr lang="en-US" sz="850" dirty="0"/>
           </a:p>
@@ -24873,7 +24372,7 @@
                 <a:ea typeface="Trebuchet MS" pitchFamily="34" charset="-122"/>
                 <a:cs typeface="Trebuchet MS" pitchFamily="34" charset="-120"/>
               </a:rPr>
-              <a:t>al</a:t>
+              <a:t>on</a:t>
             </a:r>
             <a:endParaRPr lang="en-US" sz="1300" dirty="0"/>
           </a:p>
@@ -24912,7 +24411,7 @@
                 <a:ea typeface="Calibri" pitchFamily="34" charset="-122"/>
                 <a:cs typeface="Calibri" pitchFamily="34" charset="-120"/>
               </a:rPr>
-              <a:t>relating to</a:t>
+              <a:t>noun-forming ending</a:t>
             </a:r>
             <a:endParaRPr lang="en-US" sz="850" dirty="0"/>
           </a:p>
@@ -26326,7 +25825,7 @@
                 <a:ea typeface="Trebuchet MS" pitchFamily="34" charset="-122"/>
                 <a:cs typeface="Trebuchet MS" pitchFamily="34" charset="-120"/>
               </a:rPr>
-              <a:t>peripheral</a:t>
+              <a:t>perihelion</a:t>
             </a:r>
             <a:endParaRPr lang="en-US" sz="2800" dirty="0"/>
           </a:p>
@@ -26504,7 +26003,7 @@
                 <a:ea typeface="Calibri" pitchFamily="34" charset="-122"/>
                 <a:cs typeface="Calibri" pitchFamily="34" charset="-120"/>
               </a:rPr>
-              <a:t>around</a:t>
+              <a:t>around, surrounding</a:t>
             </a:r>
             <a:endParaRPr lang="en-US" sz="850" dirty="0"/>
           </a:p>
@@ -26577,7 +26076,7 @@
                 <a:ea typeface="Trebuchet MS" pitchFamily="34" charset="-122"/>
                 <a:cs typeface="Trebuchet MS" pitchFamily="34" charset="-120"/>
               </a:rPr>
-              <a:t>pher</a:t>
+              <a:t>heli</a:t>
             </a:r>
             <a:endParaRPr lang="en-US" sz="1300" dirty="0"/>
           </a:p>
@@ -26616,7 +26115,7 @@
                 <a:ea typeface="Calibri" pitchFamily="34" charset="-122"/>
                 <a:cs typeface="Calibri" pitchFamily="34" charset="-120"/>
               </a:rPr>
-              <a:t>carry, bear</a:t>
+              <a:t>sun</a:t>
             </a:r>
             <a:endParaRPr lang="en-US" sz="850" dirty="0"/>
           </a:p>
@@ -26689,7 +26188,7 @@
                 <a:ea typeface="Trebuchet MS" pitchFamily="34" charset="-122"/>
                 <a:cs typeface="Trebuchet MS" pitchFamily="34" charset="-120"/>
               </a:rPr>
-              <a:t>al</a:t>
+              <a:t>on</a:t>
             </a:r>
             <a:endParaRPr lang="en-US" sz="1300" dirty="0"/>
           </a:p>
@@ -26728,7 +26227,7 @@
                 <a:ea typeface="Calibri" pitchFamily="34" charset="-122"/>
                 <a:cs typeface="Calibri" pitchFamily="34" charset="-120"/>
               </a:rPr>
-              <a:t>relating to</a:t>
+              <a:t>noun-forming ending</a:t>
             </a:r>
             <a:endParaRPr lang="en-US" sz="850" dirty="0"/>
           </a:p>
@@ -26835,8 +26334,8 @@
         </p:nvSpPr>
         <p:spPr>
           <a:xfrm>
-            <a:off x="1975104" y="3364992"/>
-            <a:ext cx="1554480" cy="475488"/>
+            <a:off x="1978152" y="3364992"/>
+            <a:ext cx="1225296" cy="475488"/>
           </a:xfrm>
           <a:prstGeom prst="rect">
             <a:avLst>
@@ -26862,8 +26361,8 @@
         </p:nvSpPr>
         <p:spPr>
           <a:xfrm>
-            <a:off x="1975104" y="3364992"/>
-            <a:ext cx="1554480" cy="475488"/>
+            <a:off x="1978152" y="3364992"/>
+            <a:ext cx="1225296" cy="475488"/>
           </a:xfrm>
           <a:prstGeom prst="rect">
             <a:avLst/>
@@ -26887,7 +26386,7 @@
                 <a:ea typeface="Trebuchet MS" pitchFamily="34" charset="-122"/>
                 <a:cs typeface="Trebuchet MS" pitchFamily="34" charset="-120"/>
               </a:rPr>
-              <a:t>pe</a:t>
+              <a:t>per</a:t>
             </a:r>
             <a:endParaRPr lang="en-US" sz="1400" dirty="0"/>
           </a:p>
@@ -26901,8 +26400,8 @@
         </p:nvSpPr>
         <p:spPr>
           <a:xfrm>
-            <a:off x="3529584" y="3364992"/>
-            <a:ext cx="73152" cy="475488"/>
+            <a:off x="3203448" y="3364992"/>
+            <a:ext cx="76200" cy="475488"/>
           </a:xfrm>
           <a:prstGeom prst="rect">
             <a:avLst/>
@@ -26940,8 +26439,8 @@
         </p:nvSpPr>
         <p:spPr>
           <a:xfrm>
-            <a:off x="3602736" y="3364992"/>
-            <a:ext cx="1554480" cy="475488"/>
+            <a:off x="3279648" y="3364992"/>
+            <a:ext cx="1225296" cy="475488"/>
           </a:xfrm>
           <a:prstGeom prst="rect">
             <a:avLst>
@@ -26967,8 +26466,8 @@
         </p:nvSpPr>
         <p:spPr>
           <a:xfrm>
-            <a:off x="3602736" y="3364992"/>
-            <a:ext cx="1554480" cy="475488"/>
+            <a:off x="3279648" y="3364992"/>
+            <a:ext cx="1225296" cy="475488"/>
           </a:xfrm>
           <a:prstGeom prst="rect">
             <a:avLst/>
@@ -26992,7 +26491,7 @@
                 <a:ea typeface="Trebuchet MS" pitchFamily="34" charset="-122"/>
                 <a:cs typeface="Trebuchet MS" pitchFamily="34" charset="-120"/>
               </a:rPr>
-              <a:t>riph</a:t>
+              <a:t>i</a:t>
             </a:r>
             <a:endParaRPr lang="en-US" sz="1400" dirty="0"/>
           </a:p>
@@ -27006,8 +26505,8 @@
         </p:nvSpPr>
         <p:spPr>
           <a:xfrm>
-            <a:off x="5157216" y="3364992"/>
-            <a:ext cx="73152" cy="475488"/>
+            <a:off x="4504944" y="3364992"/>
+            <a:ext cx="76200" cy="475488"/>
           </a:xfrm>
           <a:prstGeom prst="rect">
             <a:avLst/>
@@ -27045,8 +26544,8 @@
         </p:nvSpPr>
         <p:spPr>
           <a:xfrm>
-            <a:off x="5230368" y="3364992"/>
-            <a:ext cx="1554480" cy="475488"/>
+            <a:off x="4581144" y="3364992"/>
+            <a:ext cx="1225296" cy="475488"/>
           </a:xfrm>
           <a:prstGeom prst="rect">
             <a:avLst>
@@ -27072,8 +26571,8 @@
         </p:nvSpPr>
         <p:spPr>
           <a:xfrm>
-            <a:off x="5230368" y="3364992"/>
-            <a:ext cx="1554480" cy="475488"/>
+            <a:off x="4581144" y="3364992"/>
+            <a:ext cx="1225296" cy="475488"/>
           </a:xfrm>
           <a:prstGeom prst="rect">
             <a:avLst/>
@@ -27097,7 +26596,7 @@
                 <a:ea typeface="Trebuchet MS" pitchFamily="34" charset="-122"/>
                 <a:cs typeface="Trebuchet MS" pitchFamily="34" charset="-120"/>
               </a:rPr>
-              <a:t>er</a:t>
+              <a:t>hel</a:t>
             </a:r>
             <a:endParaRPr lang="en-US" sz="1400" dirty="0"/>
           </a:p>
@@ -27111,8 +26610,8 @@
         </p:nvSpPr>
         <p:spPr>
           <a:xfrm>
-            <a:off x="6784848" y="3364992"/>
-            <a:ext cx="73152" cy="475488"/>
+            <a:off x="5806440" y="3364992"/>
+            <a:ext cx="76200" cy="475488"/>
           </a:xfrm>
           <a:prstGeom prst="rect">
             <a:avLst/>
@@ -27150,8 +26649,8 @@
         </p:nvSpPr>
         <p:spPr>
           <a:xfrm>
-            <a:off x="6858000" y="3364992"/>
-            <a:ext cx="1554480" cy="475488"/>
+            <a:off x="5882640" y="3364992"/>
+            <a:ext cx="1225296" cy="475488"/>
           </a:xfrm>
           <a:prstGeom prst="rect">
             <a:avLst>
@@ -27177,8 +26676,8 @@
         </p:nvSpPr>
         <p:spPr>
           <a:xfrm>
-            <a:off x="6858000" y="3364992"/>
-            <a:ext cx="1554480" cy="475488"/>
+            <a:off x="5882640" y="3364992"/>
+            <a:ext cx="1225296" cy="475488"/>
           </a:xfrm>
           <a:prstGeom prst="rect">
             <a:avLst/>
@@ -27202,7 +26701,7 @@
                 <a:ea typeface="Trebuchet MS" pitchFamily="34" charset="-122"/>
                 <a:cs typeface="Trebuchet MS" pitchFamily="34" charset="-120"/>
               </a:rPr>
-              <a:t>al</a:t>
+              <a:t>i</a:t>
             </a:r>
             <a:endParaRPr lang="en-US" sz="1400" dirty="0"/>
           </a:p>
@@ -27210,7 +26709,112 @@
       </p:sp>
       <p:sp>
         <p:nvSpPr>
-          <p:cNvPr id="39" name="Shape 37"/>
+          <p:cNvPr id="39" name="Text 37"/>
+          <p:cNvSpPr/>
+          <p:nvPr/>
+        </p:nvSpPr>
+        <p:spPr>
+          <a:xfrm>
+            <a:off x="7107936" y="3364992"/>
+            <a:ext cx="76200" cy="475488"/>
+          </a:xfrm>
+          <a:prstGeom prst="rect">
+            <a:avLst/>
+          </a:prstGeom>
+          <a:noFill/>
+          <a:ln/>
+        </p:spPr>
+        <p:txBody>
+          <a:bodyPr wrap="square" lIns="0" tIns="0" rIns="0" bIns="0" rtlCol="0" anchor="ctr"/>
+          <a:lstStyle/>
+          <a:p>
+            <a:pPr algn="ctr" indent="0" marL="0">
+              <a:buNone/>
+            </a:pPr>
+            <a:r>
+              <a:rPr lang="en-US" sz="1600" b="1" dirty="0">
+                <a:solidFill>
+                  <a:srgbClr val="0D9488"/>
+                </a:solidFill>
+                <a:latin typeface="Trebuchet MS" pitchFamily="34" charset="0"/>
+                <a:ea typeface="Trebuchet MS" pitchFamily="34" charset="-122"/>
+                <a:cs typeface="Trebuchet MS" pitchFamily="34" charset="-120"/>
+              </a:rPr>
+              <a:t>·</a:t>
+            </a:r>
+            <a:endParaRPr lang="en-US" sz="1600" dirty="0"/>
+          </a:p>
+        </p:txBody>
+      </p:sp>
+      <p:sp>
+        <p:nvSpPr>
+          <p:cNvPr id="40" name="Shape 38"/>
+          <p:cNvSpPr/>
+          <p:nvPr/>
+        </p:nvSpPr>
+        <p:spPr>
+          <a:xfrm>
+            <a:off x="7184136" y="3364992"/>
+            <a:ext cx="1225296" cy="475488"/>
+          </a:xfrm>
+          <a:prstGeom prst="rect">
+            <a:avLst>
+              <a:gd name="adj" fmla="val 9615"/>
+            </a:avLst>
+          </a:prstGeom>
+          <a:solidFill>
+            <a:srgbClr val="FFFFFF"/>
+          </a:solidFill>
+          <a:ln w="12700">
+            <a:solidFill>
+              <a:srgbClr val="0D9488"/>
+            </a:solidFill>
+            <a:prstDash val="solid"/>
+          </a:ln>
+        </p:spPr>
+      </p:sp>
+      <p:sp>
+        <p:nvSpPr>
+          <p:cNvPr id="41" name="Text 39"/>
+          <p:cNvSpPr/>
+          <p:nvPr/>
+        </p:nvSpPr>
+        <p:spPr>
+          <a:xfrm>
+            <a:off x="7184136" y="3364992"/>
+            <a:ext cx="1225296" cy="475488"/>
+          </a:xfrm>
+          <a:prstGeom prst="rect">
+            <a:avLst/>
+          </a:prstGeom>
+          <a:noFill/>
+          <a:ln/>
+        </p:spPr>
+        <p:txBody>
+          <a:bodyPr wrap="square" lIns="0" tIns="0" rIns="0" bIns="0" rtlCol="0" anchor="ctr"/>
+          <a:lstStyle/>
+          <a:p>
+            <a:pPr algn="ctr" indent="0" marL="0">
+              <a:buNone/>
+            </a:pPr>
+            <a:r>
+              <a:rPr lang="en-US" sz="1400" b="1" dirty="0">
+                <a:solidFill>
+                  <a:srgbClr val="0D9488"/>
+                </a:solidFill>
+                <a:latin typeface="Trebuchet MS" pitchFamily="34" charset="0"/>
+                <a:ea typeface="Trebuchet MS" pitchFamily="34" charset="-122"/>
+                <a:cs typeface="Trebuchet MS" pitchFamily="34" charset="-120"/>
+              </a:rPr>
+              <a:t>on</a:t>
+            </a:r>
+            <a:endParaRPr lang="en-US" sz="1400" dirty="0"/>
+          </a:p>
+        </p:txBody>
+      </p:sp>
+      <p:sp>
+        <p:nvSpPr>
+          <p:cNvPr id="42" name="Shape 40"/>
           <p:cNvSpPr/>
           <p:nvPr/>
         </p:nvSpPr>
@@ -27237,7 +26841,7 @@
       </p:sp>
       <p:sp>
         <p:nvSpPr>
-          <p:cNvPr id="40" name="Text 38"/>
+          <p:cNvPr id="43" name="Text 41"/>
           <p:cNvSpPr/>
           <p:nvPr/>
         </p:nvSpPr>
@@ -27276,7 +26880,7 @@
       </p:sp>
       <p:sp>
         <p:nvSpPr>
-          <p:cNvPr id="41" name="Shape 39"/>
+          <p:cNvPr id="44" name="Shape 42"/>
           <p:cNvSpPr/>
           <p:nvPr/>
         </p:nvSpPr>
@@ -27303,7 +26907,7 @@
       </p:sp>
       <p:sp>
         <p:nvSpPr>
-          <p:cNvPr id="42" name="Text 40"/>
+          <p:cNvPr id="45" name="Text 43"/>
           <p:cNvSpPr/>
           <p:nvPr/>
         </p:nvSpPr>
@@ -27765,7 +27369,7 @@
                 <a:ea typeface="Trebuchet MS" pitchFamily="34" charset="-122"/>
                 <a:cs typeface="Trebuchet MS" pitchFamily="34" charset="-120"/>
               </a:rPr>
-              <a:t>peripheral</a:t>
+              <a:t>perihelion</a:t>
             </a:r>
             <a:endParaRPr lang="en-US" sz="2800" dirty="0"/>
           </a:p>
@@ -27943,7 +27547,7 @@
                 <a:ea typeface="Calibri" pitchFamily="34" charset="-122"/>
                 <a:cs typeface="Calibri" pitchFamily="34" charset="-120"/>
               </a:rPr>
-              <a:t>around</a:t>
+              <a:t>around, surrounding</a:t>
             </a:r>
             <a:endParaRPr lang="en-US" sz="850" dirty="0"/>
           </a:p>
@@ -28016,7 +27620,7 @@
                 <a:ea typeface="Trebuchet MS" pitchFamily="34" charset="-122"/>
                 <a:cs typeface="Trebuchet MS" pitchFamily="34" charset="-120"/>
               </a:rPr>
-              <a:t>pher</a:t>
+              <a:t>heli</a:t>
             </a:r>
             <a:endParaRPr lang="en-US" sz="1300" dirty="0"/>
           </a:p>
@@ -28055,7 +27659,7 @@
                 <a:ea typeface="Calibri" pitchFamily="34" charset="-122"/>
                 <a:cs typeface="Calibri" pitchFamily="34" charset="-120"/>
               </a:rPr>
-              <a:t>carry, bear</a:t>
+              <a:t>sun</a:t>
             </a:r>
             <a:endParaRPr lang="en-US" sz="850" dirty="0"/>
           </a:p>
@@ -28128,7 +27732,7 @@
                 <a:ea typeface="Trebuchet MS" pitchFamily="34" charset="-122"/>
                 <a:cs typeface="Trebuchet MS" pitchFamily="34" charset="-120"/>
               </a:rPr>
-              <a:t>al</a:t>
+              <a:t>on</a:t>
             </a:r>
             <a:endParaRPr lang="en-US" sz="1300" dirty="0"/>
           </a:p>
@@ -28167,7 +27771,7 @@
                 <a:ea typeface="Calibri" pitchFamily="34" charset="-122"/>
                 <a:cs typeface="Calibri" pitchFamily="34" charset="-120"/>
               </a:rPr>
-              <a:t>relating to</a:t>
+              <a:t>noun-forming ending</a:t>
             </a:r>
             <a:endParaRPr lang="en-US" sz="850" dirty="0"/>
           </a:p>
@@ -28274,8 +27878,8 @@
         </p:nvSpPr>
         <p:spPr>
           <a:xfrm>
-            <a:off x="1975104" y="3364992"/>
-            <a:ext cx="1554480" cy="475488"/>
+            <a:off x="1978152" y="3364992"/>
+            <a:ext cx="1225296" cy="475488"/>
           </a:xfrm>
           <a:prstGeom prst="rect">
             <a:avLst>
@@ -28301,8 +27905,8 @@
         </p:nvSpPr>
         <p:spPr>
           <a:xfrm>
-            <a:off x="1975104" y="3364992"/>
-            <a:ext cx="1554480" cy="475488"/>
+            <a:off x="1978152" y="3364992"/>
+            <a:ext cx="1225296" cy="475488"/>
           </a:xfrm>
           <a:prstGeom prst="rect">
             <a:avLst/>
@@ -28326,7 +27930,7 @@
                 <a:ea typeface="Trebuchet MS" pitchFamily="34" charset="-122"/>
                 <a:cs typeface="Trebuchet MS" pitchFamily="34" charset="-120"/>
               </a:rPr>
-              <a:t>pe</a:t>
+              <a:t>per</a:t>
             </a:r>
             <a:endParaRPr lang="en-US" sz="1400" dirty="0"/>
           </a:p>
@@ -28340,8 +27944,8 @@
         </p:nvSpPr>
         <p:spPr>
           <a:xfrm>
-            <a:off x="3529584" y="3364992"/>
-            <a:ext cx="73152" cy="475488"/>
+            <a:off x="3203448" y="3364992"/>
+            <a:ext cx="76200" cy="475488"/>
           </a:xfrm>
           <a:prstGeom prst="rect">
             <a:avLst/>
@@ -28379,8 +27983,8 @@
         </p:nvSpPr>
         <p:spPr>
           <a:xfrm>
-            <a:off x="3602736" y="3364992"/>
-            <a:ext cx="1554480" cy="475488"/>
+            <a:off x="3279648" y="3364992"/>
+            <a:ext cx="1225296" cy="475488"/>
           </a:xfrm>
           <a:prstGeom prst="rect">
             <a:avLst>
@@ -28406,8 +28010,8 @@
         </p:nvSpPr>
         <p:spPr>
           <a:xfrm>
-            <a:off x="3602736" y="3364992"/>
-            <a:ext cx="1554480" cy="475488"/>
+            <a:off x="3279648" y="3364992"/>
+            <a:ext cx="1225296" cy="475488"/>
           </a:xfrm>
           <a:prstGeom prst="rect">
             <a:avLst/>
@@ -28431,7 +28035,7 @@
                 <a:ea typeface="Trebuchet MS" pitchFamily="34" charset="-122"/>
                 <a:cs typeface="Trebuchet MS" pitchFamily="34" charset="-120"/>
               </a:rPr>
-              <a:t>riph</a:t>
+              <a:t>i</a:t>
             </a:r>
             <a:endParaRPr lang="en-US" sz="1400" dirty="0"/>
           </a:p>
@@ -28445,8 +28049,8 @@
         </p:nvSpPr>
         <p:spPr>
           <a:xfrm>
-            <a:off x="5157216" y="3364992"/>
-            <a:ext cx="73152" cy="475488"/>
+            <a:off x="4504944" y="3364992"/>
+            <a:ext cx="76200" cy="475488"/>
           </a:xfrm>
           <a:prstGeom prst="rect">
             <a:avLst/>
@@ -28484,8 +28088,8 @@
         </p:nvSpPr>
         <p:spPr>
           <a:xfrm>
-            <a:off x="5230368" y="3364992"/>
-            <a:ext cx="1554480" cy="475488"/>
+            <a:off x="4581144" y="3364992"/>
+            <a:ext cx="1225296" cy="475488"/>
           </a:xfrm>
           <a:prstGeom prst="rect">
             <a:avLst>
@@ -28511,8 +28115,8 @@
         </p:nvSpPr>
         <p:spPr>
           <a:xfrm>
-            <a:off x="5230368" y="3364992"/>
-            <a:ext cx="1554480" cy="475488"/>
+            <a:off x="4581144" y="3364992"/>
+            <a:ext cx="1225296" cy="475488"/>
           </a:xfrm>
           <a:prstGeom prst="rect">
             <a:avLst/>
@@ -28536,7 +28140,7 @@
                 <a:ea typeface="Trebuchet MS" pitchFamily="34" charset="-122"/>
                 <a:cs typeface="Trebuchet MS" pitchFamily="34" charset="-120"/>
               </a:rPr>
-              <a:t>er</a:t>
+              <a:t>hel</a:t>
             </a:r>
             <a:endParaRPr lang="en-US" sz="1400" dirty="0"/>
           </a:p>
@@ -28550,8 +28154,8 @@
         </p:nvSpPr>
         <p:spPr>
           <a:xfrm>
-            <a:off x="6784848" y="3364992"/>
-            <a:ext cx="73152" cy="475488"/>
+            <a:off x="5806440" y="3364992"/>
+            <a:ext cx="76200" cy="475488"/>
           </a:xfrm>
           <a:prstGeom prst="rect">
             <a:avLst/>
@@ -28589,8 +28193,8 @@
         </p:nvSpPr>
         <p:spPr>
           <a:xfrm>
-            <a:off x="6858000" y="3364992"/>
-            <a:ext cx="1554480" cy="475488"/>
+            <a:off x="5882640" y="3364992"/>
+            <a:ext cx="1225296" cy="475488"/>
           </a:xfrm>
           <a:prstGeom prst="rect">
             <a:avLst>
@@ -28616,8 +28220,8 @@
         </p:nvSpPr>
         <p:spPr>
           <a:xfrm>
-            <a:off x="6858000" y="3364992"/>
-            <a:ext cx="1554480" cy="475488"/>
+            <a:off x="5882640" y="3364992"/>
+            <a:ext cx="1225296" cy="475488"/>
           </a:xfrm>
           <a:prstGeom prst="rect">
             <a:avLst/>
@@ -28641,7 +28245,7 @@
                 <a:ea typeface="Trebuchet MS" pitchFamily="34" charset="-122"/>
                 <a:cs typeface="Trebuchet MS" pitchFamily="34" charset="-120"/>
               </a:rPr>
-              <a:t>al</a:t>
+              <a:t>i</a:t>
             </a:r>
             <a:endParaRPr lang="en-US" sz="1400" dirty="0"/>
           </a:p>
@@ -28649,7 +28253,112 @@
       </p:sp>
       <p:sp>
         <p:nvSpPr>
-          <p:cNvPr id="39" name="Shape 37"/>
+          <p:cNvPr id="39" name="Text 37"/>
+          <p:cNvSpPr/>
+          <p:nvPr/>
+        </p:nvSpPr>
+        <p:spPr>
+          <a:xfrm>
+            <a:off x="7107936" y="3364992"/>
+            <a:ext cx="76200" cy="475488"/>
+          </a:xfrm>
+          <a:prstGeom prst="rect">
+            <a:avLst/>
+          </a:prstGeom>
+          <a:noFill/>
+          <a:ln/>
+        </p:spPr>
+        <p:txBody>
+          <a:bodyPr wrap="square" lIns="0" tIns="0" rIns="0" bIns="0" rtlCol="0" anchor="ctr"/>
+          <a:lstStyle/>
+          <a:p>
+            <a:pPr algn="ctr" indent="0" marL="0">
+              <a:buNone/>
+            </a:pPr>
+            <a:r>
+              <a:rPr lang="en-US" sz="1600" b="1" dirty="0">
+                <a:solidFill>
+                  <a:srgbClr val="0D9488"/>
+                </a:solidFill>
+                <a:latin typeface="Trebuchet MS" pitchFamily="34" charset="0"/>
+                <a:ea typeface="Trebuchet MS" pitchFamily="34" charset="-122"/>
+                <a:cs typeface="Trebuchet MS" pitchFamily="34" charset="-120"/>
+              </a:rPr>
+              <a:t>·</a:t>
+            </a:r>
+            <a:endParaRPr lang="en-US" sz="1600" dirty="0"/>
+          </a:p>
+        </p:txBody>
+      </p:sp>
+      <p:sp>
+        <p:nvSpPr>
+          <p:cNvPr id="40" name="Shape 38"/>
+          <p:cNvSpPr/>
+          <p:nvPr/>
+        </p:nvSpPr>
+        <p:spPr>
+          <a:xfrm>
+            <a:off x="7184136" y="3364992"/>
+            <a:ext cx="1225296" cy="475488"/>
+          </a:xfrm>
+          <a:prstGeom prst="rect">
+            <a:avLst>
+              <a:gd name="adj" fmla="val 9615"/>
+            </a:avLst>
+          </a:prstGeom>
+          <a:solidFill>
+            <a:srgbClr val="FFFFFF"/>
+          </a:solidFill>
+          <a:ln w="12700">
+            <a:solidFill>
+              <a:srgbClr val="0D9488"/>
+            </a:solidFill>
+            <a:prstDash val="solid"/>
+          </a:ln>
+        </p:spPr>
+      </p:sp>
+      <p:sp>
+        <p:nvSpPr>
+          <p:cNvPr id="41" name="Text 39"/>
+          <p:cNvSpPr/>
+          <p:nvPr/>
+        </p:nvSpPr>
+        <p:spPr>
+          <a:xfrm>
+            <a:off x="7184136" y="3364992"/>
+            <a:ext cx="1225296" cy="475488"/>
+          </a:xfrm>
+          <a:prstGeom prst="rect">
+            <a:avLst/>
+          </a:prstGeom>
+          <a:noFill/>
+          <a:ln/>
+        </p:spPr>
+        <p:txBody>
+          <a:bodyPr wrap="square" lIns="0" tIns="0" rIns="0" bIns="0" rtlCol="0" anchor="ctr"/>
+          <a:lstStyle/>
+          <a:p>
+            <a:pPr algn="ctr" indent="0" marL="0">
+              <a:buNone/>
+            </a:pPr>
+            <a:r>
+              <a:rPr lang="en-US" sz="1400" b="1" dirty="0">
+                <a:solidFill>
+                  <a:srgbClr val="0D9488"/>
+                </a:solidFill>
+                <a:latin typeface="Trebuchet MS" pitchFamily="34" charset="0"/>
+                <a:ea typeface="Trebuchet MS" pitchFamily="34" charset="-122"/>
+                <a:cs typeface="Trebuchet MS" pitchFamily="34" charset="-120"/>
+              </a:rPr>
+              <a:t>on</a:t>
+            </a:r>
+            <a:endParaRPr lang="en-US" sz="1400" dirty="0"/>
+          </a:p>
+        </p:txBody>
+      </p:sp>
+      <p:sp>
+        <p:nvSpPr>
+          <p:cNvPr id="42" name="Shape 40"/>
           <p:cNvSpPr/>
           <p:nvPr/>
         </p:nvSpPr>
@@ -28676,7 +28385,7 @@
       </p:sp>
       <p:sp>
         <p:nvSpPr>
-          <p:cNvPr id="40" name="Text 38"/>
+          <p:cNvPr id="43" name="Text 41"/>
           <p:cNvSpPr/>
           <p:nvPr/>
         </p:nvSpPr>
@@ -28715,18 +28424,18 @@
       </p:sp>
       <p:sp>
         <p:nvSpPr>
-          <p:cNvPr id="41" name="Shape 39"/>
+          <p:cNvPr id="44" name="Shape 42"/>
           <p:cNvSpPr/>
           <p:nvPr/>
         </p:nvSpPr>
         <p:spPr>
           <a:xfrm>
             <a:off x="1874520" y="4096512"/>
-            <a:ext cx="6903720" cy="804672"/>
+            <a:ext cx="6903720" cy="658368"/>
           </a:xfrm>
           <a:prstGeom prst="rect">
             <a:avLst>
-              <a:gd name="adj" fmla="val 6818"/>
+              <a:gd name="adj" fmla="val 8333"/>
             </a:avLst>
           </a:prstGeom>
           <a:solidFill>
@@ -28742,18 +28451,18 @@
       </p:sp>
       <p:sp>
         <p:nvSpPr>
-          <p:cNvPr id="42" name="Shape 40"/>
-          <p:cNvSpPr/>
-          <p:nvPr/>
-        </p:nvSpPr>
-        <p:spPr>
-          <a:xfrm>
-            <a:off x="2023872" y="4169664"/>
-            <a:ext cx="685800" cy="384048"/>
+          <p:cNvPr id="45" name="Shape 43"/>
+          <p:cNvSpPr/>
+          <p:nvPr/>
+        </p:nvSpPr>
+        <p:spPr>
+          <a:xfrm>
+            <a:off x="1951330" y="4169664"/>
+            <a:ext cx="676656" cy="475488"/>
           </a:xfrm>
           <a:prstGeom prst="rect">
             <a:avLst>
-              <a:gd name="adj" fmla="val 9524"/>
+              <a:gd name="adj" fmla="val 7692"/>
             </a:avLst>
           </a:prstGeom>
           <a:solidFill>
@@ -28769,14 +28478,14 @@
       </p:sp>
       <p:sp>
         <p:nvSpPr>
-          <p:cNvPr id="43" name="Text 41"/>
-          <p:cNvSpPr/>
-          <p:nvPr/>
-        </p:nvSpPr>
-        <p:spPr>
-          <a:xfrm>
-            <a:off x="2023872" y="4169664"/>
-            <a:ext cx="685800" cy="384048"/>
+          <p:cNvPr id="46" name="Text 44"/>
+          <p:cNvSpPr/>
+          <p:nvPr/>
+        </p:nvSpPr>
+        <p:spPr>
+          <a:xfrm>
+            <a:off x="1951330" y="4169664"/>
+            <a:ext cx="676656" cy="475488"/>
           </a:xfrm>
           <a:prstGeom prst="rect">
             <a:avLst/>
@@ -28808,18 +28517,18 @@
       </p:sp>
       <p:sp>
         <p:nvSpPr>
-          <p:cNvPr id="44" name="Shape 42"/>
-          <p:cNvSpPr/>
-          <p:nvPr/>
-        </p:nvSpPr>
-        <p:spPr>
-          <a:xfrm>
-            <a:off x="2831592" y="4169664"/>
-            <a:ext cx="685800" cy="384048"/>
+          <p:cNvPr id="47" name="Shape 45"/>
+          <p:cNvSpPr/>
+          <p:nvPr/>
+        </p:nvSpPr>
+        <p:spPr>
+          <a:xfrm>
+            <a:off x="2677363" y="4169664"/>
+            <a:ext cx="676656" cy="475488"/>
           </a:xfrm>
           <a:prstGeom prst="rect">
             <a:avLst>
-              <a:gd name="adj" fmla="val 9524"/>
+              <a:gd name="adj" fmla="val 7692"/>
             </a:avLst>
           </a:prstGeom>
           <a:solidFill>
@@ -28835,14 +28544,14 @@
       </p:sp>
       <p:sp>
         <p:nvSpPr>
-          <p:cNvPr id="45" name="Text 43"/>
-          <p:cNvSpPr/>
-          <p:nvPr/>
-        </p:nvSpPr>
-        <p:spPr>
-          <a:xfrm>
-            <a:off x="2831592" y="4169664"/>
-            <a:ext cx="685800" cy="384048"/>
+          <p:cNvPr id="48" name="Text 46"/>
+          <p:cNvSpPr/>
+          <p:nvPr/>
+        </p:nvSpPr>
+        <p:spPr>
+          <a:xfrm>
+            <a:off x="2677363" y="4169664"/>
+            <a:ext cx="676656" cy="475488"/>
           </a:xfrm>
           <a:prstGeom prst="rect">
             <a:avLst/>
@@ -28866,7 +28575,7 @@
                 <a:ea typeface="Trebuchet MS" pitchFamily="34" charset="-122"/>
                 <a:cs typeface="Trebuchet MS" pitchFamily="34" charset="-120"/>
               </a:rPr>
-              <a:t>e</a:t>
+              <a:t>er</a:t>
             </a:r>
             <a:endParaRPr lang="en-US" sz="900" dirty="0"/>
           </a:p>
@@ -28874,18 +28583,18 @@
       </p:sp>
       <p:sp>
         <p:nvSpPr>
-          <p:cNvPr id="46" name="Shape 44"/>
-          <p:cNvSpPr/>
-          <p:nvPr/>
-        </p:nvSpPr>
-        <p:spPr>
-          <a:xfrm>
-            <a:off x="3639312" y="4169664"/>
-            <a:ext cx="685800" cy="384048"/>
+          <p:cNvPr id="49" name="Shape 47"/>
+          <p:cNvSpPr/>
+          <p:nvPr/>
+        </p:nvSpPr>
+        <p:spPr>
+          <a:xfrm>
+            <a:off x="3403397" y="4169664"/>
+            <a:ext cx="676656" cy="475488"/>
           </a:xfrm>
           <a:prstGeom prst="rect">
             <a:avLst>
-              <a:gd name="adj" fmla="val 9524"/>
+              <a:gd name="adj" fmla="val 7692"/>
             </a:avLst>
           </a:prstGeom>
           <a:solidFill>
@@ -28901,14 +28610,14 @@
       </p:sp>
       <p:sp>
         <p:nvSpPr>
-          <p:cNvPr id="47" name="Text 45"/>
-          <p:cNvSpPr/>
-          <p:nvPr/>
-        </p:nvSpPr>
-        <p:spPr>
-          <a:xfrm>
-            <a:off x="3639312" y="4169664"/>
-            <a:ext cx="685800" cy="384048"/>
+          <p:cNvPr id="50" name="Text 48"/>
+          <p:cNvSpPr/>
+          <p:nvPr/>
+        </p:nvSpPr>
+        <p:spPr>
+          <a:xfrm>
+            <a:off x="3403397" y="4169664"/>
+            <a:ext cx="676656" cy="475488"/>
           </a:xfrm>
           <a:prstGeom prst="rect">
             <a:avLst/>
@@ -28932,7 +28641,7 @@
                 <a:ea typeface="Trebuchet MS" pitchFamily="34" charset="-122"/>
                 <a:cs typeface="Trebuchet MS" pitchFamily="34" charset="-120"/>
               </a:rPr>
-              <a:t>r</a:t>
+              <a:t>i</a:t>
             </a:r>
             <a:endParaRPr lang="en-US" sz="900" dirty="0"/>
           </a:p>
@@ -28940,18 +28649,18 @@
       </p:sp>
       <p:sp>
         <p:nvSpPr>
-          <p:cNvPr id="48" name="Shape 46"/>
-          <p:cNvSpPr/>
-          <p:nvPr/>
-        </p:nvSpPr>
-        <p:spPr>
-          <a:xfrm>
-            <a:off x="4447032" y="4169664"/>
-            <a:ext cx="685800" cy="384048"/>
+          <p:cNvPr id="51" name="Shape 49"/>
+          <p:cNvSpPr/>
+          <p:nvPr/>
+        </p:nvSpPr>
+        <p:spPr>
+          <a:xfrm>
+            <a:off x="4129430" y="4169664"/>
+            <a:ext cx="676656" cy="475488"/>
           </a:xfrm>
           <a:prstGeom prst="rect">
             <a:avLst>
-              <a:gd name="adj" fmla="val 9524"/>
+              <a:gd name="adj" fmla="val 7692"/>
             </a:avLst>
           </a:prstGeom>
           <a:solidFill>
@@ -28967,14 +28676,14 @@
       </p:sp>
       <p:sp>
         <p:nvSpPr>
-          <p:cNvPr id="49" name="Text 47"/>
-          <p:cNvSpPr/>
-          <p:nvPr/>
-        </p:nvSpPr>
-        <p:spPr>
-          <a:xfrm>
-            <a:off x="4447032" y="4169664"/>
-            <a:ext cx="685800" cy="384048"/>
+          <p:cNvPr id="52" name="Text 50"/>
+          <p:cNvSpPr/>
+          <p:nvPr/>
+        </p:nvSpPr>
+        <p:spPr>
+          <a:xfrm>
+            <a:off x="4129430" y="4169664"/>
+            <a:ext cx="676656" cy="475488"/>
           </a:xfrm>
           <a:prstGeom prst="rect">
             <a:avLst/>
@@ -28998,7 +28707,7 @@
                 <a:ea typeface="Trebuchet MS" pitchFamily="34" charset="-122"/>
                 <a:cs typeface="Trebuchet MS" pitchFamily="34" charset="-120"/>
               </a:rPr>
-              <a:t>i</a:t>
+              <a:t>h</a:t>
             </a:r>
             <a:endParaRPr lang="en-US" sz="900" dirty="0"/>
           </a:p>
@@ -29006,18 +28715,18 @@
       </p:sp>
       <p:sp>
         <p:nvSpPr>
-          <p:cNvPr id="50" name="Shape 48"/>
-          <p:cNvSpPr/>
-          <p:nvPr/>
-        </p:nvSpPr>
-        <p:spPr>
-          <a:xfrm>
-            <a:off x="5254752" y="4169664"/>
-            <a:ext cx="685800" cy="384048"/>
+          <p:cNvPr id="53" name="Shape 51"/>
+          <p:cNvSpPr/>
+          <p:nvPr/>
+        </p:nvSpPr>
+        <p:spPr>
+          <a:xfrm>
+            <a:off x="4855464" y="4169664"/>
+            <a:ext cx="676656" cy="475488"/>
           </a:xfrm>
           <a:prstGeom prst="rect">
             <a:avLst>
-              <a:gd name="adj" fmla="val 9524"/>
+              <a:gd name="adj" fmla="val 7692"/>
             </a:avLst>
           </a:prstGeom>
           <a:solidFill>
@@ -29033,14 +28742,14 @@
       </p:sp>
       <p:sp>
         <p:nvSpPr>
-          <p:cNvPr id="51" name="Text 49"/>
-          <p:cNvSpPr/>
-          <p:nvPr/>
-        </p:nvSpPr>
-        <p:spPr>
-          <a:xfrm>
-            <a:off x="5254752" y="4169664"/>
-            <a:ext cx="685800" cy="384048"/>
+          <p:cNvPr id="54" name="Text 52"/>
+          <p:cNvSpPr/>
+          <p:nvPr/>
+        </p:nvSpPr>
+        <p:spPr>
+          <a:xfrm>
+            <a:off x="4855464" y="4169664"/>
+            <a:ext cx="676656" cy="475488"/>
           </a:xfrm>
           <a:prstGeom prst="rect">
             <a:avLst/>
@@ -29064,7 +28773,7 @@
                 <a:ea typeface="Trebuchet MS" pitchFamily="34" charset="-122"/>
                 <a:cs typeface="Trebuchet MS" pitchFamily="34" charset="-120"/>
               </a:rPr>
-              <a:t>ph</a:t>
+              <a:t>e</a:t>
             </a:r>
             <a:endParaRPr lang="en-US" sz="900" dirty="0"/>
           </a:p>
@@ -29072,57 +28781,18 @@
       </p:sp>
       <p:sp>
         <p:nvSpPr>
-          <p:cNvPr id="52" name="Text 50"/>
-          <p:cNvSpPr/>
-          <p:nvPr/>
-        </p:nvSpPr>
-        <p:spPr>
-          <a:xfrm>
-            <a:off x="5254752" y="4572000"/>
-            <a:ext cx="685800" cy="219456"/>
-          </a:xfrm>
-          <a:prstGeom prst="rect">
-            <a:avLst/>
-          </a:prstGeom>
-          <a:noFill/>
-          <a:ln/>
-        </p:spPr>
-        <p:txBody>
-          <a:bodyPr wrap="square" lIns="0" tIns="0" rIns="0" bIns="0" rtlCol="0" anchor="t"/>
-          <a:lstStyle/>
-          <a:p>
-            <a:pPr algn="ctr" indent="0" marL="0">
-              <a:buNone/>
-            </a:pPr>
-            <a:r>
-              <a:rPr lang="en-US" sz="750" i="1" dirty="0">
-                <a:solidFill>
-                  <a:srgbClr val="94A3B8"/>
-                </a:solidFill>
-                <a:latin typeface="Calibri" pitchFamily="34" charset="0"/>
-                <a:ea typeface="Calibri" pitchFamily="34" charset="-122"/>
-                <a:cs typeface="Calibri" pitchFamily="34" charset="-120"/>
-              </a:rPr>
-              <a:t>/f/</a:t>
-            </a:r>
-            <a:endParaRPr lang="en-US" sz="750" dirty="0"/>
-          </a:p>
-        </p:txBody>
-      </p:sp>
-      <p:sp>
-        <p:nvSpPr>
-          <p:cNvPr id="53" name="Shape 51"/>
-          <p:cNvSpPr/>
-          <p:nvPr/>
-        </p:nvSpPr>
-        <p:spPr>
-          <a:xfrm>
-            <a:off x="6062472" y="4169664"/>
-            <a:ext cx="685800" cy="384048"/>
+          <p:cNvPr id="55" name="Shape 53"/>
+          <p:cNvSpPr/>
+          <p:nvPr/>
+        </p:nvSpPr>
+        <p:spPr>
+          <a:xfrm>
+            <a:off x="5581498" y="4169664"/>
+            <a:ext cx="676656" cy="475488"/>
           </a:xfrm>
           <a:prstGeom prst="rect">
             <a:avLst>
-              <a:gd name="adj" fmla="val 9524"/>
+              <a:gd name="adj" fmla="val 7692"/>
             </a:avLst>
           </a:prstGeom>
           <a:solidFill>
@@ -29138,14 +28808,14 @@
       </p:sp>
       <p:sp>
         <p:nvSpPr>
-          <p:cNvPr id="54" name="Text 52"/>
-          <p:cNvSpPr/>
-          <p:nvPr/>
-        </p:nvSpPr>
-        <p:spPr>
-          <a:xfrm>
-            <a:off x="6062472" y="4169664"/>
-            <a:ext cx="685800" cy="384048"/>
+          <p:cNvPr id="56" name="Text 54"/>
+          <p:cNvSpPr/>
+          <p:nvPr/>
+        </p:nvSpPr>
+        <p:spPr>
+          <a:xfrm>
+            <a:off x="5581498" y="4169664"/>
+            <a:ext cx="676656" cy="475488"/>
           </a:xfrm>
           <a:prstGeom prst="rect">
             <a:avLst/>
@@ -29169,7 +28839,7 @@
                 <a:ea typeface="Trebuchet MS" pitchFamily="34" charset="-122"/>
                 <a:cs typeface="Trebuchet MS" pitchFamily="34" charset="-120"/>
               </a:rPr>
-              <a:t>er</a:t>
+              <a:t>l</a:t>
             </a:r>
             <a:endParaRPr lang="en-US" sz="900" dirty="0"/>
           </a:p>
@@ -29177,18 +28847,18 @@
       </p:sp>
       <p:sp>
         <p:nvSpPr>
-          <p:cNvPr id="55" name="Shape 53"/>
-          <p:cNvSpPr/>
-          <p:nvPr/>
-        </p:nvSpPr>
-        <p:spPr>
-          <a:xfrm>
-            <a:off x="6870192" y="4169664"/>
-            <a:ext cx="685800" cy="384048"/>
+          <p:cNvPr id="57" name="Shape 55"/>
+          <p:cNvSpPr/>
+          <p:nvPr/>
+        </p:nvSpPr>
+        <p:spPr>
+          <a:xfrm>
+            <a:off x="6307531" y="4169664"/>
+            <a:ext cx="676656" cy="475488"/>
           </a:xfrm>
           <a:prstGeom prst="rect">
             <a:avLst>
-              <a:gd name="adj" fmla="val 9524"/>
+              <a:gd name="adj" fmla="val 7692"/>
             </a:avLst>
           </a:prstGeom>
           <a:solidFill>
@@ -29204,14 +28874,14 @@
       </p:sp>
       <p:sp>
         <p:nvSpPr>
-          <p:cNvPr id="56" name="Text 54"/>
-          <p:cNvSpPr/>
-          <p:nvPr/>
-        </p:nvSpPr>
-        <p:spPr>
-          <a:xfrm>
-            <a:off x="6870192" y="4169664"/>
-            <a:ext cx="685800" cy="384048"/>
+          <p:cNvPr id="58" name="Text 56"/>
+          <p:cNvSpPr/>
+          <p:nvPr/>
+        </p:nvSpPr>
+        <p:spPr>
+          <a:xfrm>
+            <a:off x="6307531" y="4169664"/>
+            <a:ext cx="676656" cy="475488"/>
           </a:xfrm>
           <a:prstGeom prst="rect">
             <a:avLst/>
@@ -29235,7 +28905,7 @@
                 <a:ea typeface="Trebuchet MS" pitchFamily="34" charset="-122"/>
                 <a:cs typeface="Trebuchet MS" pitchFamily="34" charset="-120"/>
               </a:rPr>
-              <a:t>a</a:t>
+              <a:t>i</a:t>
             </a:r>
             <a:endParaRPr lang="en-US" sz="900" dirty="0"/>
           </a:p>
@@ -29243,18 +28913,18 @@
       </p:sp>
       <p:sp>
         <p:nvSpPr>
-          <p:cNvPr id="57" name="Shape 55"/>
-          <p:cNvSpPr/>
-          <p:nvPr/>
-        </p:nvSpPr>
-        <p:spPr>
-          <a:xfrm>
-            <a:off x="7677912" y="4169664"/>
-            <a:ext cx="685800" cy="384048"/>
+          <p:cNvPr id="59" name="Shape 57"/>
+          <p:cNvSpPr/>
+          <p:nvPr/>
+        </p:nvSpPr>
+        <p:spPr>
+          <a:xfrm>
+            <a:off x="7033565" y="4169664"/>
+            <a:ext cx="676656" cy="475488"/>
           </a:xfrm>
           <a:prstGeom prst="rect">
             <a:avLst>
-              <a:gd name="adj" fmla="val 9524"/>
+              <a:gd name="adj" fmla="val 7692"/>
             </a:avLst>
           </a:prstGeom>
           <a:solidFill>
@@ -29270,14 +28940,14 @@
       </p:sp>
       <p:sp>
         <p:nvSpPr>
-          <p:cNvPr id="58" name="Text 56"/>
-          <p:cNvSpPr/>
-          <p:nvPr/>
-        </p:nvSpPr>
-        <p:spPr>
-          <a:xfrm>
-            <a:off x="7677912" y="4169664"/>
-            <a:ext cx="685800" cy="384048"/>
+          <p:cNvPr id="60" name="Text 58"/>
+          <p:cNvSpPr/>
+          <p:nvPr/>
+        </p:nvSpPr>
+        <p:spPr>
+          <a:xfrm>
+            <a:off x="7033565" y="4169664"/>
+            <a:ext cx="676656" cy="475488"/>
           </a:xfrm>
           <a:prstGeom prst="rect">
             <a:avLst/>
@@ -29301,7 +28971,73 @@
                 <a:ea typeface="Trebuchet MS" pitchFamily="34" charset="-122"/>
                 <a:cs typeface="Trebuchet MS" pitchFamily="34" charset="-120"/>
               </a:rPr>
-              <a:t>l</a:t>
+              <a:t>o</a:t>
+            </a:r>
+            <a:endParaRPr lang="en-US" sz="900" dirty="0"/>
+          </a:p>
+        </p:txBody>
+      </p:sp>
+      <p:sp>
+        <p:nvSpPr>
+          <p:cNvPr id="61" name="Shape 59"/>
+          <p:cNvSpPr/>
+          <p:nvPr/>
+        </p:nvSpPr>
+        <p:spPr>
+          <a:xfrm>
+            <a:off x="7759598" y="4169664"/>
+            <a:ext cx="676656" cy="475488"/>
+          </a:xfrm>
+          <a:prstGeom prst="rect">
+            <a:avLst>
+              <a:gd name="adj" fmla="val 7692"/>
+            </a:avLst>
+          </a:prstGeom>
+          <a:solidFill>
+            <a:srgbClr val="FFFFFF"/>
+          </a:solidFill>
+          <a:ln w="12700">
+            <a:solidFill>
+              <a:srgbClr val="DB2777"/>
+            </a:solidFill>
+            <a:prstDash val="solid"/>
+          </a:ln>
+        </p:spPr>
+      </p:sp>
+      <p:sp>
+        <p:nvSpPr>
+          <p:cNvPr id="62" name="Text 60"/>
+          <p:cNvSpPr/>
+          <p:nvPr/>
+        </p:nvSpPr>
+        <p:spPr>
+          <a:xfrm>
+            <a:off x="7759598" y="4169664"/>
+            <a:ext cx="676656" cy="475488"/>
+          </a:xfrm>
+          <a:prstGeom prst="rect">
+            <a:avLst/>
+          </a:prstGeom>
+          <a:noFill/>
+          <a:ln/>
+        </p:spPr>
+        <p:txBody>
+          <a:bodyPr wrap="square" lIns="0" tIns="0" rIns="0" bIns="0" rtlCol="0" anchor="ctr"/>
+          <a:lstStyle/>
+          <a:p>
+            <a:pPr algn="ctr" indent="0" marL="0">
+              <a:buNone/>
+            </a:pPr>
+            <a:r>
+              <a:rPr lang="en-US" sz="900" b="1" dirty="0">
+                <a:solidFill>
+                  <a:srgbClr val="9D174D"/>
+                </a:solidFill>
+                <a:latin typeface="Trebuchet MS" pitchFamily="34" charset="0"/>
+                <a:ea typeface="Trebuchet MS" pitchFamily="34" charset="-122"/>
+                <a:cs typeface="Trebuchet MS" pitchFamily="34" charset="-120"/>
+              </a:rPr>
+              <a:t>n</a:t>
             </a:r>
             <a:endParaRPr lang="en-US" sz="900" dirty="0"/>
           </a:p>
@@ -29732,7 +29468,7 @@
                 <a:ea typeface="Trebuchet MS" pitchFamily="34" charset="-122"/>
                 <a:cs typeface="Trebuchet MS" pitchFamily="34" charset="-120"/>
               </a:rPr>
-              <a:t>periscope</a:t>
+              <a:t>peripheral</a:t>
             </a:r>
             <a:endParaRPr lang="en-US" sz="2800" dirty="0"/>
           </a:p>
@@ -30559,7 +30295,7 @@
                 <a:ea typeface="Trebuchet MS" pitchFamily="34" charset="-122"/>
                 <a:cs typeface="Trebuchet MS" pitchFamily="34" charset="-120"/>
               </a:rPr>
-              <a:t>periscope</a:t>
+              <a:t>peripheral</a:t>
             </a:r>
             <a:endParaRPr lang="en-US" sz="2800" dirty="0"/>
           </a:p>
@@ -30639,7 +30375,7 @@
         </p:nvSpPr>
         <p:spPr>
           <a:xfrm>
-            <a:off x="2938272" y="2258568"/>
+            <a:off x="2221992" y="2258568"/>
             <a:ext cx="1828800" cy="292608"/>
           </a:xfrm>
           <a:prstGeom prst="rect">
@@ -30673,7 +30409,7 @@
         </p:nvSpPr>
         <p:spPr>
           <a:xfrm>
-            <a:off x="2938272" y="2258568"/>
+            <a:off x="2221992" y="2258568"/>
             <a:ext cx="1828800" cy="292608"/>
           </a:xfrm>
           <a:prstGeom prst="rect">
@@ -30712,7 +30448,7 @@
         </p:nvSpPr>
         <p:spPr>
           <a:xfrm>
-            <a:off x="2938272" y="2569464"/>
+            <a:off x="2221992" y="2569464"/>
             <a:ext cx="1828800" cy="201168"/>
           </a:xfrm>
           <a:prstGeom prst="rect">
@@ -30737,7 +30473,7 @@
                 <a:ea typeface="Calibri" pitchFamily="34" charset="-122"/>
                 <a:cs typeface="Calibri" pitchFamily="34" charset="-120"/>
               </a:rPr>
-              <a:t>around</a:t>
+              <a:t>around, surrounding</a:t>
             </a:r>
             <a:endParaRPr lang="en-US" sz="850" dirty="0"/>
           </a:p>
@@ -30751,7 +30487,7 @@
         </p:nvSpPr>
         <p:spPr>
           <a:xfrm>
-            <a:off x="5803392" y="2258568"/>
+            <a:off x="4370832" y="2258568"/>
             <a:ext cx="1828800" cy="292608"/>
           </a:xfrm>
           <a:prstGeom prst="rect">
@@ -30785,7 +30521,7 @@
         </p:nvSpPr>
         <p:spPr>
           <a:xfrm>
-            <a:off x="5803392" y="2258568"/>
+            <a:off x="4370832" y="2258568"/>
             <a:ext cx="1828800" cy="292608"/>
           </a:xfrm>
           <a:prstGeom prst="rect">
@@ -30810,7 +30546,7 @@
                 <a:ea typeface="Trebuchet MS" pitchFamily="34" charset="-122"/>
                 <a:cs typeface="Trebuchet MS" pitchFamily="34" charset="-120"/>
               </a:rPr>
-              <a:t>scope</a:t>
+              <a:t>pher</a:t>
             </a:r>
             <a:endParaRPr lang="en-US" sz="1300" dirty="0"/>
           </a:p>
@@ -30824,7 +30560,7 @@
         </p:nvSpPr>
         <p:spPr>
           <a:xfrm>
-            <a:off x="5803392" y="2569464"/>
+            <a:off x="4370832" y="2569464"/>
             <a:ext cx="1828800" cy="201168"/>
           </a:xfrm>
           <a:prstGeom prst="rect">
@@ -30849,7 +30585,7 @@
                 <a:ea typeface="Calibri" pitchFamily="34" charset="-122"/>
                 <a:cs typeface="Calibri" pitchFamily="34" charset="-120"/>
               </a:rPr>
-              <a:t>look, see</a:t>
+              <a:t>carry, bear</a:t>
             </a:r>
             <a:endParaRPr lang="en-US" sz="850" dirty="0"/>
           </a:p>
@@ -30858,6 +30594,118 @@
       <p:sp>
         <p:nvSpPr>
           <p:cNvPr id="22" name="Shape 20"/>
+          <p:cNvSpPr/>
+          <p:nvPr/>
+        </p:nvSpPr>
+        <p:spPr>
+          <a:xfrm>
+            <a:off x="6519672" y="2258568"/>
+            <a:ext cx="1828800" cy="292608"/>
+          </a:xfrm>
+          <a:prstGeom prst="rect">
+            <a:avLst>
+              <a:gd name="adj" fmla="val 25000"/>
+            </a:avLst>
+          </a:prstGeom>
+          <a:solidFill>
+            <a:srgbClr val="FCE7F3"/>
+          </a:solidFill>
+          <a:ln w="19050">
+            <a:solidFill>
+              <a:srgbClr val="DB2777"/>
+            </a:solidFill>
+            <a:prstDash val="solid"/>
+          </a:ln>
+          <a:effectLst>
+            <a:outerShdw sx="100000" sy="100000" kx="0" ky="0" algn="bl" rotWithShape="0" blurRad="101600" dist="38100" dir="8100000">
+              <a:srgbClr val="000000">
+                <a:alpha val="12000"/>
+              </a:srgbClr>
+            </a:outerShdw>
+          </a:effectLst>
+        </p:spPr>
+      </p:sp>
+      <p:sp>
+        <p:nvSpPr>
+          <p:cNvPr id="23" name="Text 21"/>
+          <p:cNvSpPr/>
+          <p:nvPr/>
+        </p:nvSpPr>
+        <p:spPr>
+          <a:xfrm>
+            <a:off x="6519672" y="2258568"/>
+            <a:ext cx="1828800" cy="292608"/>
+          </a:xfrm>
+          <a:prstGeom prst="rect">
+            <a:avLst/>
+          </a:prstGeom>
+          <a:noFill/>
+          <a:ln/>
+        </p:spPr>
+        <p:txBody>
+          <a:bodyPr wrap="square" lIns="0" tIns="0" rIns="0" bIns="0" rtlCol="0" anchor="ctr"/>
+          <a:lstStyle/>
+          <a:p>
+            <a:pPr algn="ctr" indent="0" marL="0">
+              <a:buNone/>
+            </a:pPr>
+            <a:r>
+              <a:rPr lang="en-US" sz="1300" b="1" dirty="0">
+                <a:solidFill>
+                  <a:srgbClr val="9D174D"/>
+                </a:solidFill>
+                <a:latin typeface="Trebuchet MS" pitchFamily="34" charset="0"/>
+                <a:ea typeface="Trebuchet MS" pitchFamily="34" charset="-122"/>
+                <a:cs typeface="Trebuchet MS" pitchFamily="34" charset="-120"/>
+              </a:rPr>
+              <a:t>al</a:t>
+            </a:r>
+            <a:endParaRPr lang="en-US" sz="1300" dirty="0"/>
+          </a:p>
+        </p:txBody>
+      </p:sp>
+      <p:sp>
+        <p:nvSpPr>
+          <p:cNvPr id="24" name="Text 22"/>
+          <p:cNvSpPr/>
+          <p:nvPr/>
+        </p:nvSpPr>
+        <p:spPr>
+          <a:xfrm>
+            <a:off x="6519672" y="2569464"/>
+            <a:ext cx="1828800" cy="201168"/>
+          </a:xfrm>
+          <a:prstGeom prst="rect">
+            <a:avLst/>
+          </a:prstGeom>
+          <a:noFill/>
+          <a:ln/>
+        </p:spPr>
+        <p:txBody>
+          <a:bodyPr wrap="square" lIns="0" tIns="0" rIns="0" bIns="0" rtlCol="0" anchor="t"/>
+          <a:lstStyle/>
+          <a:p>
+            <a:pPr algn="ctr" indent="0" marL="0">
+              <a:buNone/>
+            </a:pPr>
+            <a:r>
+              <a:rPr lang="en-US" sz="850" dirty="0">
+                <a:solidFill>
+                  <a:srgbClr val="475569"/>
+                </a:solidFill>
+                <a:latin typeface="Calibri" pitchFamily="34" charset="0"/>
+                <a:ea typeface="Calibri" pitchFamily="34" charset="-122"/>
+                <a:cs typeface="Calibri" pitchFamily="34" charset="-120"/>
+              </a:rPr>
+              <a:t>relating to</a:t>
+            </a:r>
+            <a:endParaRPr lang="en-US" sz="850" dirty="0"/>
+          </a:p>
+        </p:txBody>
+      </p:sp>
+      <p:sp>
+        <p:nvSpPr>
+          <p:cNvPr id="25" name="Shape 23"/>
           <p:cNvSpPr/>
           <p:nvPr/>
         </p:nvSpPr>
@@ -30884,7 +30732,7 @@
       </p:sp>
       <p:sp>
         <p:nvSpPr>
-          <p:cNvPr id="23" name="Text 21"/>
+          <p:cNvPr id="26" name="Text 24"/>
           <p:cNvSpPr/>
           <p:nvPr/>
         </p:nvSpPr>
@@ -30923,7 +30771,7 @@
       </p:sp>
       <p:sp>
         <p:nvSpPr>
-          <p:cNvPr id="24" name="Shape 22"/>
+          <p:cNvPr id="27" name="Shape 25"/>
           <p:cNvSpPr/>
           <p:nvPr/>
         </p:nvSpPr>
@@ -30950,7 +30798,7 @@
       </p:sp>
       <p:sp>
         <p:nvSpPr>
-          <p:cNvPr id="25" name="Text 23"/>
+          <p:cNvPr id="28" name="Text 26"/>
           <p:cNvSpPr/>
           <p:nvPr/>
         </p:nvSpPr>
@@ -30989,7 +30837,7 @@
       </p:sp>
       <p:sp>
         <p:nvSpPr>
-          <p:cNvPr id="26" name="Shape 24"/>
+          <p:cNvPr id="29" name="Shape 27"/>
           <p:cNvSpPr/>
           <p:nvPr/>
         </p:nvSpPr>
@@ -31016,7 +30864,7 @@
       </p:sp>
       <p:sp>
         <p:nvSpPr>
-          <p:cNvPr id="27" name="Text 25"/>
+          <p:cNvPr id="30" name="Text 28"/>
           <p:cNvSpPr/>
           <p:nvPr/>
         </p:nvSpPr>
@@ -31055,7 +30903,7 @@
       </p:sp>
       <p:sp>
         <p:nvSpPr>
-          <p:cNvPr id="28" name="Shape 26"/>
+          <p:cNvPr id="31" name="Shape 29"/>
           <p:cNvSpPr/>
           <p:nvPr/>
         </p:nvSpPr>
@@ -31082,7 +30930,7 @@
       </p:sp>
       <p:sp>
         <p:nvSpPr>
-          <p:cNvPr id="29" name="Text 27"/>
+          <p:cNvPr id="32" name="Text 30"/>
           <p:cNvSpPr/>
           <p:nvPr/>
         </p:nvSpPr>
@@ -31544,7 +31392,7 @@
                 <a:ea typeface="Trebuchet MS" pitchFamily="34" charset="-122"/>
                 <a:cs typeface="Trebuchet MS" pitchFamily="34" charset="-120"/>
               </a:rPr>
-              <a:t>periscope</a:t>
+              <a:t>peripheral</a:t>
             </a:r>
             <a:endParaRPr lang="en-US" sz="2800" dirty="0"/>
           </a:p>
@@ -31624,7 +31472,7 @@
         </p:nvSpPr>
         <p:spPr>
           <a:xfrm>
-            <a:off x="2938272" y="2258568"/>
+            <a:off x="2221992" y="2258568"/>
             <a:ext cx="1828800" cy="292608"/>
           </a:xfrm>
           <a:prstGeom prst="rect">
@@ -31658,7 +31506,7 @@
         </p:nvSpPr>
         <p:spPr>
           <a:xfrm>
-            <a:off x="2938272" y="2258568"/>
+            <a:off x="2221992" y="2258568"/>
             <a:ext cx="1828800" cy="292608"/>
           </a:xfrm>
           <a:prstGeom prst="rect">
@@ -31697,7 +31545,7 @@
         </p:nvSpPr>
         <p:spPr>
           <a:xfrm>
-            <a:off x="2938272" y="2569464"/>
+            <a:off x="2221992" y="2569464"/>
             <a:ext cx="1828800" cy="201168"/>
           </a:xfrm>
           <a:prstGeom prst="rect">
@@ -31722,7 +31570,7 @@
                 <a:ea typeface="Calibri" pitchFamily="34" charset="-122"/>
                 <a:cs typeface="Calibri" pitchFamily="34" charset="-120"/>
               </a:rPr>
-              <a:t>around</a:t>
+              <a:t>around, surrounding</a:t>
             </a:r>
             <a:endParaRPr lang="en-US" sz="850" dirty="0"/>
           </a:p>
@@ -31736,7 +31584,7 @@
         </p:nvSpPr>
         <p:spPr>
           <a:xfrm>
-            <a:off x="5803392" y="2258568"/>
+            <a:off x="4370832" y="2258568"/>
             <a:ext cx="1828800" cy="292608"/>
           </a:xfrm>
           <a:prstGeom prst="rect">
@@ -31770,7 +31618,7 @@
         </p:nvSpPr>
         <p:spPr>
           <a:xfrm>
-            <a:off x="5803392" y="2258568"/>
+            <a:off x="4370832" y="2258568"/>
             <a:ext cx="1828800" cy="292608"/>
           </a:xfrm>
           <a:prstGeom prst="rect">
@@ -31795,7 +31643,7 @@
                 <a:ea typeface="Trebuchet MS" pitchFamily="34" charset="-122"/>
                 <a:cs typeface="Trebuchet MS" pitchFamily="34" charset="-120"/>
               </a:rPr>
-              <a:t>scope</a:t>
+              <a:t>pher</a:t>
             </a:r>
             <a:endParaRPr lang="en-US" sz="1300" dirty="0"/>
           </a:p>
@@ -31809,7 +31657,7 @@
         </p:nvSpPr>
         <p:spPr>
           <a:xfrm>
-            <a:off x="5803392" y="2569464"/>
+            <a:off x="4370832" y="2569464"/>
             <a:ext cx="1828800" cy="201168"/>
           </a:xfrm>
           <a:prstGeom prst="rect">
@@ -31834,7 +31682,7 @@
                 <a:ea typeface="Calibri" pitchFamily="34" charset="-122"/>
                 <a:cs typeface="Calibri" pitchFamily="34" charset="-120"/>
               </a:rPr>
-              <a:t>look, see</a:t>
+              <a:t>carry, bear</a:t>
             </a:r>
             <a:endParaRPr lang="en-US" sz="850" dirty="0"/>
           </a:p>
@@ -31843,6 +31691,118 @@
       <p:sp>
         <p:nvSpPr>
           <p:cNvPr id="22" name="Shape 20"/>
+          <p:cNvSpPr/>
+          <p:nvPr/>
+        </p:nvSpPr>
+        <p:spPr>
+          <a:xfrm>
+            <a:off x="6519672" y="2258568"/>
+            <a:ext cx="1828800" cy="292608"/>
+          </a:xfrm>
+          <a:prstGeom prst="rect">
+            <a:avLst>
+              <a:gd name="adj" fmla="val 25000"/>
+            </a:avLst>
+          </a:prstGeom>
+          <a:solidFill>
+            <a:srgbClr val="FCE7F3"/>
+          </a:solidFill>
+          <a:ln w="19050">
+            <a:solidFill>
+              <a:srgbClr val="DB2777"/>
+            </a:solidFill>
+            <a:prstDash val="solid"/>
+          </a:ln>
+          <a:effectLst>
+            <a:outerShdw sx="100000" sy="100000" kx="0" ky="0" algn="bl" rotWithShape="0" blurRad="101600" dist="38100" dir="8100000">
+              <a:srgbClr val="000000">
+                <a:alpha val="12000"/>
+              </a:srgbClr>
+            </a:outerShdw>
+          </a:effectLst>
+        </p:spPr>
+      </p:sp>
+      <p:sp>
+        <p:nvSpPr>
+          <p:cNvPr id="23" name="Text 21"/>
+          <p:cNvSpPr/>
+          <p:nvPr/>
+        </p:nvSpPr>
+        <p:spPr>
+          <a:xfrm>
+            <a:off x="6519672" y="2258568"/>
+            <a:ext cx="1828800" cy="292608"/>
+          </a:xfrm>
+          <a:prstGeom prst="rect">
+            <a:avLst/>
+          </a:prstGeom>
+          <a:noFill/>
+          <a:ln/>
+        </p:spPr>
+        <p:txBody>
+          <a:bodyPr wrap="square" lIns="0" tIns="0" rIns="0" bIns="0" rtlCol="0" anchor="ctr"/>
+          <a:lstStyle/>
+          <a:p>
+            <a:pPr algn="ctr" indent="0" marL="0">
+              <a:buNone/>
+            </a:pPr>
+            <a:r>
+              <a:rPr lang="en-US" sz="1300" b="1" dirty="0">
+                <a:solidFill>
+                  <a:srgbClr val="9D174D"/>
+                </a:solidFill>
+                <a:latin typeface="Trebuchet MS" pitchFamily="34" charset="0"/>
+                <a:ea typeface="Trebuchet MS" pitchFamily="34" charset="-122"/>
+                <a:cs typeface="Trebuchet MS" pitchFamily="34" charset="-120"/>
+              </a:rPr>
+              <a:t>al</a:t>
+            </a:r>
+            <a:endParaRPr lang="en-US" sz="1300" dirty="0"/>
+          </a:p>
+        </p:txBody>
+      </p:sp>
+      <p:sp>
+        <p:nvSpPr>
+          <p:cNvPr id="24" name="Text 22"/>
+          <p:cNvSpPr/>
+          <p:nvPr/>
+        </p:nvSpPr>
+        <p:spPr>
+          <a:xfrm>
+            <a:off x="6519672" y="2569464"/>
+            <a:ext cx="1828800" cy="201168"/>
+          </a:xfrm>
+          <a:prstGeom prst="rect">
+            <a:avLst/>
+          </a:prstGeom>
+          <a:noFill/>
+          <a:ln/>
+        </p:spPr>
+        <p:txBody>
+          <a:bodyPr wrap="square" lIns="0" tIns="0" rIns="0" bIns="0" rtlCol="0" anchor="t"/>
+          <a:lstStyle/>
+          <a:p>
+            <a:pPr algn="ctr" indent="0" marL="0">
+              <a:buNone/>
+            </a:pPr>
+            <a:r>
+              <a:rPr lang="en-US" sz="850" dirty="0">
+                <a:solidFill>
+                  <a:srgbClr val="475569"/>
+                </a:solidFill>
+                <a:latin typeface="Calibri" pitchFamily="34" charset="0"/>
+                <a:ea typeface="Calibri" pitchFamily="34" charset="-122"/>
+                <a:cs typeface="Calibri" pitchFamily="34" charset="-120"/>
+              </a:rPr>
+              <a:t>relating to</a:t>
+            </a:r>
+            <a:endParaRPr lang="en-US" sz="850" dirty="0"/>
+          </a:p>
+        </p:txBody>
+      </p:sp>
+      <p:sp>
+        <p:nvSpPr>
+          <p:cNvPr id="25" name="Shape 23"/>
           <p:cNvSpPr/>
           <p:nvPr/>
         </p:nvSpPr>
@@ -31869,7 +31829,7 @@
       </p:sp>
       <p:sp>
         <p:nvSpPr>
-          <p:cNvPr id="23" name="Text 21"/>
+          <p:cNvPr id="26" name="Text 24"/>
           <p:cNvSpPr/>
           <p:nvPr/>
         </p:nvSpPr>
@@ -31908,7 +31868,7 @@
       </p:sp>
       <p:sp>
         <p:nvSpPr>
-          <p:cNvPr id="24" name="Shape 22"/>
+          <p:cNvPr id="27" name="Shape 25"/>
           <p:cNvSpPr/>
           <p:nvPr/>
         </p:nvSpPr>
@@ -31935,14 +31895,14 @@
       </p:sp>
       <p:sp>
         <p:nvSpPr>
-          <p:cNvPr id="25" name="Shape 23"/>
-          <p:cNvSpPr/>
-          <p:nvPr/>
-        </p:nvSpPr>
-        <p:spPr>
-          <a:xfrm>
-            <a:off x="2313432" y="3364992"/>
-            <a:ext cx="1645920" cy="475488"/>
+          <p:cNvPr id="28" name="Shape 26"/>
+          <p:cNvSpPr/>
+          <p:nvPr/>
+        </p:nvSpPr>
+        <p:spPr>
+          <a:xfrm>
+            <a:off x="1975104" y="3364992"/>
+            <a:ext cx="1554480" cy="475488"/>
           </a:xfrm>
           <a:prstGeom prst="rect">
             <a:avLst>
@@ -31962,14 +31922,14 @@
       </p:sp>
       <p:sp>
         <p:nvSpPr>
-          <p:cNvPr id="26" name="Text 24"/>
-          <p:cNvSpPr/>
-          <p:nvPr/>
-        </p:nvSpPr>
-        <p:spPr>
-          <a:xfrm>
-            <a:off x="2313432" y="3364992"/>
-            <a:ext cx="1645920" cy="475488"/>
+          <p:cNvPr id="29" name="Text 27"/>
+          <p:cNvSpPr/>
+          <p:nvPr/>
+        </p:nvSpPr>
+        <p:spPr>
+          <a:xfrm>
+            <a:off x="1975104" y="3364992"/>
+            <a:ext cx="1554480" cy="475488"/>
           </a:xfrm>
           <a:prstGeom prst="rect">
             <a:avLst/>
@@ -31993,7 +31953,7 @@
                 <a:ea typeface="Trebuchet MS" pitchFamily="34" charset="-122"/>
                 <a:cs typeface="Trebuchet MS" pitchFamily="34" charset="-120"/>
               </a:rPr>
-              <a:t>per</a:t>
+              <a:t>pe</a:t>
             </a:r>
             <a:endParaRPr lang="en-US" sz="1400" dirty="0"/>
           </a:p>
@@ -32001,14 +31961,14 @@
       </p:sp>
       <p:sp>
         <p:nvSpPr>
-          <p:cNvPr id="27" name="Text 25"/>
-          <p:cNvSpPr/>
-          <p:nvPr/>
-        </p:nvSpPr>
-        <p:spPr>
-          <a:xfrm>
-            <a:off x="3959352" y="3364992"/>
-            <a:ext cx="411480" cy="475488"/>
+          <p:cNvPr id="30" name="Text 28"/>
+          <p:cNvSpPr/>
+          <p:nvPr/>
+        </p:nvSpPr>
+        <p:spPr>
+          <a:xfrm>
+            <a:off x="3529584" y="3364992"/>
+            <a:ext cx="73152" cy="475488"/>
           </a:xfrm>
           <a:prstGeom prst="rect">
             <a:avLst/>
@@ -32040,14 +32000,14 @@
       </p:sp>
       <p:sp>
         <p:nvSpPr>
-          <p:cNvPr id="28" name="Shape 26"/>
-          <p:cNvSpPr/>
-          <p:nvPr/>
-        </p:nvSpPr>
-        <p:spPr>
-          <a:xfrm>
-            <a:off x="4370832" y="3364992"/>
-            <a:ext cx="1645920" cy="475488"/>
+          <p:cNvPr id="31" name="Shape 29"/>
+          <p:cNvSpPr/>
+          <p:nvPr/>
+        </p:nvSpPr>
+        <p:spPr>
+          <a:xfrm>
+            <a:off x="3602736" y="3364992"/>
+            <a:ext cx="1554480" cy="475488"/>
           </a:xfrm>
           <a:prstGeom prst="rect">
             <a:avLst>
@@ -32067,14 +32027,14 @@
       </p:sp>
       <p:sp>
         <p:nvSpPr>
-          <p:cNvPr id="29" name="Text 27"/>
-          <p:cNvSpPr/>
-          <p:nvPr/>
-        </p:nvSpPr>
-        <p:spPr>
-          <a:xfrm>
-            <a:off x="4370832" y="3364992"/>
-            <a:ext cx="1645920" cy="475488"/>
+          <p:cNvPr id="32" name="Text 30"/>
+          <p:cNvSpPr/>
+          <p:nvPr/>
+        </p:nvSpPr>
+        <p:spPr>
+          <a:xfrm>
+            <a:off x="3602736" y="3364992"/>
+            <a:ext cx="1554480" cy="475488"/>
           </a:xfrm>
           <a:prstGeom prst="rect">
             <a:avLst/>
@@ -32098,7 +32058,7 @@
                 <a:ea typeface="Trebuchet MS" pitchFamily="34" charset="-122"/>
                 <a:cs typeface="Trebuchet MS" pitchFamily="34" charset="-120"/>
               </a:rPr>
-              <a:t>i</a:t>
+              <a:t>riph</a:t>
             </a:r>
             <a:endParaRPr lang="en-US" sz="1400" dirty="0"/>
           </a:p>
@@ -32106,14 +32066,14 @@
       </p:sp>
       <p:sp>
         <p:nvSpPr>
-          <p:cNvPr id="30" name="Text 28"/>
-          <p:cNvSpPr/>
-          <p:nvPr/>
-        </p:nvSpPr>
-        <p:spPr>
-          <a:xfrm>
-            <a:off x="6016752" y="3364992"/>
-            <a:ext cx="411480" cy="475488"/>
+          <p:cNvPr id="33" name="Text 31"/>
+          <p:cNvSpPr/>
+          <p:nvPr/>
+        </p:nvSpPr>
+        <p:spPr>
+          <a:xfrm>
+            <a:off x="5157216" y="3364992"/>
+            <a:ext cx="73152" cy="475488"/>
           </a:xfrm>
           <a:prstGeom prst="rect">
             <a:avLst/>
@@ -32145,14 +32105,14 @@
       </p:sp>
       <p:sp>
         <p:nvSpPr>
-          <p:cNvPr id="31" name="Shape 29"/>
-          <p:cNvSpPr/>
-          <p:nvPr/>
-        </p:nvSpPr>
-        <p:spPr>
-          <a:xfrm>
-            <a:off x="6428232" y="3364992"/>
-            <a:ext cx="1645920" cy="475488"/>
+          <p:cNvPr id="34" name="Shape 32"/>
+          <p:cNvSpPr/>
+          <p:nvPr/>
+        </p:nvSpPr>
+        <p:spPr>
+          <a:xfrm>
+            <a:off x="5230368" y="3364992"/>
+            <a:ext cx="1554480" cy="475488"/>
           </a:xfrm>
           <a:prstGeom prst="rect">
             <a:avLst>
@@ -32172,14 +32132,14 @@
       </p:sp>
       <p:sp>
         <p:nvSpPr>
-          <p:cNvPr id="32" name="Text 30"/>
-          <p:cNvSpPr/>
-          <p:nvPr/>
-        </p:nvSpPr>
-        <p:spPr>
-          <a:xfrm>
-            <a:off x="6428232" y="3364992"/>
-            <a:ext cx="1645920" cy="475488"/>
+          <p:cNvPr id="35" name="Text 33"/>
+          <p:cNvSpPr/>
+          <p:nvPr/>
+        </p:nvSpPr>
+        <p:spPr>
+          <a:xfrm>
+            <a:off x="5230368" y="3364992"/>
+            <a:ext cx="1554480" cy="475488"/>
           </a:xfrm>
           <a:prstGeom prst="rect">
             <a:avLst/>
@@ -32203,7 +32163,7 @@
                 <a:ea typeface="Trebuchet MS" pitchFamily="34" charset="-122"/>
                 <a:cs typeface="Trebuchet MS" pitchFamily="34" charset="-120"/>
               </a:rPr>
-              <a:t>scope</a:t>
+              <a:t>er</a:t>
             </a:r>
             <a:endParaRPr lang="en-US" sz="1400" dirty="0"/>
           </a:p>
@@ -32211,7 +32171,112 @@
       </p:sp>
       <p:sp>
         <p:nvSpPr>
-          <p:cNvPr id="33" name="Shape 31"/>
+          <p:cNvPr id="36" name="Text 34"/>
+          <p:cNvSpPr/>
+          <p:nvPr/>
+        </p:nvSpPr>
+        <p:spPr>
+          <a:xfrm>
+            <a:off x="6784848" y="3364992"/>
+            <a:ext cx="73152" cy="475488"/>
+          </a:xfrm>
+          <a:prstGeom prst="rect">
+            <a:avLst/>
+          </a:prstGeom>
+          <a:noFill/>
+          <a:ln/>
+        </p:spPr>
+        <p:txBody>
+          <a:bodyPr wrap="square" lIns="0" tIns="0" rIns="0" bIns="0" rtlCol="0" anchor="ctr"/>
+          <a:lstStyle/>
+          <a:p>
+            <a:pPr algn="ctr" indent="0" marL="0">
+              <a:buNone/>
+            </a:pPr>
+            <a:r>
+              <a:rPr lang="en-US" sz="1600" b="1" dirty="0">
+                <a:solidFill>
+                  <a:srgbClr val="0D9488"/>
+                </a:solidFill>
+                <a:latin typeface="Trebuchet MS" pitchFamily="34" charset="0"/>
+                <a:ea typeface="Trebuchet MS" pitchFamily="34" charset="-122"/>
+                <a:cs typeface="Trebuchet MS" pitchFamily="34" charset="-120"/>
+              </a:rPr>
+              <a:t>·</a:t>
+            </a:r>
+            <a:endParaRPr lang="en-US" sz="1600" dirty="0"/>
+          </a:p>
+        </p:txBody>
+      </p:sp>
+      <p:sp>
+        <p:nvSpPr>
+          <p:cNvPr id="37" name="Shape 35"/>
+          <p:cNvSpPr/>
+          <p:nvPr/>
+        </p:nvSpPr>
+        <p:spPr>
+          <a:xfrm>
+            <a:off x="6858000" y="3364992"/>
+            <a:ext cx="1554480" cy="475488"/>
+          </a:xfrm>
+          <a:prstGeom prst="rect">
+            <a:avLst>
+              <a:gd name="adj" fmla="val 9615"/>
+            </a:avLst>
+          </a:prstGeom>
+          <a:solidFill>
+            <a:srgbClr val="FFFFFF"/>
+          </a:solidFill>
+          <a:ln w="12700">
+            <a:solidFill>
+              <a:srgbClr val="0D9488"/>
+            </a:solidFill>
+            <a:prstDash val="solid"/>
+          </a:ln>
+        </p:spPr>
+      </p:sp>
+      <p:sp>
+        <p:nvSpPr>
+          <p:cNvPr id="38" name="Text 36"/>
+          <p:cNvSpPr/>
+          <p:nvPr/>
+        </p:nvSpPr>
+        <p:spPr>
+          <a:xfrm>
+            <a:off x="6858000" y="3364992"/>
+            <a:ext cx="1554480" cy="475488"/>
+          </a:xfrm>
+          <a:prstGeom prst="rect">
+            <a:avLst/>
+          </a:prstGeom>
+          <a:noFill/>
+          <a:ln/>
+        </p:spPr>
+        <p:txBody>
+          <a:bodyPr wrap="square" lIns="0" tIns="0" rIns="0" bIns="0" rtlCol="0" anchor="ctr"/>
+          <a:lstStyle/>
+          <a:p>
+            <a:pPr algn="ctr" indent="0" marL="0">
+              <a:buNone/>
+            </a:pPr>
+            <a:r>
+              <a:rPr lang="en-US" sz="1400" b="1" dirty="0">
+                <a:solidFill>
+                  <a:srgbClr val="0D9488"/>
+                </a:solidFill>
+                <a:latin typeface="Trebuchet MS" pitchFamily="34" charset="0"/>
+                <a:ea typeface="Trebuchet MS" pitchFamily="34" charset="-122"/>
+                <a:cs typeface="Trebuchet MS" pitchFamily="34" charset="-120"/>
+              </a:rPr>
+              <a:t>al</a:t>
+            </a:r>
+            <a:endParaRPr lang="en-US" sz="1400" dirty="0"/>
+          </a:p>
+        </p:txBody>
+      </p:sp>
+      <p:sp>
+        <p:nvSpPr>
+          <p:cNvPr id="39" name="Shape 37"/>
           <p:cNvSpPr/>
           <p:nvPr/>
         </p:nvSpPr>
@@ -32238,7 +32303,7 @@
       </p:sp>
       <p:sp>
         <p:nvSpPr>
-          <p:cNvPr id="34" name="Text 32"/>
+          <p:cNvPr id="40" name="Text 38"/>
           <p:cNvSpPr/>
           <p:nvPr/>
         </p:nvSpPr>
@@ -32277,7 +32342,7 @@
       </p:sp>
       <p:sp>
         <p:nvSpPr>
-          <p:cNvPr id="35" name="Shape 33"/>
+          <p:cNvPr id="41" name="Shape 39"/>
           <p:cNvSpPr/>
           <p:nvPr/>
         </p:nvSpPr>
@@ -32304,7 +32369,7 @@
       </p:sp>
       <p:sp>
         <p:nvSpPr>
-          <p:cNvPr id="36" name="Text 34"/>
+          <p:cNvPr id="42" name="Text 40"/>
           <p:cNvSpPr/>
           <p:nvPr/>
         </p:nvSpPr>
@@ -32766,7 +32831,7 @@
                 <a:ea typeface="Trebuchet MS" pitchFamily="34" charset="-122"/>
                 <a:cs typeface="Trebuchet MS" pitchFamily="34" charset="-120"/>
               </a:rPr>
-              <a:t>periscope</a:t>
+              <a:t>peripheral</a:t>
             </a:r>
             <a:endParaRPr lang="en-US" sz="2800" dirty="0"/>
           </a:p>
@@ -32846,7 +32911,7 @@
         </p:nvSpPr>
         <p:spPr>
           <a:xfrm>
-            <a:off x="2938272" y="2258568"/>
+            <a:off x="2221992" y="2258568"/>
             <a:ext cx="1828800" cy="292608"/>
           </a:xfrm>
           <a:prstGeom prst="rect">
@@ -32880,7 +32945,7 @@
         </p:nvSpPr>
         <p:spPr>
           <a:xfrm>
-            <a:off x="2938272" y="2258568"/>
+            <a:off x="2221992" y="2258568"/>
             <a:ext cx="1828800" cy="292608"/>
           </a:xfrm>
           <a:prstGeom prst="rect">
@@ -32919,7 +32984,7 @@
         </p:nvSpPr>
         <p:spPr>
           <a:xfrm>
-            <a:off x="2938272" y="2569464"/>
+            <a:off x="2221992" y="2569464"/>
             <a:ext cx="1828800" cy="201168"/>
           </a:xfrm>
           <a:prstGeom prst="rect">
@@ -32944,7 +33009,7 @@
                 <a:ea typeface="Calibri" pitchFamily="34" charset="-122"/>
                 <a:cs typeface="Calibri" pitchFamily="34" charset="-120"/>
               </a:rPr>
-              <a:t>around</a:t>
+              <a:t>around, surrounding</a:t>
             </a:r>
             <a:endParaRPr lang="en-US" sz="850" dirty="0"/>
           </a:p>
@@ -32958,7 +33023,7 @@
         </p:nvSpPr>
         <p:spPr>
           <a:xfrm>
-            <a:off x="5803392" y="2258568"/>
+            <a:off x="4370832" y="2258568"/>
             <a:ext cx="1828800" cy="292608"/>
           </a:xfrm>
           <a:prstGeom prst="rect">
@@ -32992,7 +33057,7 @@
         </p:nvSpPr>
         <p:spPr>
           <a:xfrm>
-            <a:off x="5803392" y="2258568"/>
+            <a:off x="4370832" y="2258568"/>
             <a:ext cx="1828800" cy="292608"/>
           </a:xfrm>
           <a:prstGeom prst="rect">
@@ -33017,7 +33082,7 @@
                 <a:ea typeface="Trebuchet MS" pitchFamily="34" charset="-122"/>
                 <a:cs typeface="Trebuchet MS" pitchFamily="34" charset="-120"/>
               </a:rPr>
-              <a:t>scope</a:t>
+              <a:t>pher</a:t>
             </a:r>
             <a:endParaRPr lang="en-US" sz="1300" dirty="0"/>
           </a:p>
@@ -33031,7 +33096,7 @@
         </p:nvSpPr>
         <p:spPr>
           <a:xfrm>
-            <a:off x="5803392" y="2569464"/>
+            <a:off x="4370832" y="2569464"/>
             <a:ext cx="1828800" cy="201168"/>
           </a:xfrm>
           <a:prstGeom prst="rect">
@@ -33056,7 +33121,7 @@
                 <a:ea typeface="Calibri" pitchFamily="34" charset="-122"/>
                 <a:cs typeface="Calibri" pitchFamily="34" charset="-120"/>
               </a:rPr>
-              <a:t>look, see</a:t>
+              <a:t>carry, bear</a:t>
             </a:r>
             <a:endParaRPr lang="en-US" sz="850" dirty="0"/>
           </a:p>
@@ -33065,6 +33130,118 @@
       <p:sp>
         <p:nvSpPr>
           <p:cNvPr id="22" name="Shape 20"/>
+          <p:cNvSpPr/>
+          <p:nvPr/>
+        </p:nvSpPr>
+        <p:spPr>
+          <a:xfrm>
+            <a:off x="6519672" y="2258568"/>
+            <a:ext cx="1828800" cy="292608"/>
+          </a:xfrm>
+          <a:prstGeom prst="rect">
+            <a:avLst>
+              <a:gd name="adj" fmla="val 25000"/>
+            </a:avLst>
+          </a:prstGeom>
+          <a:solidFill>
+            <a:srgbClr val="FCE7F3"/>
+          </a:solidFill>
+          <a:ln w="19050">
+            <a:solidFill>
+              <a:srgbClr val="DB2777"/>
+            </a:solidFill>
+            <a:prstDash val="solid"/>
+          </a:ln>
+          <a:effectLst>
+            <a:outerShdw sx="100000" sy="100000" kx="0" ky="0" algn="bl" rotWithShape="0" blurRad="101600" dist="38100" dir="8100000">
+              <a:srgbClr val="000000">
+                <a:alpha val="12000"/>
+              </a:srgbClr>
+            </a:outerShdw>
+          </a:effectLst>
+        </p:spPr>
+      </p:sp>
+      <p:sp>
+        <p:nvSpPr>
+          <p:cNvPr id="23" name="Text 21"/>
+          <p:cNvSpPr/>
+          <p:nvPr/>
+        </p:nvSpPr>
+        <p:spPr>
+          <a:xfrm>
+            <a:off x="6519672" y="2258568"/>
+            <a:ext cx="1828800" cy="292608"/>
+          </a:xfrm>
+          <a:prstGeom prst="rect">
+            <a:avLst/>
+          </a:prstGeom>
+          <a:noFill/>
+          <a:ln/>
+        </p:spPr>
+        <p:txBody>
+          <a:bodyPr wrap="square" lIns="0" tIns="0" rIns="0" bIns="0" rtlCol="0" anchor="ctr"/>
+          <a:lstStyle/>
+          <a:p>
+            <a:pPr algn="ctr" indent="0" marL="0">
+              <a:buNone/>
+            </a:pPr>
+            <a:r>
+              <a:rPr lang="en-US" sz="1300" b="1" dirty="0">
+                <a:solidFill>
+                  <a:srgbClr val="9D174D"/>
+                </a:solidFill>
+                <a:latin typeface="Trebuchet MS" pitchFamily="34" charset="0"/>
+                <a:ea typeface="Trebuchet MS" pitchFamily="34" charset="-122"/>
+                <a:cs typeface="Trebuchet MS" pitchFamily="34" charset="-120"/>
+              </a:rPr>
+              <a:t>al</a:t>
+            </a:r>
+            <a:endParaRPr lang="en-US" sz="1300" dirty="0"/>
+          </a:p>
+        </p:txBody>
+      </p:sp>
+      <p:sp>
+        <p:nvSpPr>
+          <p:cNvPr id="24" name="Text 22"/>
+          <p:cNvSpPr/>
+          <p:nvPr/>
+        </p:nvSpPr>
+        <p:spPr>
+          <a:xfrm>
+            <a:off x="6519672" y="2569464"/>
+            <a:ext cx="1828800" cy="201168"/>
+          </a:xfrm>
+          <a:prstGeom prst="rect">
+            <a:avLst/>
+          </a:prstGeom>
+          <a:noFill/>
+          <a:ln/>
+        </p:spPr>
+        <p:txBody>
+          <a:bodyPr wrap="square" lIns="0" tIns="0" rIns="0" bIns="0" rtlCol="0" anchor="t"/>
+          <a:lstStyle/>
+          <a:p>
+            <a:pPr algn="ctr" indent="0" marL="0">
+              <a:buNone/>
+            </a:pPr>
+            <a:r>
+              <a:rPr lang="en-US" sz="850" dirty="0">
+                <a:solidFill>
+                  <a:srgbClr val="475569"/>
+                </a:solidFill>
+                <a:latin typeface="Calibri" pitchFamily="34" charset="0"/>
+                <a:ea typeface="Calibri" pitchFamily="34" charset="-122"/>
+                <a:cs typeface="Calibri" pitchFamily="34" charset="-120"/>
+              </a:rPr>
+              <a:t>relating to</a:t>
+            </a:r>
+            <a:endParaRPr lang="en-US" sz="850" dirty="0"/>
+          </a:p>
+        </p:txBody>
+      </p:sp>
+      <p:sp>
+        <p:nvSpPr>
+          <p:cNvPr id="25" name="Shape 23"/>
           <p:cNvSpPr/>
           <p:nvPr/>
         </p:nvSpPr>
@@ -33091,7 +33268,7 @@
       </p:sp>
       <p:sp>
         <p:nvSpPr>
-          <p:cNvPr id="23" name="Text 21"/>
+          <p:cNvPr id="26" name="Text 24"/>
           <p:cNvSpPr/>
           <p:nvPr/>
         </p:nvSpPr>
@@ -33130,7 +33307,7 @@
       </p:sp>
       <p:sp>
         <p:nvSpPr>
-          <p:cNvPr id="24" name="Shape 22"/>
+          <p:cNvPr id="27" name="Shape 25"/>
           <p:cNvSpPr/>
           <p:nvPr/>
         </p:nvSpPr>
@@ -33157,14 +33334,14 @@
       </p:sp>
       <p:sp>
         <p:nvSpPr>
-          <p:cNvPr id="25" name="Shape 23"/>
-          <p:cNvSpPr/>
-          <p:nvPr/>
-        </p:nvSpPr>
-        <p:spPr>
-          <a:xfrm>
-            <a:off x="2313432" y="3364992"/>
-            <a:ext cx="1645920" cy="475488"/>
+          <p:cNvPr id="28" name="Shape 26"/>
+          <p:cNvSpPr/>
+          <p:nvPr/>
+        </p:nvSpPr>
+        <p:spPr>
+          <a:xfrm>
+            <a:off x="1975104" y="3364992"/>
+            <a:ext cx="1554480" cy="475488"/>
           </a:xfrm>
           <a:prstGeom prst="rect">
             <a:avLst>
@@ -33184,14 +33361,14 @@
       </p:sp>
       <p:sp>
         <p:nvSpPr>
-          <p:cNvPr id="26" name="Text 24"/>
-          <p:cNvSpPr/>
-          <p:nvPr/>
-        </p:nvSpPr>
-        <p:spPr>
-          <a:xfrm>
-            <a:off x="2313432" y="3364992"/>
-            <a:ext cx="1645920" cy="475488"/>
+          <p:cNvPr id="29" name="Text 27"/>
+          <p:cNvSpPr/>
+          <p:nvPr/>
+        </p:nvSpPr>
+        <p:spPr>
+          <a:xfrm>
+            <a:off x="1975104" y="3364992"/>
+            <a:ext cx="1554480" cy="475488"/>
           </a:xfrm>
           <a:prstGeom prst="rect">
             <a:avLst/>
@@ -33215,7 +33392,7 @@
                 <a:ea typeface="Trebuchet MS" pitchFamily="34" charset="-122"/>
                 <a:cs typeface="Trebuchet MS" pitchFamily="34" charset="-120"/>
               </a:rPr>
-              <a:t>per</a:t>
+              <a:t>pe</a:t>
             </a:r>
             <a:endParaRPr lang="en-US" sz="1400" dirty="0"/>
           </a:p>
@@ -33223,14 +33400,14 @@
       </p:sp>
       <p:sp>
         <p:nvSpPr>
-          <p:cNvPr id="27" name="Text 25"/>
-          <p:cNvSpPr/>
-          <p:nvPr/>
-        </p:nvSpPr>
-        <p:spPr>
-          <a:xfrm>
-            <a:off x="3959352" y="3364992"/>
-            <a:ext cx="411480" cy="475488"/>
+          <p:cNvPr id="30" name="Text 28"/>
+          <p:cNvSpPr/>
+          <p:nvPr/>
+        </p:nvSpPr>
+        <p:spPr>
+          <a:xfrm>
+            <a:off x="3529584" y="3364992"/>
+            <a:ext cx="73152" cy="475488"/>
           </a:xfrm>
           <a:prstGeom prst="rect">
             <a:avLst/>
@@ -33262,14 +33439,14 @@
       </p:sp>
       <p:sp>
         <p:nvSpPr>
-          <p:cNvPr id="28" name="Shape 26"/>
-          <p:cNvSpPr/>
-          <p:nvPr/>
-        </p:nvSpPr>
-        <p:spPr>
-          <a:xfrm>
-            <a:off x="4370832" y="3364992"/>
-            <a:ext cx="1645920" cy="475488"/>
+          <p:cNvPr id="31" name="Shape 29"/>
+          <p:cNvSpPr/>
+          <p:nvPr/>
+        </p:nvSpPr>
+        <p:spPr>
+          <a:xfrm>
+            <a:off x="3602736" y="3364992"/>
+            <a:ext cx="1554480" cy="475488"/>
           </a:xfrm>
           <a:prstGeom prst="rect">
             <a:avLst>
@@ -33289,14 +33466,14 @@
       </p:sp>
       <p:sp>
         <p:nvSpPr>
-          <p:cNvPr id="29" name="Text 27"/>
-          <p:cNvSpPr/>
-          <p:nvPr/>
-        </p:nvSpPr>
-        <p:spPr>
-          <a:xfrm>
-            <a:off x="4370832" y="3364992"/>
-            <a:ext cx="1645920" cy="475488"/>
+          <p:cNvPr id="32" name="Text 30"/>
+          <p:cNvSpPr/>
+          <p:nvPr/>
+        </p:nvSpPr>
+        <p:spPr>
+          <a:xfrm>
+            <a:off x="3602736" y="3364992"/>
+            <a:ext cx="1554480" cy="475488"/>
           </a:xfrm>
           <a:prstGeom prst="rect">
             <a:avLst/>
@@ -33320,7 +33497,7 @@
                 <a:ea typeface="Trebuchet MS" pitchFamily="34" charset="-122"/>
                 <a:cs typeface="Trebuchet MS" pitchFamily="34" charset="-120"/>
               </a:rPr>
-              <a:t>i</a:t>
+              <a:t>riph</a:t>
             </a:r>
             <a:endParaRPr lang="en-US" sz="1400" dirty="0"/>
           </a:p>
@@ -33328,14 +33505,14 @@
       </p:sp>
       <p:sp>
         <p:nvSpPr>
-          <p:cNvPr id="30" name="Text 28"/>
-          <p:cNvSpPr/>
-          <p:nvPr/>
-        </p:nvSpPr>
-        <p:spPr>
-          <a:xfrm>
-            <a:off x="6016752" y="3364992"/>
-            <a:ext cx="411480" cy="475488"/>
+          <p:cNvPr id="33" name="Text 31"/>
+          <p:cNvSpPr/>
+          <p:nvPr/>
+        </p:nvSpPr>
+        <p:spPr>
+          <a:xfrm>
+            <a:off x="5157216" y="3364992"/>
+            <a:ext cx="73152" cy="475488"/>
           </a:xfrm>
           <a:prstGeom prst="rect">
             <a:avLst/>
@@ -33367,14 +33544,14 @@
       </p:sp>
       <p:sp>
         <p:nvSpPr>
-          <p:cNvPr id="31" name="Shape 29"/>
-          <p:cNvSpPr/>
-          <p:nvPr/>
-        </p:nvSpPr>
-        <p:spPr>
-          <a:xfrm>
-            <a:off x="6428232" y="3364992"/>
-            <a:ext cx="1645920" cy="475488"/>
+          <p:cNvPr id="34" name="Shape 32"/>
+          <p:cNvSpPr/>
+          <p:nvPr/>
+        </p:nvSpPr>
+        <p:spPr>
+          <a:xfrm>
+            <a:off x="5230368" y="3364992"/>
+            <a:ext cx="1554480" cy="475488"/>
           </a:xfrm>
           <a:prstGeom prst="rect">
             <a:avLst>
@@ -33394,14 +33571,14 @@
       </p:sp>
       <p:sp>
         <p:nvSpPr>
-          <p:cNvPr id="32" name="Text 30"/>
-          <p:cNvSpPr/>
-          <p:nvPr/>
-        </p:nvSpPr>
-        <p:spPr>
-          <a:xfrm>
-            <a:off x="6428232" y="3364992"/>
-            <a:ext cx="1645920" cy="475488"/>
+          <p:cNvPr id="35" name="Text 33"/>
+          <p:cNvSpPr/>
+          <p:nvPr/>
+        </p:nvSpPr>
+        <p:spPr>
+          <a:xfrm>
+            <a:off x="5230368" y="3364992"/>
+            <a:ext cx="1554480" cy="475488"/>
           </a:xfrm>
           <a:prstGeom prst="rect">
             <a:avLst/>
@@ -33425,7 +33602,7 @@
                 <a:ea typeface="Trebuchet MS" pitchFamily="34" charset="-122"/>
                 <a:cs typeface="Trebuchet MS" pitchFamily="34" charset="-120"/>
               </a:rPr>
-              <a:t>scope</a:t>
+              <a:t>er</a:t>
             </a:r>
             <a:endParaRPr lang="en-US" sz="1400" dirty="0"/>
           </a:p>
@@ -33433,7 +33610,112 @@
       </p:sp>
       <p:sp>
         <p:nvSpPr>
-          <p:cNvPr id="33" name="Shape 31"/>
+          <p:cNvPr id="36" name="Text 34"/>
+          <p:cNvSpPr/>
+          <p:nvPr/>
+        </p:nvSpPr>
+        <p:spPr>
+          <a:xfrm>
+            <a:off x="6784848" y="3364992"/>
+            <a:ext cx="73152" cy="475488"/>
+          </a:xfrm>
+          <a:prstGeom prst="rect">
+            <a:avLst/>
+          </a:prstGeom>
+          <a:noFill/>
+          <a:ln/>
+        </p:spPr>
+        <p:txBody>
+          <a:bodyPr wrap="square" lIns="0" tIns="0" rIns="0" bIns="0" rtlCol="0" anchor="ctr"/>
+          <a:lstStyle/>
+          <a:p>
+            <a:pPr algn="ctr" indent="0" marL="0">
+              <a:buNone/>
+            </a:pPr>
+            <a:r>
+              <a:rPr lang="en-US" sz="1600" b="1" dirty="0">
+                <a:solidFill>
+                  <a:srgbClr val="0D9488"/>
+                </a:solidFill>
+                <a:latin typeface="Trebuchet MS" pitchFamily="34" charset="0"/>
+                <a:ea typeface="Trebuchet MS" pitchFamily="34" charset="-122"/>
+                <a:cs typeface="Trebuchet MS" pitchFamily="34" charset="-120"/>
+              </a:rPr>
+              <a:t>·</a:t>
+            </a:r>
+            <a:endParaRPr lang="en-US" sz="1600" dirty="0"/>
+          </a:p>
+        </p:txBody>
+      </p:sp>
+      <p:sp>
+        <p:nvSpPr>
+          <p:cNvPr id="37" name="Shape 35"/>
+          <p:cNvSpPr/>
+          <p:nvPr/>
+        </p:nvSpPr>
+        <p:spPr>
+          <a:xfrm>
+            <a:off x="6858000" y="3364992"/>
+            <a:ext cx="1554480" cy="475488"/>
+          </a:xfrm>
+          <a:prstGeom prst="rect">
+            <a:avLst>
+              <a:gd name="adj" fmla="val 9615"/>
+            </a:avLst>
+          </a:prstGeom>
+          <a:solidFill>
+            <a:srgbClr val="FFFFFF"/>
+          </a:solidFill>
+          <a:ln w="12700">
+            <a:solidFill>
+              <a:srgbClr val="0D9488"/>
+            </a:solidFill>
+            <a:prstDash val="solid"/>
+          </a:ln>
+        </p:spPr>
+      </p:sp>
+      <p:sp>
+        <p:nvSpPr>
+          <p:cNvPr id="38" name="Text 36"/>
+          <p:cNvSpPr/>
+          <p:nvPr/>
+        </p:nvSpPr>
+        <p:spPr>
+          <a:xfrm>
+            <a:off x="6858000" y="3364992"/>
+            <a:ext cx="1554480" cy="475488"/>
+          </a:xfrm>
+          <a:prstGeom prst="rect">
+            <a:avLst/>
+          </a:prstGeom>
+          <a:noFill/>
+          <a:ln/>
+        </p:spPr>
+        <p:txBody>
+          <a:bodyPr wrap="square" lIns="0" tIns="0" rIns="0" bIns="0" rtlCol="0" anchor="ctr"/>
+          <a:lstStyle/>
+          <a:p>
+            <a:pPr algn="ctr" indent="0" marL="0">
+              <a:buNone/>
+            </a:pPr>
+            <a:r>
+              <a:rPr lang="en-US" sz="1400" b="1" dirty="0">
+                <a:solidFill>
+                  <a:srgbClr val="0D9488"/>
+                </a:solidFill>
+                <a:latin typeface="Trebuchet MS" pitchFamily="34" charset="0"/>
+                <a:ea typeface="Trebuchet MS" pitchFamily="34" charset="-122"/>
+                <a:cs typeface="Trebuchet MS" pitchFamily="34" charset="-120"/>
+              </a:rPr>
+              <a:t>al</a:t>
+            </a:r>
+            <a:endParaRPr lang="en-US" sz="1400" dirty="0"/>
+          </a:p>
+        </p:txBody>
+      </p:sp>
+      <p:sp>
+        <p:nvSpPr>
+          <p:cNvPr id="39" name="Shape 37"/>
           <p:cNvSpPr/>
           <p:nvPr/>
         </p:nvSpPr>
@@ -33460,7 +33742,7 @@
       </p:sp>
       <p:sp>
         <p:nvSpPr>
-          <p:cNvPr id="34" name="Text 32"/>
+          <p:cNvPr id="40" name="Text 38"/>
           <p:cNvSpPr/>
           <p:nvPr/>
         </p:nvSpPr>
@@ -33499,7 +33781,7 @@
       </p:sp>
       <p:sp>
         <p:nvSpPr>
-          <p:cNvPr id="35" name="Shape 33"/>
+          <p:cNvPr id="41" name="Shape 39"/>
           <p:cNvSpPr/>
           <p:nvPr/>
         </p:nvSpPr>
@@ -33526,7 +33808,7 @@
       </p:sp>
       <p:sp>
         <p:nvSpPr>
-          <p:cNvPr id="36" name="Shape 34"/>
+          <p:cNvPr id="42" name="Shape 40"/>
           <p:cNvSpPr/>
           <p:nvPr/>
         </p:nvSpPr>
@@ -33553,7 +33835,7 @@
       </p:sp>
       <p:sp>
         <p:nvSpPr>
-          <p:cNvPr id="37" name="Text 35"/>
+          <p:cNvPr id="43" name="Text 41"/>
           <p:cNvSpPr/>
           <p:nvPr/>
         </p:nvSpPr>
@@ -33592,7 +33874,7 @@
       </p:sp>
       <p:sp>
         <p:nvSpPr>
-          <p:cNvPr id="38" name="Shape 36"/>
+          <p:cNvPr id="44" name="Shape 42"/>
           <p:cNvSpPr/>
           <p:nvPr/>
         </p:nvSpPr>
@@ -33619,7 +33901,7 @@
       </p:sp>
       <p:sp>
         <p:nvSpPr>
-          <p:cNvPr id="39" name="Text 37"/>
+          <p:cNvPr id="45" name="Text 43"/>
           <p:cNvSpPr/>
           <p:nvPr/>
         </p:nvSpPr>
@@ -33650,7 +33932,7 @@
                 <a:ea typeface="Trebuchet MS" pitchFamily="34" charset="-122"/>
                 <a:cs typeface="Trebuchet MS" pitchFamily="34" charset="-120"/>
               </a:rPr>
-              <a:t>er</a:t>
+              <a:t>e</a:t>
             </a:r>
             <a:endParaRPr lang="en-US" sz="900" dirty="0"/>
           </a:p>
@@ -33658,7 +33940,7 @@
       </p:sp>
       <p:sp>
         <p:nvSpPr>
-          <p:cNvPr id="40" name="Shape 38"/>
+          <p:cNvPr id="46" name="Shape 44"/>
           <p:cNvSpPr/>
           <p:nvPr/>
         </p:nvSpPr>
@@ -33685,7 +33967,7 @@
       </p:sp>
       <p:sp>
         <p:nvSpPr>
-          <p:cNvPr id="41" name="Text 39"/>
+          <p:cNvPr id="47" name="Text 45"/>
           <p:cNvSpPr/>
           <p:nvPr/>
         </p:nvSpPr>
@@ -33716,7 +33998,7 @@
                 <a:ea typeface="Trebuchet MS" pitchFamily="34" charset="-122"/>
                 <a:cs typeface="Trebuchet MS" pitchFamily="34" charset="-120"/>
               </a:rPr>
-              <a:t>i</a:t>
+              <a:t>r</a:t>
             </a:r>
             <a:endParaRPr lang="en-US" sz="900" dirty="0"/>
           </a:p>
@@ -33724,7 +34006,7 @@
       </p:sp>
       <p:sp>
         <p:nvSpPr>
-          <p:cNvPr id="42" name="Shape 40"/>
+          <p:cNvPr id="48" name="Shape 46"/>
           <p:cNvSpPr/>
           <p:nvPr/>
         </p:nvSpPr>
@@ -33751,7 +34033,7 @@
       </p:sp>
       <p:sp>
         <p:nvSpPr>
-          <p:cNvPr id="43" name="Text 41"/>
+          <p:cNvPr id="49" name="Text 47"/>
           <p:cNvSpPr/>
           <p:nvPr/>
         </p:nvSpPr>
@@ -33782,7 +34064,7 @@
                 <a:ea typeface="Trebuchet MS" pitchFamily="34" charset="-122"/>
                 <a:cs typeface="Trebuchet MS" pitchFamily="34" charset="-120"/>
               </a:rPr>
-              <a:t>s</a:t>
+              <a:t>i</a:t>
             </a:r>
             <a:endParaRPr lang="en-US" sz="900" dirty="0"/>
           </a:p>
@@ -33790,7 +34072,7 @@
       </p:sp>
       <p:sp>
         <p:nvSpPr>
-          <p:cNvPr id="44" name="Shape 42"/>
+          <p:cNvPr id="50" name="Shape 48"/>
           <p:cNvSpPr/>
           <p:nvPr/>
         </p:nvSpPr>
@@ -33817,7 +34099,7 @@
       </p:sp>
       <p:sp>
         <p:nvSpPr>
-          <p:cNvPr id="45" name="Text 43"/>
+          <p:cNvPr id="51" name="Text 49"/>
           <p:cNvSpPr/>
           <p:nvPr/>
         </p:nvSpPr>
@@ -33848,7 +34130,7 @@
                 <a:ea typeface="Trebuchet MS" pitchFamily="34" charset="-122"/>
                 <a:cs typeface="Trebuchet MS" pitchFamily="34" charset="-120"/>
               </a:rPr>
-              <a:t>c</a:t>
+              <a:t>ph</a:t>
             </a:r>
             <a:endParaRPr lang="en-US" sz="900" dirty="0"/>
           </a:p>
@@ -33856,7 +34138,7 @@
       </p:sp>
       <p:sp>
         <p:nvSpPr>
-          <p:cNvPr id="46" name="Text 44"/>
+          <p:cNvPr id="52" name="Text 50"/>
           <p:cNvSpPr/>
           <p:nvPr/>
         </p:nvSpPr>
@@ -33887,7 +34169,7 @@
                 <a:ea typeface="Calibri" pitchFamily="34" charset="-122"/>
                 <a:cs typeface="Calibri" pitchFamily="34" charset="-120"/>
               </a:rPr>
-              <a:t>/k/</a:t>
+              <a:t>/f/</a:t>
             </a:r>
             <a:endParaRPr lang="en-US" sz="750" dirty="0"/>
           </a:p>
@@ -33895,7 +34177,7 @@
       </p:sp>
       <p:sp>
         <p:nvSpPr>
-          <p:cNvPr id="47" name="Shape 45"/>
+          <p:cNvPr id="53" name="Shape 51"/>
           <p:cNvSpPr/>
           <p:nvPr/>
         </p:nvSpPr>
@@ -33922,7 +34204,7 @@
       </p:sp>
       <p:sp>
         <p:nvSpPr>
-          <p:cNvPr id="48" name="Text 46"/>
+          <p:cNvPr id="54" name="Text 52"/>
           <p:cNvSpPr/>
           <p:nvPr/>
         </p:nvSpPr>
@@ -33953,7 +34235,7 @@
                 <a:ea typeface="Trebuchet MS" pitchFamily="34" charset="-122"/>
                 <a:cs typeface="Trebuchet MS" pitchFamily="34" charset="-120"/>
               </a:rPr>
-              <a:t>o</a:t>
+              <a:t>er</a:t>
             </a:r>
             <a:endParaRPr lang="en-US" sz="900" dirty="0"/>
           </a:p>
@@ -33961,7 +34243,7 @@
       </p:sp>
       <p:sp>
         <p:nvSpPr>
-          <p:cNvPr id="49" name="Shape 47"/>
+          <p:cNvPr id="55" name="Shape 53"/>
           <p:cNvSpPr/>
           <p:nvPr/>
         </p:nvSpPr>
@@ -33988,7 +34270,7 @@
       </p:sp>
       <p:sp>
         <p:nvSpPr>
-          <p:cNvPr id="50" name="Text 48"/>
+          <p:cNvPr id="56" name="Text 54"/>
           <p:cNvSpPr/>
           <p:nvPr/>
         </p:nvSpPr>
@@ -34019,7 +34301,7 @@
                 <a:ea typeface="Trebuchet MS" pitchFamily="34" charset="-122"/>
                 <a:cs typeface="Trebuchet MS" pitchFamily="34" charset="-120"/>
               </a:rPr>
-              <a:t>p</a:t>
+              <a:t>a</a:t>
             </a:r>
             <a:endParaRPr lang="en-US" sz="900" dirty="0"/>
           </a:p>
@@ -34027,7 +34309,7 @@
       </p:sp>
       <p:sp>
         <p:nvSpPr>
-          <p:cNvPr id="51" name="Shape 49"/>
+          <p:cNvPr id="57" name="Shape 55"/>
           <p:cNvSpPr/>
           <p:nvPr/>
         </p:nvSpPr>
@@ -34054,7 +34336,7 @@
       </p:sp>
       <p:sp>
         <p:nvSpPr>
-          <p:cNvPr id="52" name="Text 50"/>
+          <p:cNvPr id="58" name="Text 56"/>
           <p:cNvSpPr/>
           <p:nvPr/>
         </p:nvSpPr>
@@ -34085,7 +34367,7 @@
                 <a:ea typeface="Trebuchet MS" pitchFamily="34" charset="-122"/>
                 <a:cs typeface="Trebuchet MS" pitchFamily="34" charset="-120"/>
               </a:rPr>
-              <a:t>e</a:t>
+              <a:t>l</a:t>
             </a:r>
             <a:endParaRPr lang="en-US" sz="900" dirty="0"/>
           </a:p>
@@ -36039,7 +36321,7 @@
                 <a:ea typeface="Trebuchet MS" pitchFamily="34" charset="-122"/>
                 <a:cs typeface="Trebuchet MS" pitchFamily="34" charset="-120"/>
               </a:rPr>
-              <a:t>hyper-</a:t>
+              <a:t>epi-</a:t>
             </a:r>
             <a:endParaRPr lang="en-US" sz="1300" dirty="0"/>
           </a:p>
@@ -36192,7 +36474,7 @@
                 <a:ea typeface="Trebuchet MS" pitchFamily="34" charset="-122"/>
                 <a:cs typeface="Trebuchet MS" pitchFamily="34" charset="-120"/>
               </a:rPr>
-              <a:t>im-</a:t>
+              <a:t>hyper-</a:t>
             </a:r>
             <a:endParaRPr lang="en-US" sz="1300" dirty="0"/>
           </a:p>
@@ -36345,7 +36627,7 @@
                 <a:ea typeface="Trebuchet MS" pitchFamily="34" charset="-122"/>
                 <a:cs typeface="Trebuchet MS" pitchFamily="34" charset="-120"/>
               </a:rPr>
-              <a:t>re-</a:t>
+              <a:t>im-</a:t>
             </a:r>
             <a:endParaRPr lang="en-US" sz="1300" dirty="0"/>
           </a:p>
@@ -36498,7 +36780,7 @@
                 <a:ea typeface="Trebuchet MS" pitchFamily="34" charset="-122"/>
                 <a:cs typeface="Trebuchet MS" pitchFamily="34" charset="-120"/>
               </a:rPr>
-              <a:t>un-</a:t>
+              <a:t>pro-</a:t>
             </a:r>
             <a:endParaRPr lang="en-US" sz="1300" dirty="0"/>
           </a:p>
@@ -36587,7 +36869,7 @@
                 <a:ea typeface="Trebuchet MS" pitchFamily="34" charset="-122"/>
                 <a:cs typeface="Trebuchet MS" pitchFamily="34" charset="-120"/>
               </a:rPr>
-              <a:t>-winkle</a:t>
+              <a:t>-style</a:t>
             </a:r>
             <a:endParaRPr lang="en-US" sz="1300" dirty="0"/>
           </a:p>
@@ -36758,7 +37040,7 @@
                 <a:ea typeface="Trebuchet MS" pitchFamily="34" charset="-122"/>
                 <a:cs typeface="Trebuchet MS" pitchFamily="34" charset="-120"/>
               </a:rPr>
-              <a:t>periscope</a:t>
+              <a:t>period</a:t>
             </a:r>
             <a:endParaRPr lang="en-US" sz="1200" dirty="0"/>
           </a:p>
@@ -36824,7 +37106,7 @@
                 <a:ea typeface="Trebuchet MS" pitchFamily="34" charset="-122"/>
                 <a:cs typeface="Trebuchet MS" pitchFamily="34" charset="-120"/>
               </a:rPr>
-              <a:t>period</a:t>
+              <a:t>periscope</a:t>
             </a:r>
             <a:endParaRPr lang="en-US" sz="1200" dirty="0"/>
           </a:p>
@@ -36956,7 +37238,7 @@
                 <a:ea typeface="Trebuchet MS" pitchFamily="34" charset="-122"/>
                 <a:cs typeface="Trebuchet MS" pitchFamily="34" charset="-120"/>
               </a:rPr>
-              <a:t>perihelion</a:t>
+              <a:t>perigee</a:t>
             </a:r>
             <a:endParaRPr lang="en-US" sz="1200" dirty="0"/>
           </a:p>
@@ -37022,7 +37304,7 @@
                 <a:ea typeface="Trebuchet MS" pitchFamily="34" charset="-122"/>
                 <a:cs typeface="Trebuchet MS" pitchFamily="34" charset="-120"/>
               </a:rPr>
-              <a:t>pericardium</a:t>
+              <a:t>perihelion</a:t>
             </a:r>
             <a:endParaRPr lang="en-US" sz="1200" dirty="0"/>
           </a:p>
@@ -37088,7 +37370,7 @@
                 <a:ea typeface="Trebuchet MS" pitchFamily="34" charset="-122"/>
                 <a:cs typeface="Trebuchet MS" pitchFamily="34" charset="-120"/>
               </a:rPr>
-              <a:t>perigee</a:t>
+              <a:t>pericardium</a:t>
             </a:r>
             <a:endParaRPr lang="en-US" sz="1200" dirty="0"/>
           </a:p>
@@ -37154,7 +37436,7 @@
                 <a:ea typeface="Trebuchet MS" pitchFamily="34" charset="-122"/>
                 <a:cs typeface="Trebuchet MS" pitchFamily="34" charset="-120"/>
               </a:rPr>
-              <a:t>periwinkle</a:t>
+              <a:t>periodical</a:t>
             </a:r>
             <a:endParaRPr lang="en-US" sz="1200" dirty="0"/>
           </a:p>
@@ -38342,7 +38624,7 @@
                 <a:ea typeface="Calibri" pitchFamily="34" charset="-122"/>
                 <a:cs typeface="Calibri" pitchFamily="34" charset="-120"/>
               </a:rPr>
-              <a:t>1.  The morpheme 'peri' means 'around' or 'surrounding'.</a:t>
+              <a:t>1.  A perimeter measures the distance around the outside of a shape.</a:t>
             </a:r>
             <a:endParaRPr lang="en-US" sz="1300" dirty="0"/>
           </a:p>
@@ -38481,7 +38763,7 @@
                 <a:ea typeface="Calibri" pitchFamily="34" charset="-122"/>
                 <a:cs typeface="Calibri" pitchFamily="34" charset="-120"/>
               </a:rPr>
-              <a:t>2.  The word 'perimeter' means the area inside a shape.</a:t>
+              <a:t>2.  A periscope uses mirrors to see around or above obstacles.</a:t>
             </a:r>
             <a:endParaRPr lang="en-US" sz="1300" dirty="0"/>
           </a:p>
@@ -38504,11 +38786,11 @@
             </a:avLst>
           </a:prstGeom>
           <a:solidFill>
-            <a:srgbClr val="FEE2E2"/>
-          </a:solidFill>
-          <a:ln w="12700">
-            <a:solidFill>
-              <a:srgbClr val="DC2626"/>
+            <a:srgbClr val="DCFCE7"/>
+          </a:solidFill>
+          <a:ln w="12700">
+            <a:solidFill>
+              <a:srgbClr val="16A34A"/>
             </a:solidFill>
             <a:prstDash val="solid"/>
           </a:ln>
@@ -38541,13 +38823,13 @@
             <a:r>
               <a:rPr lang="en-US" sz="1100" b="1" dirty="0">
                 <a:solidFill>
-                  <a:srgbClr val="DC2626"/>
+                  <a:srgbClr val="16A34A"/>
                 </a:solidFill>
                 <a:latin typeface="Trebuchet MS" pitchFamily="34" charset="0"/>
                 <a:ea typeface="Trebuchet MS" pitchFamily="34" charset="-122"/>
                 <a:cs typeface="Trebuchet MS" pitchFamily="34" charset="-120"/>
               </a:rPr>
-              <a:t>FALSE</a:t>
+              <a:t>TRUE</a:t>
             </a:r>
             <a:endParaRPr lang="en-US" sz="1100" dirty="0"/>
           </a:p>
@@ -38620,7 +38902,7 @@
                 <a:ea typeface="Calibri" pitchFamily="34" charset="-122"/>
                 <a:cs typeface="Calibri" pitchFamily="34" charset="-120"/>
               </a:rPr>
-              <a:t>3.  A periscope helps you see around or over obstacles.</a:t>
+              <a:t>3.  The morpheme 'peri' means 'inside' or 'within'.</a:t>
             </a:r>
             <a:endParaRPr lang="en-US" sz="1300" dirty="0"/>
           </a:p>
@@ -38643,11 +38925,11 @@
             </a:avLst>
           </a:prstGeom>
           <a:solidFill>
-            <a:srgbClr val="DCFCE7"/>
-          </a:solidFill>
-          <a:ln w="12700">
-            <a:solidFill>
-              <a:srgbClr val="16A34A"/>
+            <a:srgbClr val="FEE2E2"/>
+          </a:solidFill>
+          <a:ln w="12700">
+            <a:solidFill>
+              <a:srgbClr val="DC2626"/>
             </a:solidFill>
             <a:prstDash val="solid"/>
           </a:ln>
@@ -38680,13 +38962,13 @@
             <a:r>
               <a:rPr lang="en-US" sz="1100" b="1" dirty="0">
                 <a:solidFill>
-                  <a:srgbClr val="16A34A"/>
+                  <a:srgbClr val="DC2626"/>
                 </a:solidFill>
                 <a:latin typeface="Trebuchet MS" pitchFamily="34" charset="0"/>
                 <a:ea typeface="Trebuchet MS" pitchFamily="34" charset="-122"/>
                 <a:cs typeface="Trebuchet MS" pitchFamily="34" charset="-120"/>
               </a:rPr>
-              <a:t>TRUE</a:t>
+              <a:t>FALSE</a:t>
             </a:r>
             <a:endParaRPr lang="en-US" sz="1100" dirty="0"/>
           </a:p>
@@ -38898,7 +39180,7 @@
                 <a:ea typeface="Calibri" pitchFamily="34" charset="-122"/>
                 <a:cs typeface="Calibri" pitchFamily="34" charset="-120"/>
               </a:rPr>
-              <a:t>5.  The morpheme 'peri' means 'before' or 'in front of'.</a:t>
+              <a:t>5.  The word 'periscope' has nothing to do with the morpheme 'peri'.</a:t>
             </a:r>
             <a:endParaRPr lang="en-US" sz="1300" dirty="0"/>
           </a:p>
@@ -39603,7 +39885,7 @@
                 <a:ea typeface="Trebuchet MS" pitchFamily="34" charset="-122"/>
                 <a:cs typeface="Trebuchet MS" pitchFamily="34" charset="-120"/>
               </a:rPr>
-              <a:t>periscope</a:t>
+              <a:t>period</a:t>
             </a:r>
             <a:endParaRPr lang="en-US" sz="1300" dirty="0"/>
           </a:p>
@@ -39669,7 +39951,7 @@
                 <a:ea typeface="Trebuchet MS" pitchFamily="34" charset="-122"/>
                 <a:cs typeface="Trebuchet MS" pitchFamily="34" charset="-120"/>
               </a:rPr>
-              <a:t>period</a:t>
+              <a:t>periscope</a:t>
             </a:r>
             <a:endParaRPr lang="en-US" sz="1300" dirty="0"/>
           </a:p>
@@ -39801,7 +40083,7 @@
                 <a:ea typeface="Trebuchet MS" pitchFamily="34" charset="-122"/>
                 <a:cs typeface="Trebuchet MS" pitchFamily="34" charset="-120"/>
               </a:rPr>
-              <a:t>perihelion</a:t>
+              <a:t>perigee</a:t>
             </a:r>
             <a:endParaRPr lang="en-US" sz="1300" dirty="0"/>
           </a:p>
@@ -39867,7 +40149,7 @@
                 <a:ea typeface="Trebuchet MS" pitchFamily="34" charset="-122"/>
                 <a:cs typeface="Trebuchet MS" pitchFamily="34" charset="-120"/>
               </a:rPr>
-              <a:t>pericardium</a:t>
+              <a:t>perihelion</a:t>
             </a:r>
             <a:endParaRPr lang="en-US" sz="1300" dirty="0"/>
           </a:p>
@@ -39933,7 +40215,7 @@
                 <a:ea typeface="Trebuchet MS" pitchFamily="34" charset="-122"/>
                 <a:cs typeface="Trebuchet MS" pitchFamily="34" charset="-120"/>
               </a:rPr>
-              <a:t>perigee</a:t>
+              <a:t>pericardium</a:t>
             </a:r>
             <a:endParaRPr lang="en-US" sz="1300" dirty="0"/>
           </a:p>
@@ -40718,7 +41000,7 @@
                 <a:ea typeface="Trebuchet MS" pitchFamily="34" charset="-122"/>
                 <a:cs typeface="Trebuchet MS" pitchFamily="34" charset="-120"/>
               </a:rPr>
-              <a:t>hyper-</a:t>
+              <a:t>epi-</a:t>
             </a:r>
             <a:endParaRPr lang="en-US" sz="1300" dirty="0"/>
           </a:p>
@@ -40871,7 +41153,7 @@
                 <a:ea typeface="Trebuchet MS" pitchFamily="34" charset="-122"/>
                 <a:cs typeface="Trebuchet MS" pitchFamily="34" charset="-120"/>
               </a:rPr>
-              <a:t>im-</a:t>
+              <a:t>hyper-</a:t>
             </a:r>
             <a:endParaRPr lang="en-US" sz="1300" dirty="0"/>
           </a:p>
@@ -41024,7 +41306,7 @@
                 <a:ea typeface="Trebuchet MS" pitchFamily="34" charset="-122"/>
                 <a:cs typeface="Trebuchet MS" pitchFamily="34" charset="-120"/>
               </a:rPr>
-              <a:t>re-</a:t>
+              <a:t>im-</a:t>
             </a:r>
             <a:endParaRPr lang="en-US" sz="1300" dirty="0"/>
           </a:p>
@@ -41177,7 +41459,7 @@
                 <a:ea typeface="Trebuchet MS" pitchFamily="34" charset="-122"/>
                 <a:cs typeface="Trebuchet MS" pitchFamily="34" charset="-120"/>
               </a:rPr>
-              <a:t>un-</a:t>
+              <a:t>pro-</a:t>
             </a:r>
             <a:endParaRPr lang="en-US" sz="1300" dirty="0"/>
           </a:p>
@@ -41266,7 +41548,7 @@
                 <a:ea typeface="Trebuchet MS" pitchFamily="34" charset="-122"/>
                 <a:cs typeface="Trebuchet MS" pitchFamily="34" charset="-120"/>
               </a:rPr>
-              <a:t>-winkle</a:t>
+              <a:t>-style</a:t>
             </a:r>
             <a:endParaRPr lang="en-US" sz="1300" dirty="0"/>
           </a:p>
@@ -42177,7 +42459,7 @@
                 <a:ea typeface="Calibri" pitchFamily="34" charset="-122"/>
                 <a:cs typeface="Calibri" pitchFamily="34" charset="-120"/>
               </a:rPr>
-              <a:t>A stretch of time, or a punctuation mark at the end of a sentence.</a:t>
+              <a:t>A tube with mirrors used to see around corners or above water, like on a submarine.</a:t>
             </a:r>
             <a:endParaRPr lang="en-US" sz="1200" dirty="0"/>
           </a:p>
@@ -42250,7 +42532,7 @@
                 <a:ea typeface="Trebuchet MS" pitchFamily="34" charset="-122"/>
                 <a:cs typeface="Trebuchet MS" pitchFamily="34" charset="-120"/>
               </a:rPr>
-              <a:t>periscope</a:t>
+              <a:t>period</a:t>
             </a:r>
             <a:endParaRPr lang="en-US" sz="1200" dirty="0"/>
           </a:p>
@@ -42316,7 +42598,7 @@
                 <a:ea typeface="Calibri" pitchFamily="34" charset="-122"/>
                 <a:cs typeface="Calibri" pitchFamily="34" charset="-120"/>
               </a:rPr>
-              <a:t>The point in a planet's orbit when it is closest to the Sun.</a:t>
+              <a:t>The point in the Moon's orbit when it is closest to Earth.</a:t>
             </a:r>
             <a:endParaRPr lang="en-US" sz="1200" dirty="0"/>
           </a:p>
@@ -42389,7 +42671,7 @@
                 <a:ea typeface="Trebuchet MS" pitchFamily="34" charset="-122"/>
                 <a:cs typeface="Trebuchet MS" pitchFamily="34" charset="-120"/>
               </a:rPr>
-              <a:t>period</a:t>
+              <a:t>periscope</a:t>
             </a:r>
             <a:endParaRPr lang="en-US" sz="1200" dirty="0"/>
           </a:p>
@@ -42594,7 +42876,7 @@
                 <a:ea typeface="Calibri" pitchFamily="34" charset="-122"/>
                 <a:cs typeface="Calibri" pitchFamily="34" charset="-120"/>
               </a:rPr>
-              <a:t>The thin sac of tissue that surrounds and protects your heart.</a:t>
+              <a:t>The point in a planet's orbit when it is closest to the Sun.</a:t>
             </a:r>
             <a:endParaRPr lang="en-US" sz="1200" dirty="0"/>
           </a:p>
@@ -42667,7 +42949,7 @@
                 <a:ea typeface="Trebuchet MS" pitchFamily="34" charset="-122"/>
                 <a:cs typeface="Trebuchet MS" pitchFamily="34" charset="-120"/>
               </a:rPr>
-              <a:t>perihelion</a:t>
+              <a:t>perigee</a:t>
             </a:r>
             <a:endParaRPr lang="en-US" sz="1200" dirty="0"/>
           </a:p>
@@ -42733,7 +43015,7 @@
                 <a:ea typeface="Calibri" pitchFamily="34" charset="-122"/>
                 <a:cs typeface="Calibri" pitchFamily="34" charset="-120"/>
               </a:rPr>
-              <a:t>The point in the Moon's orbit when it is closest to Earth.</a:t>
+              <a:t>The thin layer of tissue that wraps around and protects the heart.</a:t>
             </a:r>
             <a:endParaRPr lang="en-US" sz="1200" dirty="0"/>
           </a:p>
@@ -42806,7 +43088,7 @@
                 <a:ea typeface="Trebuchet MS" pitchFamily="34" charset="-122"/>
                 <a:cs typeface="Trebuchet MS" pitchFamily="34" charset="-120"/>
               </a:rPr>
-              <a:t>pericardium</a:t>
+              <a:t>perihelion</a:t>
             </a:r>
             <a:endParaRPr lang="en-US" sz="1200" dirty="0"/>
           </a:p>
@@ -42872,7 +43154,7 @@
                 <a:ea typeface="Calibri" pitchFamily="34" charset="-122"/>
                 <a:cs typeface="Calibri" pitchFamily="34" charset="-120"/>
               </a:rPr>
-              <a:t>Something on the outer edge or not the main part, like what you see at the sides of your eyes.</a:t>
+              <a:t>Something on the outer edge or side, not in the centre.</a:t>
             </a:r>
             <a:endParaRPr lang="en-US" sz="1200" dirty="0"/>
           </a:p>
@@ -42945,7 +43227,7 @@
                 <a:ea typeface="Trebuchet MS" pitchFamily="34" charset="-122"/>
                 <a:cs typeface="Trebuchet MS" pitchFamily="34" charset="-120"/>
               </a:rPr>
-              <a:t>perigee</a:t>
+              <a:t>pericardium</a:t>
             </a:r>
             <a:endParaRPr lang="en-US" sz="1200" dirty="0"/>
           </a:p>
@@ -43011,7 +43293,7 @@
                 <a:ea typeface="Calibri" pitchFamily="34" charset="-122"/>
                 <a:cs typeface="Calibri" pitchFamily="34" charset="-120"/>
               </a:rPr>
-              <a:t>A tube with mirrors that lets you see around corners or above water, used in submarines.</a:t>
+              <a:t>A length of time, or a full stop at the end of a sentence.</a:t>
             </a:r>
             <a:endParaRPr lang="en-US" sz="1200" dirty="0"/>
           </a:p>
@@ -43506,7 +43788,7 @@
                 <a:ea typeface="Calibri" pitchFamily="34" charset="-122"/>
                 <a:cs typeface="Calibri" pitchFamily="34" charset="-120"/>
               </a:rPr>
-              <a:t>We used a ruler to measure the perimeter of the rectangle by adding up all four sides.</a:t>
+              <a:t>We used a ruler to measure the perimeter of the rectangle in maths today.</a:t>
             </a:r>
             <a:endParaRPr lang="en-US" sz="1500" dirty="0"/>
           </a:p>
@@ -43670,7 +43952,7 @@
                 <a:ea typeface="Calibri" pitchFamily="34" charset="-122"/>
                 <a:cs typeface="Calibri" pitchFamily="34" charset="-120"/>
               </a:rPr>
-              <a:t>The submarine crew used a periscope to look above the surface of the water without being seen.</a:t>
+              <a:t>The submarine crew looked through the periscope to check if the coast was clear.</a:t>
             </a:r>
             <a:endParaRPr lang="en-US" sz="1500" dirty="0"/>
           </a:p>
